--- a/docs/ConvolutionInfographic.pptx
+++ b/docs/ConvolutionInfographic.pptx
@@ -11,6 +11,8 @@
     <p:sldId id="260" r:id="rId5"/>
     <p:sldId id="258" r:id="rId6"/>
     <p:sldId id="261" r:id="rId7"/>
+    <p:sldId id="262" r:id="rId8"/>
+    <p:sldId id="263" r:id="rId9"/>
   </p:sldIdLst>
   <p:sldSz cx="10058400" cy="7772400"/>
   <p:notesSz cx="6858000" cy="9144000"/>
@@ -256,7 +258,7 @@
           <a:p>
             <a:fld id="{F2091B7E-1B7F-4ED2-AE97-2601DE127A0D}" type="datetimeFigureOut">
               <a:rPr lang="en-US" smtClean="0"/>
-              <a:t>3/19/2025</a:t>
+              <a:t>9/4/2025</a:t>
             </a:fld>
             <a:endParaRPr lang="en-US"/>
           </a:p>
@@ -426,7 +428,7 @@
           <a:p>
             <a:fld id="{F2091B7E-1B7F-4ED2-AE97-2601DE127A0D}" type="datetimeFigureOut">
               <a:rPr lang="en-US" smtClean="0"/>
-              <a:t>3/19/2025</a:t>
+              <a:t>9/4/2025</a:t>
             </a:fld>
             <a:endParaRPr lang="en-US"/>
           </a:p>
@@ -606,7 +608,7 @@
           <a:p>
             <a:fld id="{F2091B7E-1B7F-4ED2-AE97-2601DE127A0D}" type="datetimeFigureOut">
               <a:rPr lang="en-US" smtClean="0"/>
-              <a:t>3/19/2025</a:t>
+              <a:t>9/4/2025</a:t>
             </a:fld>
             <a:endParaRPr lang="en-US"/>
           </a:p>
@@ -776,7 +778,7 @@
           <a:p>
             <a:fld id="{F2091B7E-1B7F-4ED2-AE97-2601DE127A0D}" type="datetimeFigureOut">
               <a:rPr lang="en-US" smtClean="0"/>
-              <a:t>3/19/2025</a:t>
+              <a:t>9/4/2025</a:t>
             </a:fld>
             <a:endParaRPr lang="en-US"/>
           </a:p>
@@ -1022,7 +1024,7 @@
           <a:p>
             <a:fld id="{F2091B7E-1B7F-4ED2-AE97-2601DE127A0D}" type="datetimeFigureOut">
               <a:rPr lang="en-US" smtClean="0"/>
-              <a:t>3/19/2025</a:t>
+              <a:t>9/4/2025</a:t>
             </a:fld>
             <a:endParaRPr lang="en-US"/>
           </a:p>
@@ -1254,7 +1256,7 @@
           <a:p>
             <a:fld id="{F2091B7E-1B7F-4ED2-AE97-2601DE127A0D}" type="datetimeFigureOut">
               <a:rPr lang="en-US" smtClean="0"/>
-              <a:t>3/19/2025</a:t>
+              <a:t>9/4/2025</a:t>
             </a:fld>
             <a:endParaRPr lang="en-US"/>
           </a:p>
@@ -1621,7 +1623,7 @@
           <a:p>
             <a:fld id="{F2091B7E-1B7F-4ED2-AE97-2601DE127A0D}" type="datetimeFigureOut">
               <a:rPr lang="en-US" smtClean="0"/>
-              <a:t>3/19/2025</a:t>
+              <a:t>9/4/2025</a:t>
             </a:fld>
             <a:endParaRPr lang="en-US"/>
           </a:p>
@@ -1739,7 +1741,7 @@
           <a:p>
             <a:fld id="{F2091B7E-1B7F-4ED2-AE97-2601DE127A0D}" type="datetimeFigureOut">
               <a:rPr lang="en-US" smtClean="0"/>
-              <a:t>3/19/2025</a:t>
+              <a:t>9/4/2025</a:t>
             </a:fld>
             <a:endParaRPr lang="en-US"/>
           </a:p>
@@ -1834,7 +1836,7 @@
           <a:p>
             <a:fld id="{F2091B7E-1B7F-4ED2-AE97-2601DE127A0D}" type="datetimeFigureOut">
               <a:rPr lang="en-US" smtClean="0"/>
-              <a:t>3/19/2025</a:t>
+              <a:t>9/4/2025</a:t>
             </a:fld>
             <a:endParaRPr lang="en-US"/>
           </a:p>
@@ -2111,7 +2113,7 @@
           <a:p>
             <a:fld id="{F2091B7E-1B7F-4ED2-AE97-2601DE127A0D}" type="datetimeFigureOut">
               <a:rPr lang="en-US" smtClean="0"/>
-              <a:t>3/19/2025</a:t>
+              <a:t>9/4/2025</a:t>
             </a:fld>
             <a:endParaRPr lang="en-US"/>
           </a:p>
@@ -2368,7 +2370,7 @@
           <a:p>
             <a:fld id="{F2091B7E-1B7F-4ED2-AE97-2601DE127A0D}" type="datetimeFigureOut">
               <a:rPr lang="en-US" smtClean="0"/>
-              <a:t>3/19/2025</a:t>
+              <a:t>9/4/2025</a:t>
             </a:fld>
             <a:endParaRPr lang="en-US"/>
           </a:p>
@@ -2581,7 +2583,7 @@
           <a:p>
             <a:fld id="{F2091B7E-1B7F-4ED2-AE97-2601DE127A0D}" type="datetimeFigureOut">
               <a:rPr lang="en-US" smtClean="0"/>
-              <a:t>3/19/2025</a:t>
+              <a:t>9/4/2025</a:t>
             </a:fld>
             <a:endParaRPr lang="en-US"/>
           </a:p>
@@ -6102,13 +6104,13 @@
           <p:nvPr>
             <p:extLst>
               <p:ext uri="{D42A27DB-BD31-4B8C-83A1-F6EECF244321}">
-                <p14:modId xmlns:p14="http://schemas.microsoft.com/office/powerpoint/2010/main" val="2319039473"/>
+                <p14:modId xmlns:p14="http://schemas.microsoft.com/office/powerpoint/2010/main" val="303515907"/>
               </p:ext>
             </p:extLst>
           </p:nvPr>
         </p:nvGraphicFramePr>
         <p:xfrm>
-          <a:off x="6892741" y="2891275"/>
+          <a:off x="6888695" y="2678880"/>
           <a:ext cx="3154110" cy="236410"/>
         </p:xfrm>
         <a:graphic>
@@ -6456,7 +6458,7 @@
             </p:nvSpPr>
             <p:spPr>
               <a:xfrm>
-                <a:off x="20798" y="3137866"/>
+                <a:off x="43627" y="3806477"/>
                 <a:ext cx="3590847" cy="821059"/>
               </a:xfrm>
               <a:prstGeom prst="rect">
@@ -6546,7 +6548,7 @@
                             <m:rPr>
                               <m:brk m:alnAt="23"/>
                             </m:rPr>
-                            <a:rPr lang="en-US" sz="1873" i="1">
+                            <a:rPr lang="en-US" sz="1873" i="1" smtClean="0">
                               <a:latin typeface="Cambria Math" panose="02040503050406030204" pitchFamily="18" charset="0"/>
                             </a:rPr>
                             <m:t>𝑛</m:t>
@@ -6700,7 +6702,7 @@
             </p:nvSpPr>
             <p:spPr>
               <a:xfrm>
-                <a:off x="20798" y="3137866"/>
+                <a:off x="43627" y="3806477"/>
                 <a:ext cx="3590847" cy="821059"/>
               </a:xfrm>
               <a:prstGeom prst="rect">
@@ -10287,13 +10289,13 @@
           <p:nvPr>
             <p:extLst>
               <p:ext uri="{D42A27DB-BD31-4B8C-83A1-F6EECF244321}">
-                <p14:modId xmlns:p14="http://schemas.microsoft.com/office/powerpoint/2010/main" val="3044989086"/>
+                <p14:modId xmlns:p14="http://schemas.microsoft.com/office/powerpoint/2010/main" val="2072348901"/>
               </p:ext>
             </p:extLst>
           </p:nvPr>
         </p:nvGraphicFramePr>
         <p:xfrm>
-          <a:off x="6892743" y="2641723"/>
+          <a:off x="6888697" y="2429328"/>
           <a:ext cx="3165657" cy="236410"/>
         </p:xfrm>
         <a:graphic>
@@ -10636,8 +10638,8 @@
             </p:nvSpPr>
             <p:spPr>
               <a:xfrm>
-                <a:off x="3561370" y="2451890"/>
-                <a:ext cx="3165649" cy="810863"/>
+                <a:off x="3165658" y="2451890"/>
+                <a:ext cx="3561361" cy="810863"/>
               </a:xfrm>
               <a:prstGeom prst="rect">
                 <a:avLst/>
@@ -10660,7 +10662,7 @@
                       <m:sSub>
                         <m:sSubPr>
                           <m:ctrlPr>
-                            <a:rPr lang="en-US" sz="1873" i="1">
+                            <a:rPr lang="en-US" sz="1873" i="1" smtClean="0">
                               <a:latin typeface="Cambria Math" panose="02040503050406030204" pitchFamily="18" charset="0"/>
                             </a:rPr>
                           </m:ctrlPr>
@@ -10694,7 +10696,13 @@
                             <a:rPr lang="en-US" sz="1873" i="1">
                               <a:latin typeface="Cambria Math" panose="02040503050406030204" pitchFamily="18" charset="0"/>
                             </a:rPr>
-                            <m:t>)</m:t>
+                            <m:t>)(</m:t>
+                          </m:r>
+                          <m:r>
+                            <a:rPr lang="en-US" sz="1873" b="0" i="1" smtClean="0">
+                              <a:latin typeface="Cambria Math" panose="02040503050406030204" pitchFamily="18" charset="0"/>
+                            </a:rPr>
+                            <m:t>𝐸</m:t>
                           </m:r>
                         </m:e>
                         <m:sub>
@@ -10706,6 +10714,12 @@
                           </m:r>
                         </m:sub>
                       </m:sSub>
+                      <m:r>
+                        <a:rPr lang="en-US" sz="1873" b="0" i="1" smtClean="0">
+                          <a:latin typeface="Cambria Math" panose="02040503050406030204" pitchFamily="18" charset="0"/>
+                        </a:rPr>
+                        <m:t>)</m:t>
+                      </m:r>
                       <m:r>
                         <a:rPr lang="en-US" sz="1873" i="1">
                           <a:latin typeface="Cambria Math" panose="02040503050406030204" pitchFamily="18" charset="0"/>
@@ -10740,10 +10754,10 @@
                         </m:sub>
                         <m:sup>
                           <m:r>
-                            <a:rPr lang="en-US" sz="1873" i="1">
-                              <a:latin typeface="Cambria Math" panose="02040503050406030204" pitchFamily="18" charset="0"/>
-                            </a:rPr>
-                            <m:t>10</m:t>
+                            <a:rPr lang="en-US" sz="1873" b="0" i="1" smtClean="0">
+                              <a:latin typeface="Cambria Math" panose="02040503050406030204" pitchFamily="18" charset="0"/>
+                            </a:rPr>
+                            <m:t>9</m:t>
                           </m:r>
                         </m:sup>
                         <m:e>
@@ -10859,8 +10873,8 @@
             </p:nvSpPr>
             <p:spPr>
               <a:xfrm>
-                <a:off x="3561370" y="2451890"/>
-                <a:ext cx="3165649" cy="810863"/>
+                <a:off x="3165658" y="2451890"/>
+                <a:ext cx="3561361" cy="810863"/>
               </a:xfrm>
               <a:prstGeom prst="rect">
                 <a:avLst/>
@@ -10903,7 +10917,7 @@
             </p:nvSpPr>
             <p:spPr>
               <a:xfrm>
-                <a:off x="3402446" y="3327391"/>
+                <a:off x="3165658" y="3325743"/>
                 <a:ext cx="3590847" cy="810863"/>
               </a:xfrm>
               <a:prstGeom prst="rect">
@@ -10927,7 +10941,7 @@
                       <m:sSub>
                         <m:sSubPr>
                           <m:ctrlPr>
-                            <a:rPr lang="en-US" sz="1873" i="1">
+                            <a:rPr lang="en-US" sz="1873" i="1" smtClean="0">
                               <a:latin typeface="Cambria Math" panose="02040503050406030204" pitchFamily="18" charset="0"/>
                             </a:rPr>
                           </m:ctrlPr>
@@ -10961,7 +10975,13 @@
                             <a:rPr lang="en-US" sz="1873" i="1">
                               <a:latin typeface="Cambria Math" panose="02040503050406030204" pitchFamily="18" charset="0"/>
                             </a:rPr>
-                            <m:t>)</m:t>
+                            <m:t>)(</m:t>
+                          </m:r>
+                          <m:r>
+                            <a:rPr lang="en-US" sz="1873" b="0" i="1" smtClean="0">
+                              <a:latin typeface="Cambria Math" panose="02040503050406030204" pitchFamily="18" charset="0"/>
+                            </a:rPr>
+                            <m:t>𝐸</m:t>
                           </m:r>
                         </m:e>
                         <m:sub>
@@ -10973,6 +10993,12 @@
                           </m:r>
                         </m:sub>
                       </m:sSub>
+                      <m:r>
+                        <a:rPr lang="en-US" sz="1873" b="0" i="1" smtClean="0">
+                          <a:latin typeface="Cambria Math" panose="02040503050406030204" pitchFamily="18" charset="0"/>
+                        </a:rPr>
+                        <m:t>)</m:t>
+                      </m:r>
                       <m:r>
                         <a:rPr lang="en-US" sz="1873" i="1">
                           <a:latin typeface="Cambria Math" panose="02040503050406030204" pitchFamily="18" charset="0"/>
@@ -11002,15 +11028,21 @@
                             <a:rPr lang="en-US" sz="1873" i="1">
                               <a:latin typeface="Cambria Math" panose="02040503050406030204" pitchFamily="18" charset="0"/>
                             </a:rPr>
-                            <m:t>=0</m:t>
+                            <m:t>=</m:t>
+                          </m:r>
+                          <m:r>
+                            <a:rPr lang="en-US" sz="1873" b="0" i="1" smtClean="0">
+                              <a:latin typeface="Cambria Math" panose="02040503050406030204" pitchFamily="18" charset="0"/>
+                            </a:rPr>
+                            <m:t>0</m:t>
                           </m:r>
                         </m:sub>
                         <m:sup>
                           <m:r>
-                            <a:rPr lang="en-US" sz="1873" i="1">
-                              <a:latin typeface="Cambria Math" panose="02040503050406030204" pitchFamily="18" charset="0"/>
-                            </a:rPr>
-                            <m:t>10</m:t>
+                            <a:rPr lang="en-US" sz="1873" b="0" i="1" smtClean="0">
+                              <a:latin typeface="Cambria Math" panose="02040503050406030204" pitchFamily="18" charset="0"/>
+                            </a:rPr>
+                            <m:t>9</m:t>
                           </m:r>
                         </m:sup>
                         <m:e>
@@ -11126,7 +11158,7 @@
             </p:nvSpPr>
             <p:spPr>
               <a:xfrm>
-                <a:off x="3402446" y="3327391"/>
+                <a:off x="3165658" y="3325743"/>
                 <a:ext cx="3590847" cy="810863"/>
               </a:xfrm>
               <a:prstGeom prst="rect">
@@ -11170,8 +11202,8 @@
             </p:nvSpPr>
             <p:spPr>
               <a:xfrm>
-                <a:off x="3466932" y="4202892"/>
-                <a:ext cx="3361321" cy="810863"/>
+                <a:off x="3165658" y="4202892"/>
+                <a:ext cx="3662595" cy="810863"/>
               </a:xfrm>
               <a:prstGeom prst="rect">
                 <a:avLst/>
@@ -11194,41 +11226,52 @@
                       <m:sSub>
                         <m:sSubPr>
                           <m:ctrlPr>
-                            <a:rPr lang="en-US" sz="1873" i="1">
+                            <a:rPr lang="en-US" sz="1873" i="1" smtClean="0">
                               <a:latin typeface="Cambria Math" panose="02040503050406030204" pitchFamily="18" charset="0"/>
                             </a:rPr>
                           </m:ctrlPr>
                         </m:sSubPr>
                         <m:e>
+                          <m:d>
+                            <m:dPr>
+                              <m:ctrlPr>
+                                <a:rPr lang="en-US" sz="1873" i="1">
+                                  <a:latin typeface="Cambria Math" panose="02040503050406030204" pitchFamily="18" charset="0"/>
+                                </a:rPr>
+                              </m:ctrlPr>
+                            </m:dPr>
+                            <m:e>
+                              <m:r>
+                                <a:rPr lang="en-US" sz="1873" i="1">
+                                  <a:latin typeface="Cambria Math" panose="02040503050406030204" pitchFamily="18" charset="0"/>
+                                </a:rPr>
+                                <m:t>𝐺</m:t>
+                              </m:r>
+                              <m:r>
+                                <a:rPr lang="en-US" sz="1873" i="1">
+                                  <a:latin typeface="Cambria Math" panose="02040503050406030204" pitchFamily="18" charset="0"/>
+                                </a:rPr>
+                                <m:t>∗</m:t>
+                              </m:r>
+                              <m:r>
+                                <a:rPr lang="en-US" sz="1873" i="1">
+                                  <a:latin typeface="Cambria Math" panose="02040503050406030204" pitchFamily="18" charset="0"/>
+                                </a:rPr>
+                                <m:t>𝑆</m:t>
+                              </m:r>
+                            </m:e>
+                          </m:d>
                           <m:r>
-                            <a:rPr lang="en-US" sz="1873" i="1">
+                            <a:rPr lang="en-US" sz="1873" b="0" i="1" smtClean="0">
                               <a:latin typeface="Cambria Math" panose="02040503050406030204" pitchFamily="18" charset="0"/>
                             </a:rPr>
                             <m:t>(</m:t>
                           </m:r>
                           <m:r>
-                            <a:rPr lang="en-US" sz="1873" i="1">
-                              <a:latin typeface="Cambria Math" panose="02040503050406030204" pitchFamily="18" charset="0"/>
-                            </a:rPr>
-                            <m:t>𝐺</m:t>
-                          </m:r>
-                          <m:r>
-                            <a:rPr lang="en-US" sz="1873" i="1">
-                              <a:latin typeface="Cambria Math" panose="02040503050406030204" pitchFamily="18" charset="0"/>
-                            </a:rPr>
-                            <m:t>∗</m:t>
-                          </m:r>
-                          <m:r>
-                            <a:rPr lang="en-US" sz="1873" i="1">
-                              <a:latin typeface="Cambria Math" panose="02040503050406030204" pitchFamily="18" charset="0"/>
-                            </a:rPr>
-                            <m:t>𝑆</m:t>
-                          </m:r>
-                          <m:r>
-                            <a:rPr lang="en-US" sz="1873" i="1">
-                              <a:latin typeface="Cambria Math" panose="02040503050406030204" pitchFamily="18" charset="0"/>
-                            </a:rPr>
-                            <m:t>)</m:t>
+                            <a:rPr lang="en-US" sz="1873" b="0" i="1" smtClean="0">
+                              <a:latin typeface="Cambria Math" panose="02040503050406030204" pitchFamily="18" charset="0"/>
+                            </a:rPr>
+                            <m:t>𝐸</m:t>
                           </m:r>
                         </m:e>
                         <m:sub>
@@ -11240,6 +11283,12 @@
                           </m:r>
                         </m:sub>
                       </m:sSub>
+                      <m:r>
+                        <a:rPr lang="en-US" sz="1873" b="0" i="1" smtClean="0">
+                          <a:latin typeface="Cambria Math" panose="02040503050406030204" pitchFamily="18" charset="0"/>
+                        </a:rPr>
+                        <m:t>)</m:t>
+                      </m:r>
                       <m:r>
                         <a:rPr lang="en-US" sz="1873" i="1">
                           <a:latin typeface="Cambria Math" panose="02040503050406030204" pitchFamily="18" charset="0"/>
@@ -11274,10 +11323,10 @@
                         </m:sub>
                         <m:sup>
                           <m:r>
-                            <a:rPr lang="en-US" sz="1873" i="1">
-                              <a:latin typeface="Cambria Math" panose="02040503050406030204" pitchFamily="18" charset="0"/>
-                            </a:rPr>
-                            <m:t>10</m:t>
+                            <a:rPr lang="en-US" sz="1873" b="0" i="1" smtClean="0">
+                              <a:latin typeface="Cambria Math" panose="02040503050406030204" pitchFamily="18" charset="0"/>
+                            </a:rPr>
+                            <m:t>9</m:t>
                           </m:r>
                         </m:sup>
                         <m:e>
@@ -11393,8 +11442,8 @@
             </p:nvSpPr>
             <p:spPr>
               <a:xfrm>
-                <a:off x="3466932" y="4202892"/>
-                <a:ext cx="3361321" cy="810863"/>
+                <a:off x="3165658" y="4202892"/>
+                <a:ext cx="3662595" cy="810863"/>
               </a:xfrm>
               <a:prstGeom prst="rect">
                 <a:avLst/>
@@ -11964,6 +12013,319 @@
           </p:sp>
         </mc:Fallback>
       </mc:AlternateContent>
+      <p:graphicFrame>
+        <p:nvGraphicFramePr>
+          <p:cNvPr id="2" name="Table 1">
+            <a:extLst>
+              <a:ext uri="{FF2B5EF4-FFF2-40B4-BE49-F238E27FC236}">
+                <a16:creationId xmlns:a16="http://schemas.microsoft.com/office/drawing/2014/main" id="{6697F6BC-F372-2D05-6746-9B96E45ED49B}"/>
+              </a:ext>
+            </a:extLst>
+          </p:cNvPr>
+          <p:cNvGraphicFramePr>
+            <a:graphicFrameLocks noGrp="1"/>
+          </p:cNvGraphicFramePr>
+          <p:nvPr>
+            <p:extLst>
+              <p:ext uri="{D42A27DB-BD31-4B8C-83A1-F6EECF244321}">
+                <p14:modId xmlns:p14="http://schemas.microsoft.com/office/powerpoint/2010/main" val="189024871"/>
+              </p:ext>
+            </p:extLst>
+          </p:nvPr>
+        </p:nvGraphicFramePr>
+        <p:xfrm>
+          <a:off x="6888697" y="2937217"/>
+          <a:ext cx="3165657" cy="236410"/>
+        </p:xfrm>
+        <a:graphic>
+          <a:graphicData uri="http://schemas.openxmlformats.org/drawingml/2006/table">
+            <a:tbl>
+              <a:tblPr firstRow="1" bandRow="1">
+                <a:tableStyleId>{D7AC3CCA-C797-4891-BE02-D94E43425B78}</a:tableStyleId>
+              </a:tblPr>
+              <a:tblGrid>
+                <a:gridCol w="307635">
+                  <a:extLst>
+                    <a:ext uri="{9D8B030D-6E8A-4147-A177-3AD203B41FA5}">
+                      <a16:colId xmlns:a16="http://schemas.microsoft.com/office/drawing/2014/main" val="2876715563"/>
+                    </a:ext>
+                  </a:extLst>
+                </a:gridCol>
+                <a:gridCol w="317558">
+                  <a:extLst>
+                    <a:ext uri="{9D8B030D-6E8A-4147-A177-3AD203B41FA5}">
+                      <a16:colId xmlns:a16="http://schemas.microsoft.com/office/drawing/2014/main" val="2474985107"/>
+                    </a:ext>
+                  </a:extLst>
+                </a:gridCol>
+                <a:gridCol w="317558">
+                  <a:extLst>
+                    <a:ext uri="{9D8B030D-6E8A-4147-A177-3AD203B41FA5}">
+                      <a16:colId xmlns:a16="http://schemas.microsoft.com/office/drawing/2014/main" val="787096181"/>
+                    </a:ext>
+                  </a:extLst>
+                </a:gridCol>
+                <a:gridCol w="317558">
+                  <a:extLst>
+                    <a:ext uri="{9D8B030D-6E8A-4147-A177-3AD203B41FA5}">
+                      <a16:colId xmlns:a16="http://schemas.microsoft.com/office/drawing/2014/main" val="2114377886"/>
+                    </a:ext>
+                  </a:extLst>
+                </a:gridCol>
+                <a:gridCol w="317558">
+                  <a:extLst>
+                    <a:ext uri="{9D8B030D-6E8A-4147-A177-3AD203B41FA5}">
+                      <a16:colId xmlns:a16="http://schemas.microsoft.com/office/drawing/2014/main" val="2582381794"/>
+                    </a:ext>
+                  </a:extLst>
+                </a:gridCol>
+                <a:gridCol w="317558">
+                  <a:extLst>
+                    <a:ext uri="{9D8B030D-6E8A-4147-A177-3AD203B41FA5}">
+                      <a16:colId xmlns:a16="http://schemas.microsoft.com/office/drawing/2014/main" val="2040112073"/>
+                    </a:ext>
+                  </a:extLst>
+                </a:gridCol>
+                <a:gridCol w="317558">
+                  <a:extLst>
+                    <a:ext uri="{9D8B030D-6E8A-4147-A177-3AD203B41FA5}">
+                      <a16:colId xmlns:a16="http://schemas.microsoft.com/office/drawing/2014/main" val="2244141508"/>
+                    </a:ext>
+                  </a:extLst>
+                </a:gridCol>
+                <a:gridCol w="317558">
+                  <a:extLst>
+                    <a:ext uri="{9D8B030D-6E8A-4147-A177-3AD203B41FA5}">
+                      <a16:colId xmlns:a16="http://schemas.microsoft.com/office/drawing/2014/main" val="3361518297"/>
+                    </a:ext>
+                  </a:extLst>
+                </a:gridCol>
+                <a:gridCol w="317558">
+                  <a:extLst>
+                    <a:ext uri="{9D8B030D-6E8A-4147-A177-3AD203B41FA5}">
+                      <a16:colId xmlns:a16="http://schemas.microsoft.com/office/drawing/2014/main" val="3084638701"/>
+                    </a:ext>
+                  </a:extLst>
+                </a:gridCol>
+                <a:gridCol w="317558">
+                  <a:extLst>
+                    <a:ext uri="{9D8B030D-6E8A-4147-A177-3AD203B41FA5}">
+                      <a16:colId xmlns:a16="http://schemas.microsoft.com/office/drawing/2014/main" val="115540224"/>
+                    </a:ext>
+                  </a:extLst>
+                </a:gridCol>
+              </a:tblGrid>
+              <a:tr h="236410">
+                <a:tc>
+                  <a:txBody>
+                    <a:bodyPr/>
+                    <a:lstStyle/>
+                    <a:p>
+                      <a:r>
+                        <a:rPr lang="en-US" sz="1100" b="0" dirty="0">
+                          <a:ln>
+                            <a:noFill/>
+                          </a:ln>
+                          <a:solidFill>
+                            <a:schemeClr val="tx1"/>
+                          </a:solidFill>
+                        </a:rPr>
+                        <a:t>1</a:t>
+                      </a:r>
+                    </a:p>
+                  </a:txBody>
+                  <a:tcPr marL="58293" marR="58293" marT="29146" marB="29146"/>
+                </a:tc>
+                <a:tc>
+                  <a:txBody>
+                    <a:bodyPr/>
+                    <a:lstStyle/>
+                    <a:p>
+                      <a:r>
+                        <a:rPr lang="en-US" sz="1100" b="0" dirty="0">
+                          <a:ln>
+                            <a:noFill/>
+                          </a:ln>
+                          <a:solidFill>
+                            <a:schemeClr val="tx1"/>
+                          </a:solidFill>
+                        </a:rPr>
+                        <a:t>2</a:t>
+                      </a:r>
+                    </a:p>
+                  </a:txBody>
+                  <a:tcPr marL="58293" marR="58293" marT="29146" marB="29146"/>
+                </a:tc>
+                <a:tc>
+                  <a:txBody>
+                    <a:bodyPr/>
+                    <a:lstStyle/>
+                    <a:p>
+                      <a:r>
+                        <a:rPr lang="en-US" sz="1100" b="0" dirty="0">
+                          <a:ln>
+                            <a:noFill/>
+                          </a:ln>
+                          <a:solidFill>
+                            <a:schemeClr val="tx1"/>
+                          </a:solidFill>
+                        </a:rPr>
+                        <a:t>3</a:t>
+                      </a:r>
+                    </a:p>
+                  </a:txBody>
+                  <a:tcPr marL="58293" marR="58293" marT="29146" marB="29146"/>
+                </a:tc>
+                <a:tc>
+                  <a:txBody>
+                    <a:bodyPr/>
+                    <a:lstStyle/>
+                    <a:p>
+                      <a:r>
+                        <a:rPr lang="en-US" sz="1100" b="0" dirty="0">
+                          <a:ln>
+                            <a:noFill/>
+                          </a:ln>
+                          <a:solidFill>
+                            <a:schemeClr val="tx1"/>
+                          </a:solidFill>
+                        </a:rPr>
+                        <a:t>4</a:t>
+                      </a:r>
+                    </a:p>
+                  </a:txBody>
+                  <a:tcPr marL="58293" marR="58293" marT="29146" marB="29146"/>
+                </a:tc>
+                <a:tc>
+                  <a:txBody>
+                    <a:bodyPr/>
+                    <a:lstStyle/>
+                    <a:p>
+                      <a:r>
+                        <a:rPr lang="en-US" sz="1100" b="0" dirty="0">
+                          <a:ln>
+                            <a:noFill/>
+                          </a:ln>
+                          <a:solidFill>
+                            <a:schemeClr val="tx1"/>
+                          </a:solidFill>
+                        </a:rPr>
+                        <a:t>5</a:t>
+                      </a:r>
+                    </a:p>
+                  </a:txBody>
+                  <a:tcPr marL="58293" marR="58293" marT="29146" marB="29146"/>
+                </a:tc>
+                <a:tc>
+                  <a:txBody>
+                    <a:bodyPr/>
+                    <a:lstStyle/>
+                    <a:p>
+                      <a:r>
+                        <a:rPr lang="en-US" sz="1100" b="0" dirty="0">
+                          <a:ln>
+                            <a:noFill/>
+                          </a:ln>
+                          <a:solidFill>
+                            <a:schemeClr val="tx1"/>
+                          </a:solidFill>
+                        </a:rPr>
+                        <a:t>6</a:t>
+                      </a:r>
+                    </a:p>
+                  </a:txBody>
+                  <a:tcPr marL="58293" marR="58293" marT="29146" marB="29146"/>
+                </a:tc>
+                <a:tc>
+                  <a:txBody>
+                    <a:bodyPr/>
+                    <a:lstStyle/>
+                    <a:p>
+                      <a:r>
+                        <a:rPr lang="en-US" sz="1100" b="0" dirty="0">
+                          <a:ln>
+                            <a:noFill/>
+                          </a:ln>
+                          <a:solidFill>
+                            <a:schemeClr val="tx1"/>
+                          </a:solidFill>
+                        </a:rPr>
+                        <a:t>7</a:t>
+                      </a:r>
+                    </a:p>
+                  </a:txBody>
+                  <a:tcPr marL="58293" marR="58293" marT="29146" marB="29146"/>
+                </a:tc>
+                <a:tc>
+                  <a:txBody>
+                    <a:bodyPr/>
+                    <a:lstStyle/>
+                    <a:p>
+                      <a:r>
+                        <a:rPr lang="en-US" sz="1100" b="0" dirty="0">
+                          <a:ln>
+                            <a:noFill/>
+                          </a:ln>
+                          <a:solidFill>
+                            <a:schemeClr val="tx1"/>
+                          </a:solidFill>
+                        </a:rPr>
+                        <a:t>8</a:t>
+                      </a:r>
+                    </a:p>
+                  </a:txBody>
+                  <a:tcPr marL="58293" marR="58293" marT="29146" marB="29146"/>
+                </a:tc>
+                <a:tc>
+                  <a:txBody>
+                    <a:bodyPr/>
+                    <a:lstStyle/>
+                    <a:p>
+                      <a:r>
+                        <a:rPr lang="en-US" sz="1100" b="0" dirty="0">
+                          <a:ln>
+                            <a:noFill/>
+                          </a:ln>
+                          <a:solidFill>
+                            <a:schemeClr val="tx1"/>
+                          </a:solidFill>
+                        </a:rPr>
+                        <a:t>9</a:t>
+                      </a:r>
+                    </a:p>
+                  </a:txBody>
+                  <a:tcPr marL="58293" marR="58293" marT="29146" marB="29146"/>
+                </a:tc>
+                <a:tc>
+                  <a:txBody>
+                    <a:bodyPr/>
+                    <a:lstStyle/>
+                    <a:p>
+                      <a:r>
+                        <a:rPr lang="en-US" sz="1100" b="0" dirty="0">
+                          <a:ln>
+                            <a:noFill/>
+                          </a:ln>
+                          <a:solidFill>
+                            <a:schemeClr val="tx1"/>
+                          </a:solidFill>
+                        </a:rPr>
+                        <a:t>10</a:t>
+                      </a:r>
+                    </a:p>
+                  </a:txBody>
+                  <a:tcPr marL="58293" marR="58293" marT="29146" marB="29146"/>
+                </a:tc>
+                <a:extLst>
+                  <a:ext uri="{0D108BD9-81ED-4DB2-BD59-A6C34878D82A}">
+                    <a16:rowId xmlns:a16="http://schemas.microsoft.com/office/drawing/2014/main" val="3760469219"/>
+                  </a:ext>
+                </a:extLst>
+              </a:tr>
+            </a:tbl>
+          </a:graphicData>
+        </a:graphic>
+      </p:graphicFrame>
     </p:spTree>
     <p:extLst>
       <p:ext uri="{BB962C8B-B14F-4D97-AF65-F5344CB8AC3E}">
@@ -22179,8 +22541,8 @@
           </a:p>
         </p:txBody>
       </p:sp>
-      <mc:AlternateContent xmlns:mc="http://schemas.openxmlformats.org/markup-compatibility/2006">
-        <mc:Choice xmlns:a14="http://schemas.microsoft.com/office/drawing/2010/main" Requires="a14">
+      <mc:AlternateContent xmlns:mc="http://schemas.openxmlformats.org/markup-compatibility/2006" xmlns:a14="http://schemas.microsoft.com/office/drawing/2010/main">
+        <mc:Choice Requires="a14">
           <p:sp>
             <p:nvSpPr>
               <p:cNvPr id="30" name="TextBox 29">
@@ -22481,7 +22843,7 @@
             </p:txBody>
           </p:sp>
         </mc:Choice>
-        <mc:Fallback>
+        <mc:Fallback xmlns="">
           <p:sp>
             <p:nvSpPr>
               <p:cNvPr id="30" name="TextBox 29">
@@ -22583,6 +22945,6231 @@
     <p:extLst>
       <p:ext uri="{BB962C8B-B14F-4D97-AF65-F5344CB8AC3E}">
         <p14:creationId xmlns:p14="http://schemas.microsoft.com/office/powerpoint/2010/main" val="2418439057"/>
+      </p:ext>
+    </p:extLst>
+  </p:cSld>
+  <p:clrMapOvr>
+    <a:masterClrMapping/>
+  </p:clrMapOvr>
+</p:sld>
+</file>
+
+<file path=ppt/slides/slide7.xml><?xml version="1.0" encoding="utf-8"?>
+<p:sld xmlns:a="http://schemas.openxmlformats.org/drawingml/2006/main" xmlns:r="http://schemas.openxmlformats.org/officeDocument/2006/relationships" xmlns:p="http://schemas.openxmlformats.org/presentationml/2006/main">
+  <p:cSld>
+    <p:spTree>
+      <p:nvGrpSpPr>
+        <p:cNvPr id="1" name="">
+          <a:extLst>
+            <a:ext uri="{FF2B5EF4-FFF2-40B4-BE49-F238E27FC236}">
+              <a16:creationId xmlns:a16="http://schemas.microsoft.com/office/drawing/2014/main" id="{2E45F475-86FF-D51B-0F74-D4EF30E740E0}"/>
+            </a:ext>
+          </a:extLst>
+        </p:cNvPr>
+        <p:cNvGrpSpPr/>
+        <p:nvPr/>
+      </p:nvGrpSpPr>
+      <p:grpSpPr>
+        <a:xfrm>
+          <a:off x="0" y="0"/>
+          <a:ext cx="0" cy="0"/>
+          <a:chOff x="0" y="0"/>
+          <a:chExt cx="0" cy="0"/>
+        </a:xfrm>
+      </p:grpSpPr>
+      <p:graphicFrame>
+        <p:nvGraphicFramePr>
+          <p:cNvPr id="15" name="Table 14">
+            <a:extLst>
+              <a:ext uri="{FF2B5EF4-FFF2-40B4-BE49-F238E27FC236}">
+                <a16:creationId xmlns:a16="http://schemas.microsoft.com/office/drawing/2014/main" id="{43C066D4-EDC7-21A9-B087-8403C57C8A9C}"/>
+              </a:ext>
+            </a:extLst>
+          </p:cNvPr>
+          <p:cNvGraphicFramePr>
+            <a:graphicFrameLocks noGrp="1"/>
+          </p:cNvGraphicFramePr>
+          <p:nvPr>
+            <p:extLst>
+              <p:ext uri="{D42A27DB-BD31-4B8C-83A1-F6EECF244321}">
+                <p14:modId xmlns:p14="http://schemas.microsoft.com/office/powerpoint/2010/main" val="990572184"/>
+              </p:ext>
+            </p:extLst>
+          </p:nvPr>
+        </p:nvGraphicFramePr>
+        <p:xfrm>
+          <a:off x="2107974" y="251019"/>
+          <a:ext cx="5842451" cy="4395017"/>
+        </p:xfrm>
+        <a:graphic>
+          <a:graphicData uri="http://schemas.openxmlformats.org/drawingml/2006/table">
+            <a:tbl>
+              <a:tblPr firstRow="1" bandRow="1">
+                <a:tableStyleId>{D7AC3CCA-C797-4891-BE02-D94E43425B78}</a:tableStyleId>
+              </a:tblPr>
+              <a:tblGrid>
+                <a:gridCol w="1012004">
+                  <a:extLst>
+                    <a:ext uri="{9D8B030D-6E8A-4147-A177-3AD203B41FA5}">
+                      <a16:colId xmlns:a16="http://schemas.microsoft.com/office/drawing/2014/main" val="491015835"/>
+                    </a:ext>
+                  </a:extLst>
+                </a:gridCol>
+                <a:gridCol w="469417">
+                  <a:extLst>
+                    <a:ext uri="{9D8B030D-6E8A-4147-A177-3AD203B41FA5}">
+                      <a16:colId xmlns:a16="http://schemas.microsoft.com/office/drawing/2014/main" val="1709568371"/>
+                    </a:ext>
+                  </a:extLst>
+                </a:gridCol>
+                <a:gridCol w="484559">
+                  <a:extLst>
+                    <a:ext uri="{9D8B030D-6E8A-4147-A177-3AD203B41FA5}">
+                      <a16:colId xmlns:a16="http://schemas.microsoft.com/office/drawing/2014/main" val="1661961280"/>
+                    </a:ext>
+                  </a:extLst>
+                </a:gridCol>
+                <a:gridCol w="484559">
+                  <a:extLst>
+                    <a:ext uri="{9D8B030D-6E8A-4147-A177-3AD203B41FA5}">
+                      <a16:colId xmlns:a16="http://schemas.microsoft.com/office/drawing/2014/main" val="3475827584"/>
+                    </a:ext>
+                  </a:extLst>
+                </a:gridCol>
+                <a:gridCol w="484559">
+                  <a:extLst>
+                    <a:ext uri="{9D8B030D-6E8A-4147-A177-3AD203B41FA5}">
+                      <a16:colId xmlns:a16="http://schemas.microsoft.com/office/drawing/2014/main" val="274839739"/>
+                    </a:ext>
+                  </a:extLst>
+                </a:gridCol>
+                <a:gridCol w="484559">
+                  <a:extLst>
+                    <a:ext uri="{9D8B030D-6E8A-4147-A177-3AD203B41FA5}">
+                      <a16:colId xmlns:a16="http://schemas.microsoft.com/office/drawing/2014/main" val="4238945879"/>
+                    </a:ext>
+                  </a:extLst>
+                </a:gridCol>
+                <a:gridCol w="469904">
+                  <a:extLst>
+                    <a:ext uri="{9D8B030D-6E8A-4147-A177-3AD203B41FA5}">
+                      <a16:colId xmlns:a16="http://schemas.microsoft.com/office/drawing/2014/main" val="3717843866"/>
+                    </a:ext>
+                  </a:extLst>
+                </a:gridCol>
+                <a:gridCol w="499213">
+                  <a:extLst>
+                    <a:ext uri="{9D8B030D-6E8A-4147-A177-3AD203B41FA5}">
+                      <a16:colId xmlns:a16="http://schemas.microsoft.com/office/drawing/2014/main" val="3261756497"/>
+                    </a:ext>
+                  </a:extLst>
+                </a:gridCol>
+                <a:gridCol w="484559">
+                  <a:extLst>
+                    <a:ext uri="{9D8B030D-6E8A-4147-A177-3AD203B41FA5}">
+                      <a16:colId xmlns:a16="http://schemas.microsoft.com/office/drawing/2014/main" val="3229512238"/>
+                    </a:ext>
+                  </a:extLst>
+                </a:gridCol>
+                <a:gridCol w="484559">
+                  <a:extLst>
+                    <a:ext uri="{9D8B030D-6E8A-4147-A177-3AD203B41FA5}">
+                      <a16:colId xmlns:a16="http://schemas.microsoft.com/office/drawing/2014/main" val="3625312457"/>
+                    </a:ext>
+                  </a:extLst>
+                </a:gridCol>
+                <a:gridCol w="484559">
+                  <a:extLst>
+                    <a:ext uri="{9D8B030D-6E8A-4147-A177-3AD203B41FA5}">
+                      <a16:colId xmlns:a16="http://schemas.microsoft.com/office/drawing/2014/main" val="2564797942"/>
+                    </a:ext>
+                  </a:extLst>
+                </a:gridCol>
+              </a:tblGrid>
+              <a:tr h="399547">
+                <a:tc>
+                  <a:txBody>
+                    <a:bodyPr/>
+                    <a:lstStyle/>
+                    <a:p>
+                      <a:endParaRPr lang="en-US" sz="1100" b="0" dirty="0">
+                        <a:ln>
+                          <a:noFill/>
+                        </a:ln>
+                      </a:endParaRPr>
+                    </a:p>
+                  </a:txBody>
+                  <a:tcPr marL="58293" marR="58293" marT="29146" marB="29146"/>
+                </a:tc>
+                <a:tc>
+                  <a:txBody>
+                    <a:bodyPr/>
+                    <a:lstStyle/>
+                    <a:p>
+                      <a:r>
+                        <a:rPr lang="en-US" sz="1100" b="0" dirty="0">
+                          <a:ln>
+                            <a:noFill/>
+                          </a:ln>
+                          <a:solidFill>
+                            <a:schemeClr val="tx1"/>
+                          </a:solidFill>
+                        </a:rPr>
+                        <a:t>i=0</a:t>
+                      </a:r>
+                    </a:p>
+                  </a:txBody>
+                  <a:tcPr marL="58293" marR="58293" marT="29146" marB="29146"/>
+                </a:tc>
+                <a:tc>
+                  <a:txBody>
+                    <a:bodyPr/>
+                    <a:lstStyle/>
+                    <a:p>
+                      <a:r>
+                        <a:rPr lang="en-US" sz="1100" b="0" dirty="0">
+                          <a:ln>
+                            <a:noFill/>
+                          </a:ln>
+                          <a:solidFill>
+                            <a:schemeClr val="tx1"/>
+                          </a:solidFill>
+                        </a:rPr>
+                        <a:t>i=1</a:t>
+                      </a:r>
+                    </a:p>
+                  </a:txBody>
+                  <a:tcPr marL="58293" marR="58293" marT="29146" marB="29146"/>
+                </a:tc>
+                <a:tc>
+                  <a:txBody>
+                    <a:bodyPr/>
+                    <a:lstStyle/>
+                    <a:p>
+                      <a:r>
+                        <a:rPr lang="en-US" sz="1100" b="0" dirty="0">
+                          <a:ln>
+                            <a:noFill/>
+                          </a:ln>
+                          <a:solidFill>
+                            <a:schemeClr val="tx1"/>
+                          </a:solidFill>
+                        </a:rPr>
+                        <a:t>i=2</a:t>
+                      </a:r>
+                    </a:p>
+                  </a:txBody>
+                  <a:tcPr marL="58293" marR="58293" marT="29146" marB="29146"/>
+                </a:tc>
+                <a:tc>
+                  <a:txBody>
+                    <a:bodyPr/>
+                    <a:lstStyle/>
+                    <a:p>
+                      <a:r>
+                        <a:rPr lang="en-US" sz="1100" b="0" dirty="0">
+                          <a:ln>
+                            <a:noFill/>
+                          </a:ln>
+                          <a:solidFill>
+                            <a:schemeClr val="tx1"/>
+                          </a:solidFill>
+                        </a:rPr>
+                        <a:t>i=3</a:t>
+                      </a:r>
+                    </a:p>
+                  </a:txBody>
+                  <a:tcPr marL="58293" marR="58293" marT="29146" marB="29146"/>
+                </a:tc>
+                <a:tc>
+                  <a:txBody>
+                    <a:bodyPr/>
+                    <a:lstStyle/>
+                    <a:p>
+                      <a:r>
+                        <a:rPr lang="en-US" sz="1100" b="0" dirty="0">
+                          <a:ln>
+                            <a:noFill/>
+                          </a:ln>
+                          <a:solidFill>
+                            <a:schemeClr val="tx1"/>
+                          </a:solidFill>
+                        </a:rPr>
+                        <a:t>i=4</a:t>
+                      </a:r>
+                    </a:p>
+                  </a:txBody>
+                  <a:tcPr marL="58293" marR="58293" marT="29146" marB="29146"/>
+                </a:tc>
+                <a:tc>
+                  <a:txBody>
+                    <a:bodyPr/>
+                    <a:lstStyle/>
+                    <a:p>
+                      <a:r>
+                        <a:rPr lang="en-US" sz="1100" b="0" dirty="0">
+                          <a:ln>
+                            <a:noFill/>
+                          </a:ln>
+                          <a:solidFill>
+                            <a:schemeClr val="tx1"/>
+                          </a:solidFill>
+                        </a:rPr>
+                        <a:t>i=5</a:t>
+                      </a:r>
+                    </a:p>
+                  </a:txBody>
+                  <a:tcPr marL="58293" marR="58293" marT="29146" marB="29146"/>
+                </a:tc>
+                <a:tc>
+                  <a:txBody>
+                    <a:bodyPr/>
+                    <a:lstStyle/>
+                    <a:p>
+                      <a:r>
+                        <a:rPr lang="en-US" sz="1100" b="0" dirty="0">
+                          <a:ln>
+                            <a:noFill/>
+                          </a:ln>
+                          <a:solidFill>
+                            <a:schemeClr val="tx1"/>
+                          </a:solidFill>
+                        </a:rPr>
+                        <a:t>i=6</a:t>
+                      </a:r>
+                    </a:p>
+                  </a:txBody>
+                  <a:tcPr marL="58293" marR="58293" marT="29146" marB="29146"/>
+                </a:tc>
+                <a:tc>
+                  <a:txBody>
+                    <a:bodyPr/>
+                    <a:lstStyle/>
+                    <a:p>
+                      <a:r>
+                        <a:rPr lang="en-US" sz="1100" b="0" dirty="0">
+                          <a:ln>
+                            <a:noFill/>
+                          </a:ln>
+                          <a:solidFill>
+                            <a:schemeClr val="tx1"/>
+                          </a:solidFill>
+                        </a:rPr>
+                        <a:t>i=7</a:t>
+                      </a:r>
+                    </a:p>
+                  </a:txBody>
+                  <a:tcPr marL="58293" marR="58293" marT="29146" marB="29146"/>
+                </a:tc>
+                <a:tc>
+                  <a:txBody>
+                    <a:bodyPr/>
+                    <a:lstStyle/>
+                    <a:p>
+                      <a:r>
+                        <a:rPr lang="en-US" sz="1100" b="0" dirty="0">
+                          <a:ln>
+                            <a:noFill/>
+                          </a:ln>
+                          <a:solidFill>
+                            <a:schemeClr val="tx1"/>
+                          </a:solidFill>
+                        </a:rPr>
+                        <a:t>i=8</a:t>
+                      </a:r>
+                    </a:p>
+                  </a:txBody>
+                  <a:tcPr marL="58293" marR="58293" marT="29146" marB="29146"/>
+                </a:tc>
+                <a:tc>
+                  <a:txBody>
+                    <a:bodyPr/>
+                    <a:lstStyle/>
+                    <a:p>
+                      <a:r>
+                        <a:rPr lang="en-US" sz="1100" b="0" dirty="0">
+                          <a:ln>
+                            <a:noFill/>
+                          </a:ln>
+                          <a:solidFill>
+                            <a:schemeClr val="tx1"/>
+                          </a:solidFill>
+                        </a:rPr>
+                        <a:t>i=9</a:t>
+                      </a:r>
+                    </a:p>
+                  </a:txBody>
+                  <a:tcPr marL="58293" marR="58293" marT="29146" marB="29146"/>
+                </a:tc>
+                <a:extLst>
+                  <a:ext uri="{0D108BD9-81ED-4DB2-BD59-A6C34878D82A}">
+                    <a16:rowId xmlns:a16="http://schemas.microsoft.com/office/drawing/2014/main" val="966998701"/>
+                  </a:ext>
+                </a:extLst>
+              </a:tr>
+              <a:tr h="399547">
+                <a:tc>
+                  <a:txBody>
+                    <a:bodyPr/>
+                    <a:lstStyle/>
+                    <a:p>
+                      <a:r>
+                        <a:rPr lang="en-US" sz="1100" b="0" dirty="0">
+                          <a:ln>
+                            <a:noFill/>
+                          </a:ln>
+                        </a:rPr>
+                        <a:t>J=0</a:t>
+                      </a:r>
+                    </a:p>
+                  </a:txBody>
+                  <a:tcPr marL="58293" marR="58293" marT="29146" marB="29146"/>
+                </a:tc>
+                <a:tc>
+                  <a:txBody>
+                    <a:bodyPr/>
+                    <a:lstStyle/>
+                    <a:p>
+                      <a:r>
+                        <a:rPr lang="en-US" sz="1100" b="0" dirty="0">
+                          <a:ln>
+                            <a:noFill/>
+                          </a:ln>
+                          <a:solidFill>
+                            <a:schemeClr val="tx1"/>
+                          </a:solidFill>
+                        </a:rPr>
+                        <a:t>4</a:t>
+                      </a:r>
+                    </a:p>
+                  </a:txBody>
+                  <a:tcPr marL="58293" marR="58293" marT="29146" marB="29146"/>
+                </a:tc>
+                <a:tc>
+                  <a:txBody>
+                    <a:bodyPr/>
+                    <a:lstStyle/>
+                    <a:p>
+                      <a:r>
+                        <a:rPr lang="en-US" sz="1100" b="0" dirty="0">
+                          <a:ln>
+                            <a:noFill/>
+                          </a:ln>
+                          <a:solidFill>
+                            <a:schemeClr val="tx1"/>
+                          </a:solidFill>
+                        </a:rPr>
+                        <a:t>2</a:t>
+                      </a:r>
+                    </a:p>
+                  </a:txBody>
+                  <a:tcPr marL="58293" marR="58293" marT="29146" marB="29146"/>
+                </a:tc>
+                <a:tc>
+                  <a:txBody>
+                    <a:bodyPr/>
+                    <a:lstStyle/>
+                    <a:p>
+                      <a:r>
+                        <a:rPr lang="en-US" sz="1100" b="0" dirty="0">
+                          <a:ln>
+                            <a:noFill/>
+                          </a:ln>
+                          <a:solidFill>
+                            <a:schemeClr val="tx1"/>
+                          </a:solidFill>
+                        </a:rPr>
+                        <a:t>0</a:t>
+                      </a:r>
+                    </a:p>
+                  </a:txBody>
+                  <a:tcPr marL="58293" marR="58293" marT="29146" marB="29146"/>
+                </a:tc>
+                <a:tc>
+                  <a:txBody>
+                    <a:bodyPr/>
+                    <a:lstStyle/>
+                    <a:p>
+                      <a:r>
+                        <a:rPr lang="en-US" sz="1100" b="0" dirty="0">
+                          <a:ln>
+                            <a:noFill/>
+                          </a:ln>
+                          <a:solidFill>
+                            <a:schemeClr val="tx1"/>
+                          </a:solidFill>
+                        </a:rPr>
+                        <a:t>0</a:t>
+                      </a:r>
+                    </a:p>
+                  </a:txBody>
+                  <a:tcPr marL="58293" marR="58293" marT="29146" marB="29146"/>
+                </a:tc>
+                <a:tc>
+                  <a:txBody>
+                    <a:bodyPr/>
+                    <a:lstStyle/>
+                    <a:p>
+                      <a:r>
+                        <a:rPr lang="en-US" sz="1100" b="0" dirty="0">
+                          <a:ln>
+                            <a:noFill/>
+                          </a:ln>
+                          <a:solidFill>
+                            <a:schemeClr val="tx1"/>
+                          </a:solidFill>
+                        </a:rPr>
+                        <a:t>0</a:t>
+                      </a:r>
+                    </a:p>
+                  </a:txBody>
+                  <a:tcPr marL="58293" marR="58293" marT="29146" marB="29146"/>
+                </a:tc>
+                <a:tc>
+                  <a:txBody>
+                    <a:bodyPr/>
+                    <a:lstStyle/>
+                    <a:p>
+                      <a:r>
+                        <a:rPr lang="en-US" sz="1100" b="0" dirty="0">
+                          <a:ln>
+                            <a:noFill/>
+                          </a:ln>
+                          <a:solidFill>
+                            <a:schemeClr val="tx1"/>
+                          </a:solidFill>
+                        </a:rPr>
+                        <a:t>0</a:t>
+                      </a:r>
+                    </a:p>
+                  </a:txBody>
+                  <a:tcPr marL="58293" marR="58293" marT="29146" marB="29146"/>
+                </a:tc>
+                <a:tc>
+                  <a:txBody>
+                    <a:bodyPr/>
+                    <a:lstStyle/>
+                    <a:p>
+                      <a:r>
+                        <a:rPr lang="en-US" sz="1100" b="0" dirty="0">
+                          <a:ln>
+                            <a:noFill/>
+                          </a:ln>
+                          <a:solidFill>
+                            <a:schemeClr val="tx1"/>
+                          </a:solidFill>
+                        </a:rPr>
+                        <a:t>0</a:t>
+                      </a:r>
+                    </a:p>
+                  </a:txBody>
+                  <a:tcPr marL="58293" marR="58293" marT="29146" marB="29146"/>
+                </a:tc>
+                <a:tc>
+                  <a:txBody>
+                    <a:bodyPr/>
+                    <a:lstStyle/>
+                    <a:p>
+                      <a:r>
+                        <a:rPr lang="en-US" sz="1100" b="0" dirty="0">
+                          <a:ln>
+                            <a:noFill/>
+                          </a:ln>
+                          <a:solidFill>
+                            <a:schemeClr val="tx1"/>
+                          </a:solidFill>
+                        </a:rPr>
+                        <a:t>0</a:t>
+                      </a:r>
+                    </a:p>
+                  </a:txBody>
+                  <a:tcPr marL="58293" marR="58293" marT="29146" marB="29146"/>
+                </a:tc>
+                <a:tc>
+                  <a:txBody>
+                    <a:bodyPr/>
+                    <a:lstStyle/>
+                    <a:p>
+                      <a:r>
+                        <a:rPr lang="en-US" sz="1100" b="0" dirty="0">
+                          <a:ln>
+                            <a:noFill/>
+                          </a:ln>
+                          <a:solidFill>
+                            <a:schemeClr val="tx1"/>
+                          </a:solidFill>
+                        </a:rPr>
+                        <a:t>0</a:t>
+                      </a:r>
+                    </a:p>
+                  </a:txBody>
+                  <a:tcPr marL="58293" marR="58293" marT="29146" marB="29146"/>
+                </a:tc>
+                <a:tc>
+                  <a:txBody>
+                    <a:bodyPr/>
+                    <a:lstStyle/>
+                    <a:p>
+                      <a:r>
+                        <a:rPr lang="en-US" sz="1100" b="0" dirty="0">
+                          <a:ln>
+                            <a:noFill/>
+                          </a:ln>
+                          <a:solidFill>
+                            <a:schemeClr val="tx1"/>
+                          </a:solidFill>
+                        </a:rPr>
+                        <a:t>0</a:t>
+                      </a:r>
+                    </a:p>
+                  </a:txBody>
+                  <a:tcPr marL="58293" marR="58293" marT="29146" marB="29146"/>
+                </a:tc>
+                <a:extLst>
+                  <a:ext uri="{0D108BD9-81ED-4DB2-BD59-A6C34878D82A}">
+                    <a16:rowId xmlns:a16="http://schemas.microsoft.com/office/drawing/2014/main" val="328127146"/>
+                  </a:ext>
+                </a:extLst>
+              </a:tr>
+              <a:tr h="399547">
+                <a:tc>
+                  <a:txBody>
+                    <a:bodyPr/>
+                    <a:lstStyle/>
+                    <a:p>
+                      <a:r>
+                        <a:rPr lang="en-US" sz="1100" b="0" dirty="0">
+                          <a:ln>
+                            <a:noFill/>
+                          </a:ln>
+                        </a:rPr>
+                        <a:t>J=1</a:t>
+                      </a:r>
+                    </a:p>
+                  </a:txBody>
+                  <a:tcPr marL="58293" marR="58293" marT="29146" marB="29146"/>
+                </a:tc>
+                <a:tc>
+                  <a:txBody>
+                    <a:bodyPr/>
+                    <a:lstStyle/>
+                    <a:p>
+                      <a:r>
+                        <a:rPr lang="en-US" sz="1100" dirty="0">
+                          <a:ln>
+                            <a:noFill/>
+                          </a:ln>
+                          <a:solidFill>
+                            <a:schemeClr val="tx1"/>
+                          </a:solidFill>
+                        </a:rPr>
+                        <a:t>4</a:t>
+                      </a:r>
+                    </a:p>
+                  </a:txBody>
+                  <a:tcPr marL="58293" marR="58293" marT="29146" marB="29146"/>
+                </a:tc>
+                <a:tc>
+                  <a:txBody>
+                    <a:bodyPr/>
+                    <a:lstStyle/>
+                    <a:p>
+                      <a:r>
+                        <a:rPr lang="en-US" sz="1100" dirty="0">
+                          <a:ln>
+                            <a:noFill/>
+                          </a:ln>
+                          <a:solidFill>
+                            <a:schemeClr val="tx1"/>
+                          </a:solidFill>
+                        </a:rPr>
+                        <a:t>4</a:t>
+                      </a:r>
+                    </a:p>
+                  </a:txBody>
+                  <a:tcPr marL="58293" marR="58293" marT="29146" marB="29146"/>
+                </a:tc>
+                <a:tc>
+                  <a:txBody>
+                    <a:bodyPr/>
+                    <a:lstStyle/>
+                    <a:p>
+                      <a:r>
+                        <a:rPr lang="en-US" sz="1100" dirty="0">
+                          <a:ln>
+                            <a:noFill/>
+                          </a:ln>
+                          <a:solidFill>
+                            <a:schemeClr val="tx1"/>
+                          </a:solidFill>
+                        </a:rPr>
+                        <a:t>2</a:t>
+                      </a:r>
+                    </a:p>
+                  </a:txBody>
+                  <a:tcPr marL="58293" marR="58293" marT="29146" marB="29146"/>
+                </a:tc>
+                <a:tc>
+                  <a:txBody>
+                    <a:bodyPr/>
+                    <a:lstStyle/>
+                    <a:p>
+                      <a:r>
+                        <a:rPr lang="en-US" sz="1100" dirty="0">
+                          <a:ln>
+                            <a:noFill/>
+                          </a:ln>
+                          <a:solidFill>
+                            <a:schemeClr val="tx1"/>
+                          </a:solidFill>
+                        </a:rPr>
+                        <a:t>0</a:t>
+                      </a:r>
+                    </a:p>
+                  </a:txBody>
+                  <a:tcPr marL="58293" marR="58293" marT="29146" marB="29146"/>
+                </a:tc>
+                <a:tc>
+                  <a:txBody>
+                    <a:bodyPr/>
+                    <a:lstStyle/>
+                    <a:p>
+                      <a:r>
+                        <a:rPr lang="en-US" sz="1100" dirty="0">
+                          <a:ln>
+                            <a:noFill/>
+                          </a:ln>
+                          <a:solidFill>
+                            <a:schemeClr val="tx1"/>
+                          </a:solidFill>
+                        </a:rPr>
+                        <a:t>0</a:t>
+                      </a:r>
+                    </a:p>
+                  </a:txBody>
+                  <a:tcPr marL="58293" marR="58293" marT="29146" marB="29146"/>
+                </a:tc>
+                <a:tc>
+                  <a:txBody>
+                    <a:bodyPr/>
+                    <a:lstStyle/>
+                    <a:p>
+                      <a:r>
+                        <a:rPr lang="en-US" sz="1100" dirty="0">
+                          <a:ln>
+                            <a:noFill/>
+                          </a:ln>
+                          <a:solidFill>
+                            <a:schemeClr val="tx1"/>
+                          </a:solidFill>
+                        </a:rPr>
+                        <a:t>0</a:t>
+                      </a:r>
+                    </a:p>
+                  </a:txBody>
+                  <a:tcPr marL="58293" marR="58293" marT="29146" marB="29146"/>
+                </a:tc>
+                <a:tc>
+                  <a:txBody>
+                    <a:bodyPr/>
+                    <a:lstStyle/>
+                    <a:p>
+                      <a:r>
+                        <a:rPr lang="en-US" sz="1100" dirty="0">
+                          <a:ln>
+                            <a:noFill/>
+                          </a:ln>
+                          <a:solidFill>
+                            <a:schemeClr val="tx1"/>
+                          </a:solidFill>
+                        </a:rPr>
+                        <a:t>0</a:t>
+                      </a:r>
+                    </a:p>
+                  </a:txBody>
+                  <a:tcPr marL="58293" marR="58293" marT="29146" marB="29146"/>
+                </a:tc>
+                <a:tc>
+                  <a:txBody>
+                    <a:bodyPr/>
+                    <a:lstStyle/>
+                    <a:p>
+                      <a:r>
+                        <a:rPr lang="en-US" sz="1100" dirty="0">
+                          <a:ln>
+                            <a:noFill/>
+                          </a:ln>
+                          <a:solidFill>
+                            <a:schemeClr val="tx1"/>
+                          </a:solidFill>
+                        </a:rPr>
+                        <a:t>0</a:t>
+                      </a:r>
+                    </a:p>
+                  </a:txBody>
+                  <a:tcPr marL="58293" marR="58293" marT="29146" marB="29146"/>
+                </a:tc>
+                <a:tc>
+                  <a:txBody>
+                    <a:bodyPr/>
+                    <a:lstStyle/>
+                    <a:p>
+                      <a:r>
+                        <a:rPr lang="en-US" sz="1100" dirty="0">
+                          <a:ln>
+                            <a:noFill/>
+                          </a:ln>
+                          <a:solidFill>
+                            <a:schemeClr val="tx1"/>
+                          </a:solidFill>
+                        </a:rPr>
+                        <a:t>0</a:t>
+                      </a:r>
+                    </a:p>
+                  </a:txBody>
+                  <a:tcPr marL="58293" marR="58293" marT="29146" marB="29146"/>
+                </a:tc>
+                <a:tc>
+                  <a:txBody>
+                    <a:bodyPr/>
+                    <a:lstStyle/>
+                    <a:p>
+                      <a:r>
+                        <a:rPr lang="en-US" sz="1100" dirty="0">
+                          <a:ln>
+                            <a:noFill/>
+                          </a:ln>
+                          <a:solidFill>
+                            <a:schemeClr val="tx1"/>
+                          </a:solidFill>
+                        </a:rPr>
+                        <a:t>0</a:t>
+                      </a:r>
+                    </a:p>
+                  </a:txBody>
+                  <a:tcPr marL="58293" marR="58293" marT="29146" marB="29146"/>
+                </a:tc>
+                <a:extLst>
+                  <a:ext uri="{0D108BD9-81ED-4DB2-BD59-A6C34878D82A}">
+                    <a16:rowId xmlns:a16="http://schemas.microsoft.com/office/drawing/2014/main" val="2581482594"/>
+                  </a:ext>
+                </a:extLst>
+              </a:tr>
+              <a:tr h="399547">
+                <a:tc>
+                  <a:txBody>
+                    <a:bodyPr/>
+                    <a:lstStyle/>
+                    <a:p>
+                      <a:r>
+                        <a:rPr lang="en-US" sz="1100" b="0" dirty="0">
+                          <a:ln>
+                            <a:noFill/>
+                          </a:ln>
+                        </a:rPr>
+                        <a:t>J=2</a:t>
+                      </a:r>
+                    </a:p>
+                  </a:txBody>
+                  <a:tcPr marL="58293" marR="58293" marT="29146" marB="29146"/>
+                </a:tc>
+                <a:tc>
+                  <a:txBody>
+                    <a:bodyPr/>
+                    <a:lstStyle/>
+                    <a:p>
+                      <a:r>
+                        <a:rPr lang="en-US" sz="1100" dirty="0">
+                          <a:ln>
+                            <a:noFill/>
+                          </a:ln>
+                        </a:rPr>
+                        <a:t>2</a:t>
+                      </a:r>
+                    </a:p>
+                  </a:txBody>
+                  <a:tcPr marL="58293" marR="58293" marT="29146" marB="29146"/>
+                </a:tc>
+                <a:tc>
+                  <a:txBody>
+                    <a:bodyPr/>
+                    <a:lstStyle/>
+                    <a:p>
+                      <a:r>
+                        <a:rPr lang="en-US" sz="1100" dirty="0">
+                          <a:ln>
+                            <a:noFill/>
+                          </a:ln>
+                        </a:rPr>
+                        <a:t>4</a:t>
+                      </a:r>
+                    </a:p>
+                  </a:txBody>
+                  <a:tcPr marL="58293" marR="58293" marT="29146" marB="29146"/>
+                </a:tc>
+                <a:tc>
+                  <a:txBody>
+                    <a:bodyPr/>
+                    <a:lstStyle/>
+                    <a:p>
+                      <a:r>
+                        <a:rPr lang="en-US" sz="1100" dirty="0">
+                          <a:ln>
+                            <a:noFill/>
+                          </a:ln>
+                        </a:rPr>
+                        <a:t>4</a:t>
+                      </a:r>
+                    </a:p>
+                  </a:txBody>
+                  <a:tcPr marL="58293" marR="58293" marT="29146" marB="29146"/>
+                </a:tc>
+                <a:tc>
+                  <a:txBody>
+                    <a:bodyPr/>
+                    <a:lstStyle/>
+                    <a:p>
+                      <a:r>
+                        <a:rPr lang="en-US" sz="1100" dirty="0">
+                          <a:ln>
+                            <a:noFill/>
+                          </a:ln>
+                        </a:rPr>
+                        <a:t>2</a:t>
+                      </a:r>
+                    </a:p>
+                  </a:txBody>
+                  <a:tcPr marL="58293" marR="58293" marT="29146" marB="29146"/>
+                </a:tc>
+                <a:tc>
+                  <a:txBody>
+                    <a:bodyPr/>
+                    <a:lstStyle/>
+                    <a:p>
+                      <a:r>
+                        <a:rPr lang="en-US" sz="1100" dirty="0">
+                          <a:ln>
+                            <a:noFill/>
+                          </a:ln>
+                        </a:rPr>
+                        <a:t>0</a:t>
+                      </a:r>
+                    </a:p>
+                  </a:txBody>
+                  <a:tcPr marL="58293" marR="58293" marT="29146" marB="29146"/>
+                </a:tc>
+                <a:tc>
+                  <a:txBody>
+                    <a:bodyPr/>
+                    <a:lstStyle/>
+                    <a:p>
+                      <a:r>
+                        <a:rPr lang="en-US" sz="1100" dirty="0">
+                          <a:ln>
+                            <a:noFill/>
+                          </a:ln>
+                        </a:rPr>
+                        <a:t>0</a:t>
+                      </a:r>
+                    </a:p>
+                  </a:txBody>
+                  <a:tcPr marL="58293" marR="58293" marT="29146" marB="29146"/>
+                </a:tc>
+                <a:tc>
+                  <a:txBody>
+                    <a:bodyPr/>
+                    <a:lstStyle/>
+                    <a:p>
+                      <a:r>
+                        <a:rPr lang="en-US" sz="1100" dirty="0">
+                          <a:ln>
+                            <a:noFill/>
+                          </a:ln>
+                        </a:rPr>
+                        <a:t>0</a:t>
+                      </a:r>
+                    </a:p>
+                  </a:txBody>
+                  <a:tcPr marL="58293" marR="58293" marT="29146" marB="29146"/>
+                </a:tc>
+                <a:tc>
+                  <a:txBody>
+                    <a:bodyPr/>
+                    <a:lstStyle/>
+                    <a:p>
+                      <a:r>
+                        <a:rPr lang="en-US" sz="1100" dirty="0">
+                          <a:ln>
+                            <a:noFill/>
+                          </a:ln>
+                        </a:rPr>
+                        <a:t>0</a:t>
+                      </a:r>
+                    </a:p>
+                  </a:txBody>
+                  <a:tcPr marL="58293" marR="58293" marT="29146" marB="29146"/>
+                </a:tc>
+                <a:tc>
+                  <a:txBody>
+                    <a:bodyPr/>
+                    <a:lstStyle/>
+                    <a:p>
+                      <a:r>
+                        <a:rPr lang="en-US" sz="1100" dirty="0">
+                          <a:ln>
+                            <a:noFill/>
+                          </a:ln>
+                        </a:rPr>
+                        <a:t>0</a:t>
+                      </a:r>
+                    </a:p>
+                  </a:txBody>
+                  <a:tcPr marL="58293" marR="58293" marT="29146" marB="29146"/>
+                </a:tc>
+                <a:tc>
+                  <a:txBody>
+                    <a:bodyPr/>
+                    <a:lstStyle/>
+                    <a:p>
+                      <a:r>
+                        <a:rPr lang="en-US" sz="1100" dirty="0">
+                          <a:ln>
+                            <a:noFill/>
+                          </a:ln>
+                        </a:rPr>
+                        <a:t>0</a:t>
+                      </a:r>
+                    </a:p>
+                  </a:txBody>
+                  <a:tcPr marL="58293" marR="58293" marT="29146" marB="29146"/>
+                </a:tc>
+                <a:extLst>
+                  <a:ext uri="{0D108BD9-81ED-4DB2-BD59-A6C34878D82A}">
+                    <a16:rowId xmlns:a16="http://schemas.microsoft.com/office/drawing/2014/main" val="2940493048"/>
+                  </a:ext>
+                </a:extLst>
+              </a:tr>
+              <a:tr h="399547">
+                <a:tc>
+                  <a:txBody>
+                    <a:bodyPr/>
+                    <a:lstStyle/>
+                    <a:p>
+                      <a:r>
+                        <a:rPr lang="en-US" sz="1100" b="0" dirty="0">
+                          <a:ln>
+                            <a:noFill/>
+                          </a:ln>
+                        </a:rPr>
+                        <a:t>J=3</a:t>
+                      </a:r>
+                    </a:p>
+                  </a:txBody>
+                  <a:tcPr marL="58293" marR="58293" marT="29146" marB="29146"/>
+                </a:tc>
+                <a:tc>
+                  <a:txBody>
+                    <a:bodyPr/>
+                    <a:lstStyle/>
+                    <a:p>
+                      <a:r>
+                        <a:rPr lang="en-US" sz="1100" dirty="0">
+                          <a:ln>
+                            <a:noFill/>
+                          </a:ln>
+                          <a:solidFill>
+                            <a:schemeClr val="tx1"/>
+                          </a:solidFill>
+                        </a:rPr>
+                        <a:t>0</a:t>
+                      </a:r>
+                    </a:p>
+                  </a:txBody>
+                  <a:tcPr marL="58293" marR="58293" marT="29146" marB="29146"/>
+                </a:tc>
+                <a:tc>
+                  <a:txBody>
+                    <a:bodyPr/>
+                    <a:lstStyle/>
+                    <a:p>
+                      <a:r>
+                        <a:rPr lang="en-US" sz="1100" dirty="0">
+                          <a:ln>
+                            <a:noFill/>
+                          </a:ln>
+                          <a:solidFill>
+                            <a:schemeClr val="tx1"/>
+                          </a:solidFill>
+                        </a:rPr>
+                        <a:t>2</a:t>
+                      </a:r>
+                    </a:p>
+                  </a:txBody>
+                  <a:tcPr marL="58293" marR="58293" marT="29146" marB="29146"/>
+                </a:tc>
+                <a:tc>
+                  <a:txBody>
+                    <a:bodyPr/>
+                    <a:lstStyle/>
+                    <a:p>
+                      <a:r>
+                        <a:rPr lang="en-US" sz="1100" dirty="0">
+                          <a:ln>
+                            <a:noFill/>
+                          </a:ln>
+                          <a:solidFill>
+                            <a:schemeClr val="tx1"/>
+                          </a:solidFill>
+                        </a:rPr>
+                        <a:t>4</a:t>
+                      </a:r>
+                    </a:p>
+                  </a:txBody>
+                  <a:tcPr marL="58293" marR="58293" marT="29146" marB="29146"/>
+                </a:tc>
+                <a:tc>
+                  <a:txBody>
+                    <a:bodyPr/>
+                    <a:lstStyle/>
+                    <a:p>
+                      <a:r>
+                        <a:rPr lang="en-US" sz="1100" dirty="0">
+                          <a:ln>
+                            <a:noFill/>
+                          </a:ln>
+                          <a:solidFill>
+                            <a:schemeClr val="tx1"/>
+                          </a:solidFill>
+                        </a:rPr>
+                        <a:t>4</a:t>
+                      </a:r>
+                    </a:p>
+                  </a:txBody>
+                  <a:tcPr marL="58293" marR="58293" marT="29146" marB="29146"/>
+                </a:tc>
+                <a:tc>
+                  <a:txBody>
+                    <a:bodyPr/>
+                    <a:lstStyle/>
+                    <a:p>
+                      <a:r>
+                        <a:rPr lang="en-US" sz="1100" dirty="0">
+                          <a:ln>
+                            <a:noFill/>
+                          </a:ln>
+                          <a:solidFill>
+                            <a:schemeClr val="tx1"/>
+                          </a:solidFill>
+                        </a:rPr>
+                        <a:t>2</a:t>
+                      </a:r>
+                    </a:p>
+                  </a:txBody>
+                  <a:tcPr marL="58293" marR="58293" marT="29146" marB="29146"/>
+                </a:tc>
+                <a:tc>
+                  <a:txBody>
+                    <a:bodyPr/>
+                    <a:lstStyle/>
+                    <a:p>
+                      <a:r>
+                        <a:rPr lang="en-US" sz="1100" dirty="0">
+                          <a:ln>
+                            <a:noFill/>
+                          </a:ln>
+                          <a:solidFill>
+                            <a:schemeClr val="tx1"/>
+                          </a:solidFill>
+                        </a:rPr>
+                        <a:t>0</a:t>
+                      </a:r>
+                    </a:p>
+                  </a:txBody>
+                  <a:tcPr marL="58293" marR="58293" marT="29146" marB="29146"/>
+                </a:tc>
+                <a:tc>
+                  <a:txBody>
+                    <a:bodyPr/>
+                    <a:lstStyle/>
+                    <a:p>
+                      <a:r>
+                        <a:rPr lang="en-US" sz="1100" dirty="0">
+                          <a:ln>
+                            <a:noFill/>
+                          </a:ln>
+                          <a:solidFill>
+                            <a:schemeClr val="tx1"/>
+                          </a:solidFill>
+                        </a:rPr>
+                        <a:t>0</a:t>
+                      </a:r>
+                    </a:p>
+                  </a:txBody>
+                  <a:tcPr marL="58293" marR="58293" marT="29146" marB="29146"/>
+                </a:tc>
+                <a:tc>
+                  <a:txBody>
+                    <a:bodyPr/>
+                    <a:lstStyle/>
+                    <a:p>
+                      <a:r>
+                        <a:rPr lang="en-US" sz="1100" dirty="0">
+                          <a:ln>
+                            <a:noFill/>
+                          </a:ln>
+                          <a:solidFill>
+                            <a:schemeClr val="tx1"/>
+                          </a:solidFill>
+                        </a:rPr>
+                        <a:t>0</a:t>
+                      </a:r>
+                    </a:p>
+                  </a:txBody>
+                  <a:tcPr marL="58293" marR="58293" marT="29146" marB="29146"/>
+                </a:tc>
+                <a:tc>
+                  <a:txBody>
+                    <a:bodyPr/>
+                    <a:lstStyle/>
+                    <a:p>
+                      <a:r>
+                        <a:rPr lang="en-US" sz="1100" dirty="0">
+                          <a:ln>
+                            <a:noFill/>
+                          </a:ln>
+                          <a:solidFill>
+                            <a:schemeClr val="tx1"/>
+                          </a:solidFill>
+                        </a:rPr>
+                        <a:t>0</a:t>
+                      </a:r>
+                    </a:p>
+                  </a:txBody>
+                  <a:tcPr marL="58293" marR="58293" marT="29146" marB="29146"/>
+                </a:tc>
+                <a:tc>
+                  <a:txBody>
+                    <a:bodyPr/>
+                    <a:lstStyle/>
+                    <a:p>
+                      <a:r>
+                        <a:rPr lang="en-US" sz="1100" dirty="0">
+                          <a:ln>
+                            <a:noFill/>
+                          </a:ln>
+                          <a:solidFill>
+                            <a:schemeClr val="tx1"/>
+                          </a:solidFill>
+                        </a:rPr>
+                        <a:t>0</a:t>
+                      </a:r>
+                    </a:p>
+                  </a:txBody>
+                  <a:tcPr marL="58293" marR="58293" marT="29146" marB="29146"/>
+                </a:tc>
+                <a:extLst>
+                  <a:ext uri="{0D108BD9-81ED-4DB2-BD59-A6C34878D82A}">
+                    <a16:rowId xmlns:a16="http://schemas.microsoft.com/office/drawing/2014/main" val="778190785"/>
+                  </a:ext>
+                </a:extLst>
+              </a:tr>
+              <a:tr h="399547">
+                <a:tc>
+                  <a:txBody>
+                    <a:bodyPr/>
+                    <a:lstStyle/>
+                    <a:p>
+                      <a:r>
+                        <a:rPr lang="en-US" sz="1100" b="0" dirty="0">
+                          <a:ln>
+                            <a:noFill/>
+                          </a:ln>
+                        </a:rPr>
+                        <a:t>J=4</a:t>
+                      </a:r>
+                    </a:p>
+                  </a:txBody>
+                  <a:tcPr marL="58293" marR="58293" marT="29146" marB="29146"/>
+                </a:tc>
+                <a:tc>
+                  <a:txBody>
+                    <a:bodyPr/>
+                    <a:lstStyle/>
+                    <a:p>
+                      <a:r>
+                        <a:rPr lang="en-US" sz="1100" dirty="0">
+                          <a:ln>
+                            <a:noFill/>
+                          </a:ln>
+                          <a:solidFill>
+                            <a:schemeClr val="tx1"/>
+                          </a:solidFill>
+                        </a:rPr>
+                        <a:t>0</a:t>
+                      </a:r>
+                    </a:p>
+                  </a:txBody>
+                  <a:tcPr marL="58293" marR="58293" marT="29146" marB="29146"/>
+                </a:tc>
+                <a:tc>
+                  <a:txBody>
+                    <a:bodyPr/>
+                    <a:lstStyle/>
+                    <a:p>
+                      <a:r>
+                        <a:rPr lang="en-US" sz="1100" dirty="0">
+                          <a:ln>
+                            <a:noFill/>
+                          </a:ln>
+                          <a:solidFill>
+                            <a:schemeClr val="tx1"/>
+                          </a:solidFill>
+                        </a:rPr>
+                        <a:t>0</a:t>
+                      </a:r>
+                    </a:p>
+                  </a:txBody>
+                  <a:tcPr marL="58293" marR="58293" marT="29146" marB="29146"/>
+                </a:tc>
+                <a:tc>
+                  <a:txBody>
+                    <a:bodyPr/>
+                    <a:lstStyle/>
+                    <a:p>
+                      <a:r>
+                        <a:rPr lang="en-US" sz="1100" dirty="0">
+                          <a:ln>
+                            <a:noFill/>
+                          </a:ln>
+                          <a:solidFill>
+                            <a:schemeClr val="tx1"/>
+                          </a:solidFill>
+                        </a:rPr>
+                        <a:t>2</a:t>
+                      </a:r>
+                    </a:p>
+                  </a:txBody>
+                  <a:tcPr marL="58293" marR="58293" marT="29146" marB="29146"/>
+                </a:tc>
+                <a:tc>
+                  <a:txBody>
+                    <a:bodyPr/>
+                    <a:lstStyle/>
+                    <a:p>
+                      <a:r>
+                        <a:rPr lang="en-US" sz="1100" dirty="0">
+                          <a:ln>
+                            <a:noFill/>
+                          </a:ln>
+                          <a:solidFill>
+                            <a:schemeClr val="tx1"/>
+                          </a:solidFill>
+                        </a:rPr>
+                        <a:t>4</a:t>
+                      </a:r>
+                    </a:p>
+                  </a:txBody>
+                  <a:tcPr marL="58293" marR="58293" marT="29146" marB="29146"/>
+                </a:tc>
+                <a:tc>
+                  <a:txBody>
+                    <a:bodyPr/>
+                    <a:lstStyle/>
+                    <a:p>
+                      <a:r>
+                        <a:rPr lang="en-US" sz="1100" dirty="0">
+                          <a:ln>
+                            <a:noFill/>
+                          </a:ln>
+                          <a:solidFill>
+                            <a:schemeClr val="tx1"/>
+                          </a:solidFill>
+                        </a:rPr>
+                        <a:t>5</a:t>
+                      </a:r>
+                    </a:p>
+                  </a:txBody>
+                  <a:tcPr marL="58293" marR="58293" marT="29146" marB="29146"/>
+                </a:tc>
+                <a:tc>
+                  <a:txBody>
+                    <a:bodyPr/>
+                    <a:lstStyle/>
+                    <a:p>
+                      <a:r>
+                        <a:rPr lang="en-US" sz="1100" dirty="0">
+                          <a:ln>
+                            <a:noFill/>
+                          </a:ln>
+                          <a:solidFill>
+                            <a:schemeClr val="tx1"/>
+                          </a:solidFill>
+                        </a:rPr>
+                        <a:t>4</a:t>
+                      </a:r>
+                    </a:p>
+                  </a:txBody>
+                  <a:tcPr marL="58293" marR="58293" marT="29146" marB="29146"/>
+                </a:tc>
+                <a:tc>
+                  <a:txBody>
+                    <a:bodyPr/>
+                    <a:lstStyle/>
+                    <a:p>
+                      <a:r>
+                        <a:rPr lang="en-US" sz="1100" dirty="0">
+                          <a:ln>
+                            <a:noFill/>
+                          </a:ln>
+                          <a:solidFill>
+                            <a:schemeClr val="tx1"/>
+                          </a:solidFill>
+                        </a:rPr>
+                        <a:t>2</a:t>
+                      </a:r>
+                    </a:p>
+                  </a:txBody>
+                  <a:tcPr marL="58293" marR="58293" marT="29146" marB="29146"/>
+                </a:tc>
+                <a:tc>
+                  <a:txBody>
+                    <a:bodyPr/>
+                    <a:lstStyle/>
+                    <a:p>
+                      <a:r>
+                        <a:rPr lang="en-US" sz="1100" dirty="0">
+                          <a:ln>
+                            <a:noFill/>
+                          </a:ln>
+                          <a:solidFill>
+                            <a:schemeClr val="tx1"/>
+                          </a:solidFill>
+                        </a:rPr>
+                        <a:t>0</a:t>
+                      </a:r>
+                    </a:p>
+                  </a:txBody>
+                  <a:tcPr marL="58293" marR="58293" marT="29146" marB="29146"/>
+                </a:tc>
+                <a:tc>
+                  <a:txBody>
+                    <a:bodyPr/>
+                    <a:lstStyle/>
+                    <a:p>
+                      <a:r>
+                        <a:rPr lang="en-US" sz="1100" dirty="0">
+                          <a:ln>
+                            <a:noFill/>
+                          </a:ln>
+                          <a:solidFill>
+                            <a:schemeClr val="tx1"/>
+                          </a:solidFill>
+                        </a:rPr>
+                        <a:t>0</a:t>
+                      </a:r>
+                    </a:p>
+                  </a:txBody>
+                  <a:tcPr marL="58293" marR="58293" marT="29146" marB="29146"/>
+                </a:tc>
+                <a:tc>
+                  <a:txBody>
+                    <a:bodyPr/>
+                    <a:lstStyle/>
+                    <a:p>
+                      <a:r>
+                        <a:rPr lang="en-US" sz="1100" dirty="0">
+                          <a:ln>
+                            <a:noFill/>
+                          </a:ln>
+                          <a:solidFill>
+                            <a:schemeClr val="tx1"/>
+                          </a:solidFill>
+                        </a:rPr>
+                        <a:t>0</a:t>
+                      </a:r>
+                    </a:p>
+                  </a:txBody>
+                  <a:tcPr marL="58293" marR="58293" marT="29146" marB="29146"/>
+                </a:tc>
+                <a:extLst>
+                  <a:ext uri="{0D108BD9-81ED-4DB2-BD59-A6C34878D82A}">
+                    <a16:rowId xmlns:a16="http://schemas.microsoft.com/office/drawing/2014/main" val="3625032118"/>
+                  </a:ext>
+                </a:extLst>
+              </a:tr>
+              <a:tr h="399547">
+                <a:tc>
+                  <a:txBody>
+                    <a:bodyPr/>
+                    <a:lstStyle/>
+                    <a:p>
+                      <a:pPr marL="0" marR="0" lvl="0" indent="0" algn="l" defTabSz="1005840" rtl="0" eaLnBrk="1" fontAlgn="auto" latinLnBrk="0" hangingPunct="1">
+                        <a:lnSpc>
+                          <a:spcPct val="100000"/>
+                        </a:lnSpc>
+                        <a:spcBef>
+                          <a:spcPts val="0"/>
+                        </a:spcBef>
+                        <a:spcAft>
+                          <a:spcPts val="0"/>
+                        </a:spcAft>
+                        <a:buClrTx/>
+                        <a:buSzTx/>
+                        <a:buFontTx/>
+                        <a:buNone/>
+                        <a:tabLst/>
+                        <a:defRPr/>
+                      </a:pPr>
+                      <a:r>
+                        <a:rPr lang="en-US" sz="1100" b="0" dirty="0">
+                          <a:ln>
+                            <a:noFill/>
+                          </a:ln>
+                        </a:rPr>
+                        <a:t>J=5</a:t>
+                      </a:r>
+                    </a:p>
+                  </a:txBody>
+                  <a:tcPr marL="58293" marR="58293" marT="29146" marB="29146"/>
+                </a:tc>
+                <a:tc>
+                  <a:txBody>
+                    <a:bodyPr/>
+                    <a:lstStyle/>
+                    <a:p>
+                      <a:r>
+                        <a:rPr lang="en-US" sz="1100" dirty="0">
+                          <a:ln>
+                            <a:noFill/>
+                          </a:ln>
+                          <a:solidFill>
+                            <a:schemeClr val="tx1"/>
+                          </a:solidFill>
+                        </a:rPr>
+                        <a:t>0</a:t>
+                      </a:r>
+                    </a:p>
+                  </a:txBody>
+                  <a:tcPr marL="58293" marR="58293" marT="29146" marB="29146"/>
+                </a:tc>
+                <a:tc>
+                  <a:txBody>
+                    <a:bodyPr/>
+                    <a:lstStyle/>
+                    <a:p>
+                      <a:r>
+                        <a:rPr lang="en-US" sz="1100" dirty="0">
+                          <a:ln>
+                            <a:noFill/>
+                          </a:ln>
+                          <a:solidFill>
+                            <a:schemeClr val="tx1"/>
+                          </a:solidFill>
+                        </a:rPr>
+                        <a:t>0</a:t>
+                      </a:r>
+                    </a:p>
+                  </a:txBody>
+                  <a:tcPr marL="58293" marR="58293" marT="29146" marB="29146"/>
+                </a:tc>
+                <a:tc>
+                  <a:txBody>
+                    <a:bodyPr/>
+                    <a:lstStyle/>
+                    <a:p>
+                      <a:r>
+                        <a:rPr lang="en-US" sz="1100" dirty="0">
+                          <a:ln>
+                            <a:noFill/>
+                          </a:ln>
+                          <a:solidFill>
+                            <a:schemeClr val="tx1"/>
+                          </a:solidFill>
+                        </a:rPr>
+                        <a:t>0</a:t>
+                      </a:r>
+                    </a:p>
+                  </a:txBody>
+                  <a:tcPr marL="58293" marR="58293" marT="29146" marB="29146"/>
+                </a:tc>
+                <a:tc>
+                  <a:txBody>
+                    <a:bodyPr/>
+                    <a:lstStyle/>
+                    <a:p>
+                      <a:r>
+                        <a:rPr lang="en-US" sz="1100" dirty="0">
+                          <a:ln>
+                            <a:noFill/>
+                          </a:ln>
+                          <a:solidFill>
+                            <a:schemeClr val="tx1"/>
+                          </a:solidFill>
+                        </a:rPr>
+                        <a:t>1</a:t>
+                      </a:r>
+                    </a:p>
+                  </a:txBody>
+                  <a:tcPr marL="58293" marR="58293" marT="29146" marB="29146"/>
+                </a:tc>
+                <a:tc>
+                  <a:txBody>
+                    <a:bodyPr/>
+                    <a:lstStyle/>
+                    <a:p>
+                      <a:r>
+                        <a:rPr lang="en-US" sz="1100" dirty="0">
+                          <a:ln>
+                            <a:noFill/>
+                          </a:ln>
+                          <a:solidFill>
+                            <a:schemeClr val="tx1"/>
+                          </a:solidFill>
+                        </a:rPr>
+                        <a:t>2</a:t>
+                      </a:r>
+                    </a:p>
+                  </a:txBody>
+                  <a:tcPr marL="58293" marR="58293" marT="29146" marB="29146"/>
+                </a:tc>
+                <a:tc>
+                  <a:txBody>
+                    <a:bodyPr/>
+                    <a:lstStyle/>
+                    <a:p>
+                      <a:r>
+                        <a:rPr lang="en-US" sz="1100" dirty="0">
+                          <a:ln>
+                            <a:noFill/>
+                          </a:ln>
+                          <a:solidFill>
+                            <a:schemeClr val="tx1"/>
+                          </a:solidFill>
+                        </a:rPr>
+                        <a:t>4</a:t>
+                      </a:r>
+                    </a:p>
+                  </a:txBody>
+                  <a:tcPr marL="58293" marR="58293" marT="29146" marB="29146"/>
+                </a:tc>
+                <a:tc>
+                  <a:txBody>
+                    <a:bodyPr/>
+                    <a:lstStyle/>
+                    <a:p>
+                      <a:r>
+                        <a:rPr lang="en-US" sz="1100" dirty="0">
+                          <a:ln>
+                            <a:noFill/>
+                          </a:ln>
+                          <a:solidFill>
+                            <a:schemeClr val="tx1"/>
+                          </a:solidFill>
+                        </a:rPr>
+                        <a:t>5</a:t>
+                      </a:r>
+                    </a:p>
+                  </a:txBody>
+                  <a:tcPr marL="58293" marR="58293" marT="29146" marB="29146"/>
+                </a:tc>
+                <a:tc>
+                  <a:txBody>
+                    <a:bodyPr/>
+                    <a:lstStyle/>
+                    <a:p>
+                      <a:r>
+                        <a:rPr lang="en-US" sz="1100" dirty="0">
+                          <a:ln>
+                            <a:noFill/>
+                          </a:ln>
+                          <a:solidFill>
+                            <a:schemeClr val="tx1"/>
+                          </a:solidFill>
+                        </a:rPr>
+                        <a:t>4</a:t>
+                      </a:r>
+                    </a:p>
+                  </a:txBody>
+                  <a:tcPr marL="58293" marR="58293" marT="29146" marB="29146"/>
+                </a:tc>
+                <a:tc>
+                  <a:txBody>
+                    <a:bodyPr/>
+                    <a:lstStyle/>
+                    <a:p>
+                      <a:r>
+                        <a:rPr lang="en-US" sz="1100" dirty="0">
+                          <a:ln>
+                            <a:noFill/>
+                          </a:ln>
+                          <a:solidFill>
+                            <a:schemeClr val="tx1"/>
+                          </a:solidFill>
+                        </a:rPr>
+                        <a:t>2</a:t>
+                      </a:r>
+                    </a:p>
+                  </a:txBody>
+                  <a:tcPr marL="58293" marR="58293" marT="29146" marB="29146"/>
+                </a:tc>
+                <a:tc>
+                  <a:txBody>
+                    <a:bodyPr/>
+                    <a:lstStyle/>
+                    <a:p>
+                      <a:r>
+                        <a:rPr lang="en-US" sz="1100" dirty="0">
+                          <a:ln>
+                            <a:noFill/>
+                          </a:ln>
+                          <a:solidFill>
+                            <a:schemeClr val="tx1"/>
+                          </a:solidFill>
+                        </a:rPr>
+                        <a:t>0</a:t>
+                      </a:r>
+                    </a:p>
+                  </a:txBody>
+                  <a:tcPr marL="58293" marR="58293" marT="29146" marB="29146"/>
+                </a:tc>
+                <a:extLst>
+                  <a:ext uri="{0D108BD9-81ED-4DB2-BD59-A6C34878D82A}">
+                    <a16:rowId xmlns:a16="http://schemas.microsoft.com/office/drawing/2014/main" val="1415216165"/>
+                  </a:ext>
+                </a:extLst>
+              </a:tr>
+              <a:tr h="399547">
+                <a:tc>
+                  <a:txBody>
+                    <a:bodyPr/>
+                    <a:lstStyle/>
+                    <a:p>
+                      <a:r>
+                        <a:rPr lang="en-US" sz="1100" b="0" dirty="0">
+                          <a:ln>
+                            <a:noFill/>
+                          </a:ln>
+                        </a:rPr>
+                        <a:t>J=6</a:t>
+                      </a:r>
+                    </a:p>
+                  </a:txBody>
+                  <a:tcPr marL="58293" marR="58293" marT="29146" marB="29146"/>
+                </a:tc>
+                <a:tc>
+                  <a:txBody>
+                    <a:bodyPr/>
+                    <a:lstStyle/>
+                    <a:p>
+                      <a:r>
+                        <a:rPr lang="en-US" sz="1100" dirty="0">
+                          <a:ln>
+                            <a:noFill/>
+                          </a:ln>
+                          <a:solidFill>
+                            <a:schemeClr val="tx1"/>
+                          </a:solidFill>
+                        </a:rPr>
+                        <a:t>0</a:t>
+                      </a:r>
+                    </a:p>
+                  </a:txBody>
+                  <a:tcPr marL="58293" marR="58293" marT="29146" marB="29146"/>
+                </a:tc>
+                <a:tc>
+                  <a:txBody>
+                    <a:bodyPr/>
+                    <a:lstStyle/>
+                    <a:p>
+                      <a:r>
+                        <a:rPr lang="en-US" sz="1100" dirty="0">
+                          <a:ln>
+                            <a:noFill/>
+                          </a:ln>
+                          <a:solidFill>
+                            <a:schemeClr val="tx1"/>
+                          </a:solidFill>
+                        </a:rPr>
+                        <a:t>0</a:t>
+                      </a:r>
+                    </a:p>
+                  </a:txBody>
+                  <a:tcPr marL="58293" marR="58293" marT="29146" marB="29146"/>
+                </a:tc>
+                <a:tc>
+                  <a:txBody>
+                    <a:bodyPr/>
+                    <a:lstStyle/>
+                    <a:p>
+                      <a:r>
+                        <a:rPr lang="en-US" sz="1100" dirty="0">
+                          <a:ln>
+                            <a:noFill/>
+                          </a:ln>
+                          <a:solidFill>
+                            <a:schemeClr val="tx1"/>
+                          </a:solidFill>
+                        </a:rPr>
+                        <a:t>0</a:t>
+                      </a:r>
+                    </a:p>
+                  </a:txBody>
+                  <a:tcPr marL="58293" marR="58293" marT="29146" marB="29146"/>
+                </a:tc>
+                <a:tc>
+                  <a:txBody>
+                    <a:bodyPr/>
+                    <a:lstStyle/>
+                    <a:p>
+                      <a:r>
+                        <a:rPr lang="en-US" sz="1100" dirty="0">
+                          <a:ln>
+                            <a:noFill/>
+                          </a:ln>
+                          <a:solidFill>
+                            <a:schemeClr val="tx1"/>
+                          </a:solidFill>
+                        </a:rPr>
+                        <a:t>0</a:t>
+                      </a:r>
+                    </a:p>
+                  </a:txBody>
+                  <a:tcPr marL="58293" marR="58293" marT="29146" marB="29146"/>
+                </a:tc>
+                <a:tc>
+                  <a:txBody>
+                    <a:bodyPr/>
+                    <a:lstStyle/>
+                    <a:p>
+                      <a:r>
+                        <a:rPr lang="en-US" sz="1100" dirty="0">
+                          <a:ln>
+                            <a:noFill/>
+                          </a:ln>
+                          <a:solidFill>
+                            <a:schemeClr val="tx1"/>
+                          </a:solidFill>
+                        </a:rPr>
+                        <a:t>1</a:t>
+                      </a:r>
+                    </a:p>
+                  </a:txBody>
+                  <a:tcPr marL="58293" marR="58293" marT="29146" marB="29146"/>
+                </a:tc>
+                <a:tc>
+                  <a:txBody>
+                    <a:bodyPr/>
+                    <a:lstStyle/>
+                    <a:p>
+                      <a:r>
+                        <a:rPr lang="en-US" sz="1100" dirty="0">
+                          <a:ln>
+                            <a:noFill/>
+                          </a:ln>
+                          <a:solidFill>
+                            <a:schemeClr val="tx1"/>
+                          </a:solidFill>
+                        </a:rPr>
+                        <a:t>2</a:t>
+                      </a:r>
+                    </a:p>
+                  </a:txBody>
+                  <a:tcPr marL="58293" marR="58293" marT="29146" marB="29146"/>
+                </a:tc>
+                <a:tc>
+                  <a:txBody>
+                    <a:bodyPr/>
+                    <a:lstStyle/>
+                    <a:p>
+                      <a:r>
+                        <a:rPr lang="en-US" sz="1100" dirty="0">
+                          <a:ln>
+                            <a:noFill/>
+                          </a:ln>
+                          <a:solidFill>
+                            <a:schemeClr val="tx1"/>
+                          </a:solidFill>
+                        </a:rPr>
+                        <a:t>4</a:t>
+                      </a:r>
+                    </a:p>
+                  </a:txBody>
+                  <a:tcPr marL="58293" marR="58293" marT="29146" marB="29146"/>
+                </a:tc>
+                <a:tc>
+                  <a:txBody>
+                    <a:bodyPr/>
+                    <a:lstStyle/>
+                    <a:p>
+                      <a:r>
+                        <a:rPr lang="en-US" sz="1100" dirty="0">
+                          <a:ln>
+                            <a:noFill/>
+                          </a:ln>
+                          <a:solidFill>
+                            <a:schemeClr val="tx1"/>
+                          </a:solidFill>
+                        </a:rPr>
+                        <a:t>5</a:t>
+                      </a:r>
+                    </a:p>
+                  </a:txBody>
+                  <a:tcPr marL="58293" marR="58293" marT="29146" marB="29146"/>
+                </a:tc>
+                <a:tc>
+                  <a:txBody>
+                    <a:bodyPr/>
+                    <a:lstStyle/>
+                    <a:p>
+                      <a:r>
+                        <a:rPr lang="en-US" sz="1100" dirty="0">
+                          <a:ln>
+                            <a:noFill/>
+                          </a:ln>
+                          <a:solidFill>
+                            <a:schemeClr val="tx1"/>
+                          </a:solidFill>
+                        </a:rPr>
+                        <a:t>4</a:t>
+                      </a:r>
+                    </a:p>
+                  </a:txBody>
+                  <a:tcPr marL="58293" marR="58293" marT="29146" marB="29146"/>
+                </a:tc>
+                <a:tc>
+                  <a:txBody>
+                    <a:bodyPr/>
+                    <a:lstStyle/>
+                    <a:p>
+                      <a:r>
+                        <a:rPr lang="en-US" sz="1100" dirty="0">
+                          <a:ln>
+                            <a:noFill/>
+                          </a:ln>
+                          <a:solidFill>
+                            <a:schemeClr val="tx1"/>
+                          </a:solidFill>
+                        </a:rPr>
+                        <a:t>2</a:t>
+                      </a:r>
+                    </a:p>
+                  </a:txBody>
+                  <a:tcPr marL="58293" marR="58293" marT="29146" marB="29146"/>
+                </a:tc>
+                <a:extLst>
+                  <a:ext uri="{0D108BD9-81ED-4DB2-BD59-A6C34878D82A}">
+                    <a16:rowId xmlns:a16="http://schemas.microsoft.com/office/drawing/2014/main" val="1066366702"/>
+                  </a:ext>
+                </a:extLst>
+              </a:tr>
+              <a:tr h="399547">
+                <a:tc>
+                  <a:txBody>
+                    <a:bodyPr/>
+                    <a:lstStyle/>
+                    <a:p>
+                      <a:r>
+                        <a:rPr lang="en-US" sz="1100" b="0" dirty="0">
+                          <a:ln>
+                            <a:noFill/>
+                          </a:ln>
+                        </a:rPr>
+                        <a:t>J=7</a:t>
+                      </a:r>
+                    </a:p>
+                  </a:txBody>
+                  <a:tcPr marL="58293" marR="58293" marT="29146" marB="29146"/>
+                </a:tc>
+                <a:tc>
+                  <a:txBody>
+                    <a:bodyPr/>
+                    <a:lstStyle/>
+                    <a:p>
+                      <a:r>
+                        <a:rPr lang="en-US" sz="1100" dirty="0">
+                          <a:ln>
+                            <a:noFill/>
+                          </a:ln>
+                          <a:solidFill>
+                            <a:schemeClr val="tx1"/>
+                          </a:solidFill>
+                        </a:rPr>
+                        <a:t>0</a:t>
+                      </a:r>
+                    </a:p>
+                  </a:txBody>
+                  <a:tcPr marL="58293" marR="58293" marT="29146" marB="29146"/>
+                </a:tc>
+                <a:tc>
+                  <a:txBody>
+                    <a:bodyPr/>
+                    <a:lstStyle/>
+                    <a:p>
+                      <a:r>
+                        <a:rPr lang="en-US" sz="1100" dirty="0">
+                          <a:ln>
+                            <a:noFill/>
+                          </a:ln>
+                          <a:solidFill>
+                            <a:schemeClr val="tx1"/>
+                          </a:solidFill>
+                        </a:rPr>
+                        <a:t>0</a:t>
+                      </a:r>
+                    </a:p>
+                  </a:txBody>
+                  <a:tcPr marL="58293" marR="58293" marT="29146" marB="29146"/>
+                </a:tc>
+                <a:tc>
+                  <a:txBody>
+                    <a:bodyPr/>
+                    <a:lstStyle/>
+                    <a:p>
+                      <a:r>
+                        <a:rPr lang="en-US" sz="1100" dirty="0">
+                          <a:ln>
+                            <a:noFill/>
+                          </a:ln>
+                          <a:solidFill>
+                            <a:schemeClr val="tx1"/>
+                          </a:solidFill>
+                        </a:rPr>
+                        <a:t>0</a:t>
+                      </a:r>
+                    </a:p>
+                  </a:txBody>
+                  <a:tcPr marL="58293" marR="58293" marT="29146" marB="29146"/>
+                </a:tc>
+                <a:tc>
+                  <a:txBody>
+                    <a:bodyPr/>
+                    <a:lstStyle/>
+                    <a:p>
+                      <a:r>
+                        <a:rPr lang="en-US" sz="1100" dirty="0">
+                          <a:ln>
+                            <a:noFill/>
+                          </a:ln>
+                          <a:solidFill>
+                            <a:schemeClr val="tx1"/>
+                          </a:solidFill>
+                        </a:rPr>
+                        <a:t>0</a:t>
+                      </a:r>
+                    </a:p>
+                  </a:txBody>
+                  <a:tcPr marL="58293" marR="58293" marT="29146" marB="29146"/>
+                </a:tc>
+                <a:tc>
+                  <a:txBody>
+                    <a:bodyPr/>
+                    <a:lstStyle/>
+                    <a:p>
+                      <a:r>
+                        <a:rPr lang="en-US" sz="1100" dirty="0">
+                          <a:ln>
+                            <a:noFill/>
+                          </a:ln>
+                          <a:solidFill>
+                            <a:schemeClr val="tx1"/>
+                          </a:solidFill>
+                        </a:rPr>
+                        <a:t>1</a:t>
+                      </a:r>
+                    </a:p>
+                  </a:txBody>
+                  <a:tcPr marL="58293" marR="58293" marT="29146" marB="29146"/>
+                </a:tc>
+                <a:tc>
+                  <a:txBody>
+                    <a:bodyPr/>
+                    <a:lstStyle/>
+                    <a:p>
+                      <a:r>
+                        <a:rPr lang="en-US" sz="1100" dirty="0">
+                          <a:ln>
+                            <a:noFill/>
+                          </a:ln>
+                          <a:solidFill>
+                            <a:schemeClr val="tx1"/>
+                          </a:solidFill>
+                        </a:rPr>
+                        <a:t>1</a:t>
+                      </a:r>
+                    </a:p>
+                  </a:txBody>
+                  <a:tcPr marL="58293" marR="58293" marT="29146" marB="29146"/>
+                </a:tc>
+                <a:tc>
+                  <a:txBody>
+                    <a:bodyPr/>
+                    <a:lstStyle/>
+                    <a:p>
+                      <a:r>
+                        <a:rPr lang="en-US" sz="1100" dirty="0">
+                          <a:ln>
+                            <a:noFill/>
+                          </a:ln>
+                          <a:solidFill>
+                            <a:schemeClr val="tx1"/>
+                          </a:solidFill>
+                        </a:rPr>
+                        <a:t>2</a:t>
+                      </a:r>
+                    </a:p>
+                  </a:txBody>
+                  <a:tcPr marL="58293" marR="58293" marT="29146" marB="29146"/>
+                </a:tc>
+                <a:tc>
+                  <a:txBody>
+                    <a:bodyPr/>
+                    <a:lstStyle/>
+                    <a:p>
+                      <a:r>
+                        <a:rPr lang="en-US" sz="1100" dirty="0">
+                          <a:ln>
+                            <a:noFill/>
+                          </a:ln>
+                          <a:solidFill>
+                            <a:schemeClr val="tx1"/>
+                          </a:solidFill>
+                        </a:rPr>
+                        <a:t>4</a:t>
+                      </a:r>
+                    </a:p>
+                  </a:txBody>
+                  <a:tcPr marL="58293" marR="58293" marT="29146" marB="29146"/>
+                </a:tc>
+                <a:tc>
+                  <a:txBody>
+                    <a:bodyPr/>
+                    <a:lstStyle/>
+                    <a:p>
+                      <a:r>
+                        <a:rPr lang="en-US" sz="1100" dirty="0">
+                          <a:ln>
+                            <a:noFill/>
+                          </a:ln>
+                          <a:solidFill>
+                            <a:schemeClr val="tx1"/>
+                          </a:solidFill>
+                        </a:rPr>
+                        <a:t>5</a:t>
+                      </a:r>
+                    </a:p>
+                  </a:txBody>
+                  <a:tcPr marL="58293" marR="58293" marT="29146" marB="29146"/>
+                </a:tc>
+                <a:tc>
+                  <a:txBody>
+                    <a:bodyPr/>
+                    <a:lstStyle/>
+                    <a:p>
+                      <a:r>
+                        <a:rPr lang="en-US" sz="1100" dirty="0">
+                          <a:ln>
+                            <a:noFill/>
+                          </a:ln>
+                          <a:solidFill>
+                            <a:schemeClr val="tx1"/>
+                          </a:solidFill>
+                        </a:rPr>
+                        <a:t>2</a:t>
+                      </a:r>
+                    </a:p>
+                  </a:txBody>
+                  <a:tcPr marL="58293" marR="58293" marT="29146" marB="29146"/>
+                </a:tc>
+                <a:extLst>
+                  <a:ext uri="{0D108BD9-81ED-4DB2-BD59-A6C34878D82A}">
+                    <a16:rowId xmlns:a16="http://schemas.microsoft.com/office/drawing/2014/main" val="1236243677"/>
+                  </a:ext>
+                </a:extLst>
+              </a:tr>
+              <a:tr h="399547">
+                <a:tc>
+                  <a:txBody>
+                    <a:bodyPr/>
+                    <a:lstStyle/>
+                    <a:p>
+                      <a:r>
+                        <a:rPr lang="en-US" sz="1100" b="0" dirty="0">
+                          <a:ln>
+                            <a:noFill/>
+                          </a:ln>
+                        </a:rPr>
+                        <a:t>J=8</a:t>
+                      </a:r>
+                    </a:p>
+                  </a:txBody>
+                  <a:tcPr marL="58293" marR="58293" marT="29146" marB="29146"/>
+                </a:tc>
+                <a:tc>
+                  <a:txBody>
+                    <a:bodyPr/>
+                    <a:lstStyle/>
+                    <a:p>
+                      <a:r>
+                        <a:rPr lang="en-US" sz="1100" dirty="0">
+                          <a:ln>
+                            <a:noFill/>
+                          </a:ln>
+                          <a:solidFill>
+                            <a:schemeClr val="tx1"/>
+                          </a:solidFill>
+                        </a:rPr>
+                        <a:t>0</a:t>
+                      </a:r>
+                    </a:p>
+                  </a:txBody>
+                  <a:tcPr marL="58293" marR="58293" marT="29146" marB="29146"/>
+                </a:tc>
+                <a:tc>
+                  <a:txBody>
+                    <a:bodyPr/>
+                    <a:lstStyle/>
+                    <a:p>
+                      <a:r>
+                        <a:rPr lang="en-US" sz="1100" dirty="0">
+                          <a:ln>
+                            <a:noFill/>
+                          </a:ln>
+                          <a:solidFill>
+                            <a:schemeClr val="tx1"/>
+                          </a:solidFill>
+                        </a:rPr>
+                        <a:t>0</a:t>
+                      </a:r>
+                    </a:p>
+                  </a:txBody>
+                  <a:tcPr marL="58293" marR="58293" marT="29146" marB="29146"/>
+                </a:tc>
+                <a:tc>
+                  <a:txBody>
+                    <a:bodyPr/>
+                    <a:lstStyle/>
+                    <a:p>
+                      <a:r>
+                        <a:rPr lang="en-US" sz="1100" dirty="0">
+                          <a:ln>
+                            <a:noFill/>
+                          </a:ln>
+                          <a:solidFill>
+                            <a:schemeClr val="tx1"/>
+                          </a:solidFill>
+                        </a:rPr>
+                        <a:t>0</a:t>
+                      </a:r>
+                    </a:p>
+                  </a:txBody>
+                  <a:tcPr marL="58293" marR="58293" marT="29146" marB="29146"/>
+                </a:tc>
+                <a:tc>
+                  <a:txBody>
+                    <a:bodyPr/>
+                    <a:lstStyle/>
+                    <a:p>
+                      <a:r>
+                        <a:rPr lang="en-US" sz="1100" dirty="0">
+                          <a:ln>
+                            <a:noFill/>
+                          </a:ln>
+                          <a:solidFill>
+                            <a:schemeClr val="tx1"/>
+                          </a:solidFill>
+                        </a:rPr>
+                        <a:t>0</a:t>
+                      </a:r>
+                    </a:p>
+                  </a:txBody>
+                  <a:tcPr marL="58293" marR="58293" marT="29146" marB="29146"/>
+                </a:tc>
+                <a:tc>
+                  <a:txBody>
+                    <a:bodyPr/>
+                    <a:lstStyle/>
+                    <a:p>
+                      <a:r>
+                        <a:rPr lang="en-US" sz="1100" dirty="0">
+                          <a:ln>
+                            <a:noFill/>
+                          </a:ln>
+                          <a:solidFill>
+                            <a:schemeClr val="tx1"/>
+                          </a:solidFill>
+                        </a:rPr>
+                        <a:t>0</a:t>
+                      </a:r>
+                    </a:p>
+                  </a:txBody>
+                  <a:tcPr marL="58293" marR="58293" marT="29146" marB="29146"/>
+                </a:tc>
+                <a:tc>
+                  <a:txBody>
+                    <a:bodyPr/>
+                    <a:lstStyle/>
+                    <a:p>
+                      <a:r>
+                        <a:rPr lang="en-US" sz="1100" dirty="0">
+                          <a:ln>
+                            <a:noFill/>
+                          </a:ln>
+                          <a:solidFill>
+                            <a:schemeClr val="tx1"/>
+                          </a:solidFill>
+                        </a:rPr>
+                        <a:t>1</a:t>
+                      </a:r>
+                    </a:p>
+                  </a:txBody>
+                  <a:tcPr marL="58293" marR="58293" marT="29146" marB="29146"/>
+                </a:tc>
+                <a:tc>
+                  <a:txBody>
+                    <a:bodyPr/>
+                    <a:lstStyle/>
+                    <a:p>
+                      <a:r>
+                        <a:rPr lang="en-US" sz="1100" dirty="0">
+                          <a:ln>
+                            <a:noFill/>
+                          </a:ln>
+                          <a:solidFill>
+                            <a:schemeClr val="tx1"/>
+                          </a:solidFill>
+                        </a:rPr>
+                        <a:t>2</a:t>
+                      </a:r>
+                    </a:p>
+                  </a:txBody>
+                  <a:tcPr marL="58293" marR="58293" marT="29146" marB="29146"/>
+                </a:tc>
+                <a:tc>
+                  <a:txBody>
+                    <a:bodyPr/>
+                    <a:lstStyle/>
+                    <a:p>
+                      <a:r>
+                        <a:rPr lang="en-US" sz="1100" dirty="0">
+                          <a:ln>
+                            <a:noFill/>
+                          </a:ln>
+                          <a:solidFill>
+                            <a:schemeClr val="tx1"/>
+                          </a:solidFill>
+                        </a:rPr>
+                        <a:t>3</a:t>
+                      </a:r>
+                    </a:p>
+                  </a:txBody>
+                  <a:tcPr marL="58293" marR="58293" marT="29146" marB="29146"/>
+                </a:tc>
+                <a:tc>
+                  <a:txBody>
+                    <a:bodyPr/>
+                    <a:lstStyle/>
+                    <a:p>
+                      <a:r>
+                        <a:rPr lang="en-US" sz="1100" dirty="0">
+                          <a:ln>
+                            <a:noFill/>
+                          </a:ln>
+                          <a:solidFill>
+                            <a:schemeClr val="tx1"/>
+                          </a:solidFill>
+                        </a:rPr>
+                        <a:t>4</a:t>
+                      </a:r>
+                    </a:p>
+                  </a:txBody>
+                  <a:tcPr marL="58293" marR="58293" marT="29146" marB="29146"/>
+                </a:tc>
+                <a:tc>
+                  <a:txBody>
+                    <a:bodyPr/>
+                    <a:lstStyle/>
+                    <a:p>
+                      <a:r>
+                        <a:rPr lang="en-US" sz="1100" dirty="0">
+                          <a:ln>
+                            <a:noFill/>
+                          </a:ln>
+                          <a:solidFill>
+                            <a:schemeClr val="tx1"/>
+                          </a:solidFill>
+                        </a:rPr>
+                        <a:t>5</a:t>
+                      </a:r>
+                    </a:p>
+                  </a:txBody>
+                  <a:tcPr marL="58293" marR="58293" marT="29146" marB="29146"/>
+                </a:tc>
+                <a:extLst>
+                  <a:ext uri="{0D108BD9-81ED-4DB2-BD59-A6C34878D82A}">
+                    <a16:rowId xmlns:a16="http://schemas.microsoft.com/office/drawing/2014/main" val="65093884"/>
+                  </a:ext>
+                </a:extLst>
+              </a:tr>
+              <a:tr h="399547">
+                <a:tc>
+                  <a:txBody>
+                    <a:bodyPr/>
+                    <a:lstStyle/>
+                    <a:p>
+                      <a:r>
+                        <a:rPr lang="en-US" sz="1100" b="0" dirty="0">
+                          <a:ln>
+                            <a:noFill/>
+                          </a:ln>
+                        </a:rPr>
+                        <a:t>J=9</a:t>
+                      </a:r>
+                    </a:p>
+                  </a:txBody>
+                  <a:tcPr marL="58293" marR="58293" marT="29146" marB="29146"/>
+                </a:tc>
+                <a:tc>
+                  <a:txBody>
+                    <a:bodyPr/>
+                    <a:lstStyle/>
+                    <a:p>
+                      <a:r>
+                        <a:rPr lang="en-US" sz="1100" dirty="0">
+                          <a:ln>
+                            <a:noFill/>
+                          </a:ln>
+                          <a:solidFill>
+                            <a:schemeClr val="tx1"/>
+                          </a:solidFill>
+                        </a:rPr>
+                        <a:t>0</a:t>
+                      </a:r>
+                    </a:p>
+                  </a:txBody>
+                  <a:tcPr marL="58293" marR="58293" marT="29146" marB="29146"/>
+                </a:tc>
+                <a:tc>
+                  <a:txBody>
+                    <a:bodyPr/>
+                    <a:lstStyle/>
+                    <a:p>
+                      <a:r>
+                        <a:rPr lang="en-US" sz="1100" dirty="0">
+                          <a:ln>
+                            <a:noFill/>
+                          </a:ln>
+                          <a:solidFill>
+                            <a:schemeClr val="tx1"/>
+                          </a:solidFill>
+                        </a:rPr>
+                        <a:t>0</a:t>
+                      </a:r>
+                    </a:p>
+                  </a:txBody>
+                  <a:tcPr marL="58293" marR="58293" marT="29146" marB="29146"/>
+                </a:tc>
+                <a:tc>
+                  <a:txBody>
+                    <a:bodyPr/>
+                    <a:lstStyle/>
+                    <a:p>
+                      <a:r>
+                        <a:rPr lang="en-US" sz="1100" dirty="0">
+                          <a:ln>
+                            <a:noFill/>
+                          </a:ln>
+                          <a:solidFill>
+                            <a:schemeClr val="tx1"/>
+                          </a:solidFill>
+                        </a:rPr>
+                        <a:t>0</a:t>
+                      </a:r>
+                    </a:p>
+                  </a:txBody>
+                  <a:tcPr marL="58293" marR="58293" marT="29146" marB="29146"/>
+                </a:tc>
+                <a:tc>
+                  <a:txBody>
+                    <a:bodyPr/>
+                    <a:lstStyle/>
+                    <a:p>
+                      <a:r>
+                        <a:rPr lang="en-US" sz="1100" dirty="0">
+                          <a:ln>
+                            <a:noFill/>
+                          </a:ln>
+                          <a:solidFill>
+                            <a:schemeClr val="tx1"/>
+                          </a:solidFill>
+                        </a:rPr>
+                        <a:t>0</a:t>
+                      </a:r>
+                    </a:p>
+                  </a:txBody>
+                  <a:tcPr marL="58293" marR="58293" marT="29146" marB="29146"/>
+                </a:tc>
+                <a:tc>
+                  <a:txBody>
+                    <a:bodyPr/>
+                    <a:lstStyle/>
+                    <a:p>
+                      <a:r>
+                        <a:rPr lang="en-US" sz="1100" dirty="0">
+                          <a:ln>
+                            <a:noFill/>
+                          </a:ln>
+                          <a:solidFill>
+                            <a:schemeClr val="tx1"/>
+                          </a:solidFill>
+                        </a:rPr>
+                        <a:t>0</a:t>
+                      </a:r>
+                    </a:p>
+                  </a:txBody>
+                  <a:tcPr marL="58293" marR="58293" marT="29146" marB="29146"/>
+                </a:tc>
+                <a:tc>
+                  <a:txBody>
+                    <a:bodyPr/>
+                    <a:lstStyle/>
+                    <a:p>
+                      <a:r>
+                        <a:rPr lang="en-US" sz="1100" dirty="0">
+                          <a:ln>
+                            <a:noFill/>
+                          </a:ln>
+                          <a:solidFill>
+                            <a:schemeClr val="tx1"/>
+                          </a:solidFill>
+                        </a:rPr>
+                        <a:t>0</a:t>
+                      </a:r>
+                    </a:p>
+                  </a:txBody>
+                  <a:tcPr marL="58293" marR="58293" marT="29146" marB="29146"/>
+                </a:tc>
+                <a:tc>
+                  <a:txBody>
+                    <a:bodyPr/>
+                    <a:lstStyle/>
+                    <a:p>
+                      <a:r>
+                        <a:rPr lang="en-US" sz="1100" dirty="0">
+                          <a:ln>
+                            <a:noFill/>
+                          </a:ln>
+                          <a:solidFill>
+                            <a:schemeClr val="tx1"/>
+                          </a:solidFill>
+                        </a:rPr>
+                        <a:t>1</a:t>
+                      </a:r>
+                    </a:p>
+                  </a:txBody>
+                  <a:tcPr marL="58293" marR="58293" marT="29146" marB="29146"/>
+                </a:tc>
+                <a:tc>
+                  <a:txBody>
+                    <a:bodyPr/>
+                    <a:lstStyle/>
+                    <a:p>
+                      <a:r>
+                        <a:rPr lang="en-US" sz="1100" dirty="0">
+                          <a:ln>
+                            <a:noFill/>
+                          </a:ln>
+                          <a:solidFill>
+                            <a:schemeClr val="tx1"/>
+                          </a:solidFill>
+                        </a:rPr>
+                        <a:t>2</a:t>
+                      </a:r>
+                    </a:p>
+                  </a:txBody>
+                  <a:tcPr marL="58293" marR="58293" marT="29146" marB="29146"/>
+                </a:tc>
+                <a:tc>
+                  <a:txBody>
+                    <a:bodyPr/>
+                    <a:lstStyle/>
+                    <a:p>
+                      <a:r>
+                        <a:rPr lang="en-US" sz="1100" dirty="0">
+                          <a:ln>
+                            <a:noFill/>
+                          </a:ln>
+                          <a:solidFill>
+                            <a:schemeClr val="tx1"/>
+                          </a:solidFill>
+                        </a:rPr>
+                        <a:t>3</a:t>
+                      </a:r>
+                    </a:p>
+                  </a:txBody>
+                  <a:tcPr marL="58293" marR="58293" marT="29146" marB="29146"/>
+                </a:tc>
+                <a:tc>
+                  <a:txBody>
+                    <a:bodyPr/>
+                    <a:lstStyle/>
+                    <a:p>
+                      <a:r>
+                        <a:rPr lang="en-US" sz="1100" dirty="0">
+                          <a:ln>
+                            <a:noFill/>
+                          </a:ln>
+                          <a:solidFill>
+                            <a:schemeClr val="tx1"/>
+                          </a:solidFill>
+                        </a:rPr>
+                        <a:t>4</a:t>
+                      </a:r>
+                    </a:p>
+                  </a:txBody>
+                  <a:tcPr marL="58293" marR="58293" marT="29146" marB="29146"/>
+                </a:tc>
+                <a:extLst>
+                  <a:ext uri="{0D108BD9-81ED-4DB2-BD59-A6C34878D82A}">
+                    <a16:rowId xmlns:a16="http://schemas.microsoft.com/office/drawing/2014/main" val="2274803403"/>
+                  </a:ext>
+                </a:extLst>
+              </a:tr>
+            </a:tbl>
+          </a:graphicData>
+        </a:graphic>
+      </p:graphicFrame>
+      <mc:AlternateContent xmlns:mc="http://schemas.openxmlformats.org/markup-compatibility/2006" xmlns:a14="http://schemas.microsoft.com/office/drawing/2010/main">
+        <mc:Choice Requires="a14">
+          <p:sp>
+            <p:nvSpPr>
+              <p:cNvPr id="4" name="TextBox 3">
+                <a:extLst>
+                  <a:ext uri="{FF2B5EF4-FFF2-40B4-BE49-F238E27FC236}">
+                    <a16:creationId xmlns:a16="http://schemas.microsoft.com/office/drawing/2014/main" id="{91855051-C3DD-67C7-53D7-284D68903EDE}"/>
+                  </a:ext>
+                </a:extLst>
+              </p:cNvPr>
+              <p:cNvSpPr txBox="1"/>
+              <p:nvPr/>
+            </p:nvSpPr>
+            <p:spPr>
+              <a:xfrm>
+                <a:off x="1085997" y="2252704"/>
+                <a:ext cx="1021977" cy="391646"/>
+              </a:xfrm>
+              <a:prstGeom prst="rect">
+                <a:avLst/>
+              </a:prstGeom>
+              <a:noFill/>
+            </p:spPr>
+            <p:txBody>
+              <a:bodyPr wrap="square" rtlCol="0">
+                <a:spAutoFit/>
+              </a:bodyPr>
+              <a:lstStyle/>
+              <a:p>
+                <a:pPr/>
+                <a14:m>
+                  <m:oMathPara xmlns:m="http://schemas.openxmlformats.org/officeDocument/2006/math">
+                    <m:oMathParaPr>
+                      <m:jc m:val="centerGroup"/>
+                    </m:oMathParaPr>
+                    <m:oMath xmlns:m="http://schemas.openxmlformats.org/officeDocument/2006/math">
+                      <m:sSub>
+                        <m:sSubPr>
+                          <m:ctrlPr>
+                            <a:rPr lang="en-US" b="0" i="1" smtClean="0">
+                              <a:latin typeface="Cambria Math" panose="02040503050406030204" pitchFamily="18" charset="0"/>
+                            </a:rPr>
+                          </m:ctrlPr>
+                        </m:sSubPr>
+                        <m:e>
+                          <m:r>
+                            <a:rPr lang="en-US" b="0" i="1" smtClean="0">
+                              <a:latin typeface="Cambria Math" panose="02040503050406030204" pitchFamily="18" charset="0"/>
+                            </a:rPr>
+                            <m:t>𝐺</m:t>
+                          </m:r>
+                        </m:e>
+                        <m:sub>
+                          <m:r>
+                            <a:rPr lang="en-US" b="0" i="1" smtClean="0">
+                              <a:latin typeface="Cambria Math" panose="02040503050406030204" pitchFamily="18" charset="0"/>
+                            </a:rPr>
+                            <m:t>𝑗</m:t>
+                          </m:r>
+                          <m:r>
+                            <a:rPr lang="en-US" b="0" i="1" smtClean="0">
+                              <a:latin typeface="Cambria Math" panose="02040503050406030204" pitchFamily="18" charset="0"/>
+                            </a:rPr>
+                            <m:t>,</m:t>
+                          </m:r>
+                          <m:r>
+                            <a:rPr lang="en-US" b="0" i="1" smtClean="0">
+                              <a:latin typeface="Cambria Math" panose="02040503050406030204" pitchFamily="18" charset="0"/>
+                            </a:rPr>
+                            <m:t>𝑖</m:t>
+                          </m:r>
+                        </m:sub>
+                      </m:sSub>
+                      <m:r>
+                        <a:rPr lang="en-US" b="0" i="1" smtClean="0">
+                          <a:latin typeface="Cambria Math" panose="02040503050406030204" pitchFamily="18" charset="0"/>
+                        </a:rPr>
+                        <m:t>=</m:t>
+                      </m:r>
+                    </m:oMath>
+                  </m:oMathPara>
+                </a14:m>
+                <a:endParaRPr lang="en-US" dirty="0"/>
+              </a:p>
+            </p:txBody>
+          </p:sp>
+        </mc:Choice>
+        <mc:Fallback xmlns="">
+          <p:sp>
+            <p:nvSpPr>
+              <p:cNvPr id="4" name="TextBox 3">
+                <a:extLst>
+                  <a:ext uri="{FF2B5EF4-FFF2-40B4-BE49-F238E27FC236}">
+                    <a16:creationId xmlns:a16="http://schemas.microsoft.com/office/drawing/2014/main" id="{91855051-C3DD-67C7-53D7-284D68903EDE}"/>
+                  </a:ext>
+                </a:extLst>
+              </p:cNvPr>
+              <p:cNvSpPr txBox="1">
+                <a:spLocks noRot="1" noChangeAspect="1" noMove="1" noResize="1" noEditPoints="1" noAdjustHandles="1" noChangeArrowheads="1" noChangeShapeType="1" noTextEdit="1"/>
+              </p:cNvSpPr>
+              <p:nvPr/>
+            </p:nvSpPr>
+            <p:spPr>
+              <a:xfrm>
+                <a:off x="1085997" y="2252704"/>
+                <a:ext cx="1021977" cy="391646"/>
+              </a:xfrm>
+              <a:prstGeom prst="rect">
+                <a:avLst/>
+              </a:prstGeom>
+              <a:blipFill>
+                <a:blip r:embed="rId2"/>
+                <a:stretch>
+                  <a:fillRect b="-6250"/>
+                </a:stretch>
+              </a:blipFill>
+            </p:spPr>
+            <p:txBody>
+              <a:bodyPr/>
+              <a:lstStyle/>
+              <a:p>
+                <a:r>
+                  <a:rPr lang="en-US">
+                    <a:noFill/>
+                  </a:rPr>
+                  <a:t> </a:t>
+                </a:r>
+              </a:p>
+            </p:txBody>
+          </p:sp>
+        </mc:Fallback>
+      </mc:AlternateContent>
+      <p:graphicFrame>
+        <p:nvGraphicFramePr>
+          <p:cNvPr id="5" name="Table 4">
+            <a:extLst>
+              <a:ext uri="{FF2B5EF4-FFF2-40B4-BE49-F238E27FC236}">
+                <a16:creationId xmlns:a16="http://schemas.microsoft.com/office/drawing/2014/main" id="{3F8EDF4F-AF1D-9B0C-DF2F-7F598E338D0F}"/>
+              </a:ext>
+            </a:extLst>
+          </p:cNvPr>
+          <p:cNvGraphicFramePr>
+            <a:graphicFrameLocks noGrp="1"/>
+          </p:cNvGraphicFramePr>
+          <p:nvPr>
+            <p:extLst>
+              <p:ext uri="{D42A27DB-BD31-4B8C-83A1-F6EECF244321}">
+                <p14:modId xmlns:p14="http://schemas.microsoft.com/office/powerpoint/2010/main" val="2985596770"/>
+              </p:ext>
+            </p:extLst>
+          </p:nvPr>
+        </p:nvGraphicFramePr>
+        <p:xfrm>
+          <a:off x="3108965" y="4765133"/>
+          <a:ext cx="4841460" cy="761734"/>
+        </p:xfrm>
+        <a:graphic>
+          <a:graphicData uri="http://schemas.openxmlformats.org/drawingml/2006/table">
+            <a:tbl>
+              <a:tblPr firstRow="1" bandRow="1">
+                <a:tableStyleId>{D7AC3CCA-C797-4891-BE02-D94E43425B78}</a:tableStyleId>
+              </a:tblPr>
+              <a:tblGrid>
+                <a:gridCol w="484146">
+                  <a:extLst>
+                    <a:ext uri="{9D8B030D-6E8A-4147-A177-3AD203B41FA5}">
+                      <a16:colId xmlns:a16="http://schemas.microsoft.com/office/drawing/2014/main" val="1595782475"/>
+                    </a:ext>
+                  </a:extLst>
+                </a:gridCol>
+                <a:gridCol w="484146">
+                  <a:extLst>
+                    <a:ext uri="{9D8B030D-6E8A-4147-A177-3AD203B41FA5}">
+                      <a16:colId xmlns:a16="http://schemas.microsoft.com/office/drawing/2014/main" val="2895910770"/>
+                    </a:ext>
+                  </a:extLst>
+                </a:gridCol>
+                <a:gridCol w="484146">
+                  <a:extLst>
+                    <a:ext uri="{9D8B030D-6E8A-4147-A177-3AD203B41FA5}">
+                      <a16:colId xmlns:a16="http://schemas.microsoft.com/office/drawing/2014/main" val="4171943960"/>
+                    </a:ext>
+                  </a:extLst>
+                </a:gridCol>
+                <a:gridCol w="484146">
+                  <a:extLst>
+                    <a:ext uri="{9D8B030D-6E8A-4147-A177-3AD203B41FA5}">
+                      <a16:colId xmlns:a16="http://schemas.microsoft.com/office/drawing/2014/main" val="1069865398"/>
+                    </a:ext>
+                  </a:extLst>
+                </a:gridCol>
+                <a:gridCol w="484146">
+                  <a:extLst>
+                    <a:ext uri="{9D8B030D-6E8A-4147-A177-3AD203B41FA5}">
+                      <a16:colId xmlns:a16="http://schemas.microsoft.com/office/drawing/2014/main" val="2397053099"/>
+                    </a:ext>
+                  </a:extLst>
+                </a:gridCol>
+                <a:gridCol w="484146">
+                  <a:extLst>
+                    <a:ext uri="{9D8B030D-6E8A-4147-A177-3AD203B41FA5}">
+                      <a16:colId xmlns:a16="http://schemas.microsoft.com/office/drawing/2014/main" val="1885353613"/>
+                    </a:ext>
+                  </a:extLst>
+                </a:gridCol>
+                <a:gridCol w="484146">
+                  <a:extLst>
+                    <a:ext uri="{9D8B030D-6E8A-4147-A177-3AD203B41FA5}">
+                      <a16:colId xmlns:a16="http://schemas.microsoft.com/office/drawing/2014/main" val="2860925911"/>
+                    </a:ext>
+                  </a:extLst>
+                </a:gridCol>
+                <a:gridCol w="484146">
+                  <a:extLst>
+                    <a:ext uri="{9D8B030D-6E8A-4147-A177-3AD203B41FA5}">
+                      <a16:colId xmlns:a16="http://schemas.microsoft.com/office/drawing/2014/main" val="2068708222"/>
+                    </a:ext>
+                  </a:extLst>
+                </a:gridCol>
+                <a:gridCol w="484146">
+                  <a:extLst>
+                    <a:ext uri="{9D8B030D-6E8A-4147-A177-3AD203B41FA5}">
+                      <a16:colId xmlns:a16="http://schemas.microsoft.com/office/drawing/2014/main" val="1150587957"/>
+                    </a:ext>
+                  </a:extLst>
+                </a:gridCol>
+                <a:gridCol w="484146">
+                  <a:extLst>
+                    <a:ext uri="{9D8B030D-6E8A-4147-A177-3AD203B41FA5}">
+                      <a16:colId xmlns:a16="http://schemas.microsoft.com/office/drawing/2014/main" val="2391420808"/>
+                    </a:ext>
+                  </a:extLst>
+                </a:gridCol>
+              </a:tblGrid>
+              <a:tr h="380867">
+                <a:tc>
+                  <a:txBody>
+                    <a:bodyPr/>
+                    <a:lstStyle/>
+                    <a:p>
+                      <a:pPr marL="0" algn="l" defTabSz="914400" rtl="0" eaLnBrk="1" latinLnBrk="0" hangingPunct="1"/>
+                      <a:r>
+                        <a:rPr lang="en-US" sz="1100" b="0" kern="1200" dirty="0">
+                          <a:ln>
+                            <a:noFill/>
+                          </a:ln>
+                          <a:solidFill>
+                            <a:schemeClr val="dk1"/>
+                          </a:solidFill>
+                          <a:latin typeface="+mn-lt"/>
+                          <a:ea typeface="+mn-ea"/>
+                          <a:cs typeface="+mn-cs"/>
+                        </a:rPr>
+                        <a:t>i=0</a:t>
+                      </a:r>
+                    </a:p>
+                  </a:txBody>
+                  <a:tcPr marL="58293" marR="58293" marT="29146" marB="29146"/>
+                </a:tc>
+                <a:tc>
+                  <a:txBody>
+                    <a:bodyPr/>
+                    <a:lstStyle/>
+                    <a:p>
+                      <a:pPr marL="0" algn="l" defTabSz="914400" rtl="0" eaLnBrk="1" latinLnBrk="0" hangingPunct="1"/>
+                      <a:r>
+                        <a:rPr lang="en-US" sz="1100" b="0" kern="1200" dirty="0">
+                          <a:ln>
+                            <a:noFill/>
+                          </a:ln>
+                          <a:solidFill>
+                            <a:schemeClr val="dk1"/>
+                          </a:solidFill>
+                          <a:latin typeface="+mn-lt"/>
+                          <a:ea typeface="+mn-ea"/>
+                          <a:cs typeface="+mn-cs"/>
+                        </a:rPr>
+                        <a:t>i=1</a:t>
+                      </a:r>
+                    </a:p>
+                  </a:txBody>
+                  <a:tcPr marL="58293" marR="58293" marT="29146" marB="29146"/>
+                </a:tc>
+                <a:tc>
+                  <a:txBody>
+                    <a:bodyPr/>
+                    <a:lstStyle/>
+                    <a:p>
+                      <a:pPr marL="0" algn="l" defTabSz="914400" rtl="0" eaLnBrk="1" latinLnBrk="0" hangingPunct="1"/>
+                      <a:r>
+                        <a:rPr lang="en-US" sz="1100" b="0" kern="1200" dirty="0">
+                          <a:ln>
+                            <a:noFill/>
+                          </a:ln>
+                          <a:solidFill>
+                            <a:schemeClr val="dk1"/>
+                          </a:solidFill>
+                          <a:latin typeface="+mn-lt"/>
+                          <a:ea typeface="+mn-ea"/>
+                          <a:cs typeface="+mn-cs"/>
+                        </a:rPr>
+                        <a:t>i=2</a:t>
+                      </a:r>
+                    </a:p>
+                  </a:txBody>
+                  <a:tcPr marL="58293" marR="58293" marT="29146" marB="29146"/>
+                </a:tc>
+                <a:tc>
+                  <a:txBody>
+                    <a:bodyPr/>
+                    <a:lstStyle/>
+                    <a:p>
+                      <a:pPr marL="0" algn="l" defTabSz="914400" rtl="0" eaLnBrk="1" latinLnBrk="0" hangingPunct="1"/>
+                      <a:r>
+                        <a:rPr lang="en-US" sz="1100" b="0" kern="1200" dirty="0">
+                          <a:ln>
+                            <a:noFill/>
+                          </a:ln>
+                          <a:solidFill>
+                            <a:schemeClr val="dk1"/>
+                          </a:solidFill>
+                          <a:latin typeface="+mn-lt"/>
+                          <a:ea typeface="+mn-ea"/>
+                          <a:cs typeface="+mn-cs"/>
+                        </a:rPr>
+                        <a:t>i=3</a:t>
+                      </a:r>
+                    </a:p>
+                  </a:txBody>
+                  <a:tcPr marL="58293" marR="58293" marT="29146" marB="29146"/>
+                </a:tc>
+                <a:tc>
+                  <a:txBody>
+                    <a:bodyPr/>
+                    <a:lstStyle/>
+                    <a:p>
+                      <a:pPr marL="0" algn="l" defTabSz="914400" rtl="0" eaLnBrk="1" latinLnBrk="0" hangingPunct="1"/>
+                      <a:r>
+                        <a:rPr lang="en-US" sz="1100" b="0" kern="1200" dirty="0">
+                          <a:ln>
+                            <a:noFill/>
+                          </a:ln>
+                          <a:solidFill>
+                            <a:schemeClr val="dk1"/>
+                          </a:solidFill>
+                          <a:latin typeface="+mn-lt"/>
+                          <a:ea typeface="+mn-ea"/>
+                          <a:cs typeface="+mn-cs"/>
+                        </a:rPr>
+                        <a:t>i=4</a:t>
+                      </a:r>
+                    </a:p>
+                  </a:txBody>
+                  <a:tcPr marL="58293" marR="58293" marT="29146" marB="29146"/>
+                </a:tc>
+                <a:tc>
+                  <a:txBody>
+                    <a:bodyPr/>
+                    <a:lstStyle/>
+                    <a:p>
+                      <a:pPr marL="0" algn="l" defTabSz="914400" rtl="0" eaLnBrk="1" latinLnBrk="0" hangingPunct="1"/>
+                      <a:r>
+                        <a:rPr lang="en-US" sz="1100" b="0" kern="1200" dirty="0">
+                          <a:ln>
+                            <a:noFill/>
+                          </a:ln>
+                          <a:solidFill>
+                            <a:schemeClr val="dk1"/>
+                          </a:solidFill>
+                          <a:latin typeface="+mn-lt"/>
+                          <a:ea typeface="+mn-ea"/>
+                          <a:cs typeface="+mn-cs"/>
+                        </a:rPr>
+                        <a:t>i=5</a:t>
+                      </a:r>
+                    </a:p>
+                  </a:txBody>
+                  <a:tcPr marL="58293" marR="58293" marT="29146" marB="29146"/>
+                </a:tc>
+                <a:tc>
+                  <a:txBody>
+                    <a:bodyPr/>
+                    <a:lstStyle/>
+                    <a:p>
+                      <a:pPr marL="0" algn="l" defTabSz="914400" rtl="0" eaLnBrk="1" latinLnBrk="0" hangingPunct="1"/>
+                      <a:r>
+                        <a:rPr lang="en-US" sz="1100" b="0" kern="1200" dirty="0">
+                          <a:ln>
+                            <a:noFill/>
+                          </a:ln>
+                          <a:solidFill>
+                            <a:schemeClr val="dk1"/>
+                          </a:solidFill>
+                          <a:latin typeface="+mn-lt"/>
+                          <a:ea typeface="+mn-ea"/>
+                          <a:cs typeface="+mn-cs"/>
+                        </a:rPr>
+                        <a:t>i=6</a:t>
+                      </a:r>
+                    </a:p>
+                  </a:txBody>
+                  <a:tcPr marL="58293" marR="58293" marT="29146" marB="29146"/>
+                </a:tc>
+                <a:tc>
+                  <a:txBody>
+                    <a:bodyPr/>
+                    <a:lstStyle/>
+                    <a:p>
+                      <a:pPr marL="0" algn="l" defTabSz="914400" rtl="0" eaLnBrk="1" latinLnBrk="0" hangingPunct="1"/>
+                      <a:r>
+                        <a:rPr lang="en-US" sz="1100" b="0" kern="1200" dirty="0">
+                          <a:ln>
+                            <a:noFill/>
+                          </a:ln>
+                          <a:solidFill>
+                            <a:schemeClr val="dk1"/>
+                          </a:solidFill>
+                          <a:latin typeface="+mn-lt"/>
+                          <a:ea typeface="+mn-ea"/>
+                          <a:cs typeface="+mn-cs"/>
+                        </a:rPr>
+                        <a:t>i=7</a:t>
+                      </a:r>
+                    </a:p>
+                  </a:txBody>
+                  <a:tcPr marL="58293" marR="58293" marT="29146" marB="29146"/>
+                </a:tc>
+                <a:tc>
+                  <a:txBody>
+                    <a:bodyPr/>
+                    <a:lstStyle/>
+                    <a:p>
+                      <a:pPr marL="0" algn="l" defTabSz="914400" rtl="0" eaLnBrk="1" latinLnBrk="0" hangingPunct="1"/>
+                      <a:r>
+                        <a:rPr lang="en-US" sz="1100" b="0" kern="1200" dirty="0">
+                          <a:ln>
+                            <a:noFill/>
+                          </a:ln>
+                          <a:solidFill>
+                            <a:schemeClr val="dk1"/>
+                          </a:solidFill>
+                          <a:latin typeface="+mn-lt"/>
+                          <a:ea typeface="+mn-ea"/>
+                          <a:cs typeface="+mn-cs"/>
+                        </a:rPr>
+                        <a:t>i=8</a:t>
+                      </a:r>
+                    </a:p>
+                  </a:txBody>
+                  <a:tcPr marL="58293" marR="58293" marT="29146" marB="29146"/>
+                </a:tc>
+                <a:tc>
+                  <a:txBody>
+                    <a:bodyPr/>
+                    <a:lstStyle/>
+                    <a:p>
+                      <a:pPr marL="0" algn="l" defTabSz="914400" rtl="0" eaLnBrk="1" latinLnBrk="0" hangingPunct="1"/>
+                      <a:r>
+                        <a:rPr lang="en-US" sz="1100" b="0" kern="1200" dirty="0">
+                          <a:ln>
+                            <a:noFill/>
+                          </a:ln>
+                          <a:solidFill>
+                            <a:schemeClr val="dk1"/>
+                          </a:solidFill>
+                          <a:latin typeface="+mn-lt"/>
+                          <a:ea typeface="+mn-ea"/>
+                          <a:cs typeface="+mn-cs"/>
+                        </a:rPr>
+                        <a:t>i=9</a:t>
+                      </a:r>
+                    </a:p>
+                  </a:txBody>
+                  <a:tcPr marL="58293" marR="58293" marT="29146" marB="29146"/>
+                </a:tc>
+                <a:extLst>
+                  <a:ext uri="{0D108BD9-81ED-4DB2-BD59-A6C34878D82A}">
+                    <a16:rowId xmlns:a16="http://schemas.microsoft.com/office/drawing/2014/main" val="253219365"/>
+                  </a:ext>
+                </a:extLst>
+              </a:tr>
+              <a:tr h="380867">
+                <a:tc>
+                  <a:txBody>
+                    <a:bodyPr/>
+                    <a:lstStyle/>
+                    <a:p>
+                      <a:pPr marL="0" algn="l" defTabSz="914400" rtl="0" eaLnBrk="1" latinLnBrk="0" hangingPunct="1"/>
+                      <a:r>
+                        <a:rPr lang="en-US" sz="1100" b="0" kern="1200" dirty="0">
+                          <a:ln>
+                            <a:noFill/>
+                          </a:ln>
+                          <a:solidFill>
+                            <a:schemeClr val="dk1"/>
+                          </a:solidFill>
+                          <a:latin typeface="+mn-lt"/>
+                          <a:ea typeface="+mn-ea"/>
+                          <a:cs typeface="+mn-cs"/>
+                        </a:rPr>
+                        <a:t>2</a:t>
+                      </a:r>
+                    </a:p>
+                  </a:txBody>
+                  <a:tcPr marL="58293" marR="58293" marT="29146" marB="29146"/>
+                </a:tc>
+                <a:tc>
+                  <a:txBody>
+                    <a:bodyPr/>
+                    <a:lstStyle/>
+                    <a:p>
+                      <a:pPr marL="0" algn="l" defTabSz="914400" rtl="0" eaLnBrk="1" latinLnBrk="0" hangingPunct="1"/>
+                      <a:r>
+                        <a:rPr lang="en-US" sz="1100" b="0" kern="1200" dirty="0">
+                          <a:ln>
+                            <a:noFill/>
+                          </a:ln>
+                          <a:solidFill>
+                            <a:schemeClr val="dk1"/>
+                          </a:solidFill>
+                          <a:latin typeface="+mn-lt"/>
+                          <a:ea typeface="+mn-ea"/>
+                          <a:cs typeface="+mn-cs"/>
+                        </a:rPr>
+                        <a:t>6</a:t>
+                      </a:r>
+                    </a:p>
+                  </a:txBody>
+                  <a:tcPr marL="58293" marR="58293" marT="29146" marB="29146"/>
+                </a:tc>
+                <a:tc>
+                  <a:txBody>
+                    <a:bodyPr/>
+                    <a:lstStyle/>
+                    <a:p>
+                      <a:pPr marL="0" algn="l" defTabSz="914400" rtl="0" eaLnBrk="1" latinLnBrk="0" hangingPunct="1"/>
+                      <a:r>
+                        <a:rPr lang="en-US" sz="1100" b="0" kern="1200" dirty="0">
+                          <a:ln>
+                            <a:noFill/>
+                          </a:ln>
+                          <a:solidFill>
+                            <a:schemeClr val="dk1"/>
+                          </a:solidFill>
+                          <a:latin typeface="+mn-lt"/>
+                          <a:ea typeface="+mn-ea"/>
+                          <a:cs typeface="+mn-cs"/>
+                        </a:rPr>
+                        <a:t>2</a:t>
+                      </a:r>
+                    </a:p>
+                  </a:txBody>
+                  <a:tcPr marL="58293" marR="58293" marT="29146" marB="29146"/>
+                </a:tc>
+                <a:tc>
+                  <a:txBody>
+                    <a:bodyPr/>
+                    <a:lstStyle/>
+                    <a:p>
+                      <a:pPr marL="0" algn="l" defTabSz="914400" rtl="0" eaLnBrk="1" latinLnBrk="0" hangingPunct="1"/>
+                      <a:r>
+                        <a:rPr lang="en-US" sz="1100" b="0" kern="1200" dirty="0">
+                          <a:ln>
+                            <a:noFill/>
+                          </a:ln>
+                          <a:solidFill>
+                            <a:schemeClr val="dk1"/>
+                          </a:solidFill>
+                          <a:latin typeface="+mn-lt"/>
+                          <a:ea typeface="+mn-ea"/>
+                          <a:cs typeface="+mn-cs"/>
+                        </a:rPr>
+                        <a:t>1</a:t>
+                      </a:r>
+                    </a:p>
+                  </a:txBody>
+                  <a:tcPr marL="58293" marR="58293" marT="29146" marB="29146"/>
+                </a:tc>
+                <a:tc>
+                  <a:txBody>
+                    <a:bodyPr/>
+                    <a:lstStyle/>
+                    <a:p>
+                      <a:pPr marL="0" algn="l" defTabSz="914400" rtl="0" eaLnBrk="1" latinLnBrk="0" hangingPunct="1"/>
+                      <a:r>
+                        <a:rPr lang="en-US" sz="1100" b="0" kern="1200" dirty="0">
+                          <a:ln>
+                            <a:noFill/>
+                          </a:ln>
+                          <a:solidFill>
+                            <a:schemeClr val="dk1"/>
+                          </a:solidFill>
+                          <a:latin typeface="+mn-lt"/>
+                          <a:ea typeface="+mn-ea"/>
+                          <a:cs typeface="+mn-cs"/>
+                        </a:rPr>
+                        <a:t>1</a:t>
+                      </a:r>
+                    </a:p>
+                  </a:txBody>
+                  <a:tcPr marL="58293" marR="58293" marT="29146" marB="29146"/>
+                </a:tc>
+                <a:tc>
+                  <a:txBody>
+                    <a:bodyPr/>
+                    <a:lstStyle/>
+                    <a:p>
+                      <a:pPr marL="0" algn="l" defTabSz="914400" rtl="0" eaLnBrk="1" latinLnBrk="0" hangingPunct="1"/>
+                      <a:r>
+                        <a:rPr lang="en-US" sz="1100" b="0" kern="1200" dirty="0">
+                          <a:ln>
+                            <a:noFill/>
+                          </a:ln>
+                          <a:solidFill>
+                            <a:schemeClr val="dk1"/>
+                          </a:solidFill>
+                          <a:latin typeface="+mn-lt"/>
+                          <a:ea typeface="+mn-ea"/>
+                          <a:cs typeface="+mn-cs"/>
+                        </a:rPr>
+                        <a:t>5</a:t>
+                      </a:r>
+                    </a:p>
+                  </a:txBody>
+                  <a:tcPr marL="58293" marR="58293" marT="29146" marB="29146"/>
+                </a:tc>
+                <a:tc>
+                  <a:txBody>
+                    <a:bodyPr/>
+                    <a:lstStyle/>
+                    <a:p>
+                      <a:pPr marL="0" algn="l" defTabSz="914400" rtl="0" eaLnBrk="1" latinLnBrk="0" hangingPunct="1"/>
+                      <a:r>
+                        <a:rPr lang="en-US" sz="1100" b="0" kern="1200" dirty="0">
+                          <a:ln>
+                            <a:noFill/>
+                          </a:ln>
+                          <a:solidFill>
+                            <a:schemeClr val="dk1"/>
+                          </a:solidFill>
+                          <a:latin typeface="+mn-lt"/>
+                          <a:ea typeface="+mn-ea"/>
+                          <a:cs typeface="+mn-cs"/>
+                        </a:rPr>
+                        <a:t>5</a:t>
+                      </a:r>
+                    </a:p>
+                  </a:txBody>
+                  <a:tcPr marL="58293" marR="58293" marT="29146" marB="29146"/>
+                </a:tc>
+                <a:tc>
+                  <a:txBody>
+                    <a:bodyPr/>
+                    <a:lstStyle/>
+                    <a:p>
+                      <a:pPr marL="0" algn="l" defTabSz="914400" rtl="0" eaLnBrk="1" latinLnBrk="0" hangingPunct="1"/>
+                      <a:r>
+                        <a:rPr lang="en-US" sz="1100" b="0" kern="1200" dirty="0">
+                          <a:ln>
+                            <a:noFill/>
+                          </a:ln>
+                          <a:solidFill>
+                            <a:schemeClr val="dk1"/>
+                          </a:solidFill>
+                          <a:latin typeface="+mn-lt"/>
+                          <a:ea typeface="+mn-ea"/>
+                          <a:cs typeface="+mn-cs"/>
+                        </a:rPr>
+                        <a:t>2</a:t>
+                      </a:r>
+                    </a:p>
+                  </a:txBody>
+                  <a:tcPr marL="58293" marR="58293" marT="29146" marB="29146"/>
+                </a:tc>
+                <a:tc>
+                  <a:txBody>
+                    <a:bodyPr/>
+                    <a:lstStyle/>
+                    <a:p>
+                      <a:pPr marL="0" algn="l" defTabSz="914400" rtl="0" eaLnBrk="1" latinLnBrk="0" hangingPunct="1"/>
+                      <a:r>
+                        <a:rPr lang="en-US" sz="1100" b="0" kern="1200" dirty="0">
+                          <a:ln>
+                            <a:noFill/>
+                          </a:ln>
+                          <a:solidFill>
+                            <a:schemeClr val="dk1"/>
+                          </a:solidFill>
+                          <a:latin typeface="+mn-lt"/>
+                          <a:ea typeface="+mn-ea"/>
+                          <a:cs typeface="+mn-cs"/>
+                        </a:rPr>
+                        <a:t>4</a:t>
+                      </a:r>
+                    </a:p>
+                  </a:txBody>
+                  <a:tcPr marL="58293" marR="58293" marT="29146" marB="29146"/>
+                </a:tc>
+                <a:tc>
+                  <a:txBody>
+                    <a:bodyPr/>
+                    <a:lstStyle/>
+                    <a:p>
+                      <a:pPr marL="0" algn="l" defTabSz="914400" rtl="0" eaLnBrk="1" latinLnBrk="0" hangingPunct="1"/>
+                      <a:r>
+                        <a:rPr lang="en-US" sz="1100" b="0" kern="1200" dirty="0">
+                          <a:ln>
+                            <a:noFill/>
+                          </a:ln>
+                          <a:solidFill>
+                            <a:schemeClr val="dk1"/>
+                          </a:solidFill>
+                          <a:latin typeface="+mn-lt"/>
+                          <a:ea typeface="+mn-ea"/>
+                          <a:cs typeface="+mn-cs"/>
+                        </a:rPr>
+                        <a:t>2</a:t>
+                      </a:r>
+                    </a:p>
+                  </a:txBody>
+                  <a:tcPr marL="58293" marR="58293" marT="29146" marB="29146"/>
+                </a:tc>
+                <a:extLst>
+                  <a:ext uri="{0D108BD9-81ED-4DB2-BD59-A6C34878D82A}">
+                    <a16:rowId xmlns:a16="http://schemas.microsoft.com/office/drawing/2014/main" val="2218610499"/>
+                  </a:ext>
+                </a:extLst>
+              </a:tr>
+            </a:tbl>
+          </a:graphicData>
+        </a:graphic>
+      </p:graphicFrame>
+      <mc:AlternateContent xmlns:mc="http://schemas.openxmlformats.org/markup-compatibility/2006">
+        <mc:Choice xmlns:a14="http://schemas.microsoft.com/office/drawing/2010/main" Requires="a14">
+          <p:sp>
+            <p:nvSpPr>
+              <p:cNvPr id="7" name="TextBox 6">
+                <a:extLst>
+                  <a:ext uri="{FF2B5EF4-FFF2-40B4-BE49-F238E27FC236}">
+                    <a16:creationId xmlns:a16="http://schemas.microsoft.com/office/drawing/2014/main" id="{1200C9B4-AC55-6A5E-0AD4-75DFDE0B6561}"/>
+                  </a:ext>
+                </a:extLst>
+              </p:cNvPr>
+              <p:cNvSpPr txBox="1"/>
+              <p:nvPr/>
+            </p:nvSpPr>
+            <p:spPr>
+              <a:xfrm>
+                <a:off x="1085997" y="5157535"/>
+                <a:ext cx="1021977" cy="369332"/>
+              </a:xfrm>
+              <a:prstGeom prst="rect">
+                <a:avLst/>
+              </a:prstGeom>
+              <a:noFill/>
+            </p:spPr>
+            <p:txBody>
+              <a:bodyPr wrap="square" rtlCol="0">
+                <a:spAutoFit/>
+              </a:bodyPr>
+              <a:lstStyle/>
+              <a:p>
+                <a:pPr/>
+                <a14:m>
+                  <m:oMathPara xmlns:m="http://schemas.openxmlformats.org/officeDocument/2006/math">
+                    <m:oMathParaPr>
+                      <m:jc m:val="centerGroup"/>
+                    </m:oMathParaPr>
+                    <m:oMath xmlns:m="http://schemas.openxmlformats.org/officeDocument/2006/math">
+                      <m:sSub>
+                        <m:sSubPr>
+                          <m:ctrlPr>
+                            <a:rPr lang="en-US" b="0" i="1" smtClean="0">
+                              <a:latin typeface="Cambria Math" panose="02040503050406030204" pitchFamily="18" charset="0"/>
+                            </a:rPr>
+                          </m:ctrlPr>
+                        </m:sSubPr>
+                        <m:e>
+                          <m:r>
+                            <a:rPr lang="en-US" b="0" i="1" smtClean="0">
+                              <a:latin typeface="Cambria Math" panose="02040503050406030204" pitchFamily="18" charset="0"/>
+                            </a:rPr>
+                            <m:t>𝑆</m:t>
+                          </m:r>
+                        </m:e>
+                        <m:sub>
+                          <m:r>
+                            <a:rPr lang="en-US" b="0" i="1" smtClean="0">
+                              <a:latin typeface="Cambria Math" panose="02040503050406030204" pitchFamily="18" charset="0"/>
+                            </a:rPr>
+                            <m:t>𝑖</m:t>
+                          </m:r>
+                        </m:sub>
+                      </m:sSub>
+                      <m:r>
+                        <a:rPr lang="en-US" b="0" i="1" smtClean="0">
+                          <a:latin typeface="Cambria Math" panose="02040503050406030204" pitchFamily="18" charset="0"/>
+                        </a:rPr>
+                        <m:t>=</m:t>
+                      </m:r>
+                    </m:oMath>
+                  </m:oMathPara>
+                </a14:m>
+                <a:endParaRPr lang="en-US" dirty="0"/>
+              </a:p>
+            </p:txBody>
+          </p:sp>
+        </mc:Choice>
+        <mc:Fallback>
+          <p:sp>
+            <p:nvSpPr>
+              <p:cNvPr id="7" name="TextBox 6">
+                <a:extLst>
+                  <a:ext uri="{FF2B5EF4-FFF2-40B4-BE49-F238E27FC236}">
+                    <a16:creationId xmlns:a16="http://schemas.microsoft.com/office/drawing/2014/main" id="{1200C9B4-AC55-6A5E-0AD4-75DFDE0B6561}"/>
+                  </a:ext>
+                </a:extLst>
+              </p:cNvPr>
+              <p:cNvSpPr txBox="1">
+                <a:spLocks noRot="1" noChangeAspect="1" noMove="1" noResize="1" noEditPoints="1" noAdjustHandles="1" noChangeArrowheads="1" noChangeShapeType="1" noTextEdit="1"/>
+              </p:cNvSpPr>
+              <p:nvPr/>
+            </p:nvSpPr>
+            <p:spPr>
+              <a:xfrm>
+                <a:off x="1085997" y="5157535"/>
+                <a:ext cx="1021977" cy="369332"/>
+              </a:xfrm>
+              <a:prstGeom prst="rect">
+                <a:avLst/>
+              </a:prstGeom>
+              <a:blipFill>
+                <a:blip r:embed="rId3"/>
+                <a:stretch>
+                  <a:fillRect/>
+                </a:stretch>
+              </a:blipFill>
+            </p:spPr>
+            <p:txBody>
+              <a:bodyPr/>
+              <a:lstStyle/>
+              <a:p>
+                <a:r>
+                  <a:rPr lang="en-US">
+                    <a:noFill/>
+                  </a:rPr>
+                  <a:t> </a:t>
+                </a:r>
+              </a:p>
+            </p:txBody>
+          </p:sp>
+        </mc:Fallback>
+      </mc:AlternateContent>
+    </p:spTree>
+    <p:extLst>
+      <p:ext uri="{BB962C8B-B14F-4D97-AF65-F5344CB8AC3E}">
+        <p14:creationId xmlns:p14="http://schemas.microsoft.com/office/powerpoint/2010/main" val="100457597"/>
+      </p:ext>
+    </p:extLst>
+  </p:cSld>
+  <p:clrMapOvr>
+    <a:masterClrMapping/>
+  </p:clrMapOvr>
+</p:sld>
+</file>
+
+<file path=ppt/slides/slide8.xml><?xml version="1.0" encoding="utf-8"?>
+<p:sld xmlns:a="http://schemas.openxmlformats.org/drawingml/2006/main" xmlns:r="http://schemas.openxmlformats.org/officeDocument/2006/relationships" xmlns:p="http://schemas.openxmlformats.org/presentationml/2006/main">
+  <p:cSld>
+    <p:spTree>
+      <p:nvGrpSpPr>
+        <p:cNvPr id="1" name=""/>
+        <p:cNvGrpSpPr/>
+        <p:nvPr/>
+      </p:nvGrpSpPr>
+      <p:grpSpPr>
+        <a:xfrm>
+          <a:off x="0" y="0"/>
+          <a:ext cx="0" cy="0"/>
+          <a:chOff x="0" y="0"/>
+          <a:chExt cx="0" cy="0"/>
+        </a:xfrm>
+      </p:grpSpPr>
+      <mc:AlternateContent xmlns:mc="http://schemas.openxmlformats.org/markup-compatibility/2006">
+        <mc:Choice xmlns:a14="http://schemas.microsoft.com/office/drawing/2010/main" Requires="a14">
+          <p:sp>
+            <p:nvSpPr>
+              <p:cNvPr id="8" name="TextBox 7">
+                <a:extLst>
+                  <a:ext uri="{FF2B5EF4-FFF2-40B4-BE49-F238E27FC236}">
+                    <a16:creationId xmlns:a16="http://schemas.microsoft.com/office/drawing/2014/main" id="{B47F06A3-FE85-11F0-14E0-56A328E77DB7}"/>
+                  </a:ext>
+                </a:extLst>
+              </p:cNvPr>
+              <p:cNvSpPr txBox="1"/>
+              <p:nvPr/>
+            </p:nvSpPr>
+            <p:spPr>
+              <a:xfrm>
+                <a:off x="3227294" y="3572854"/>
+                <a:ext cx="3603812" cy="853439"/>
+              </a:xfrm>
+              <a:prstGeom prst="rect">
+                <a:avLst/>
+              </a:prstGeom>
+              <a:noFill/>
+            </p:spPr>
+            <p:txBody>
+              <a:bodyPr wrap="square" lIns="0" tIns="0" rIns="0" bIns="0" rtlCol="0">
+                <a:spAutoFit/>
+              </a:bodyPr>
+              <a:lstStyle/>
+              <a:p>
+                <a:pPr/>
+                <a14:m>
+                  <m:oMathPara xmlns:m="http://schemas.openxmlformats.org/officeDocument/2006/math">
+                    <m:oMathParaPr>
+                      <m:jc m:val="left"/>
+                    </m:oMathParaPr>
+                    <m:oMath xmlns:m="http://schemas.openxmlformats.org/officeDocument/2006/math">
+                      <m:sSub>
+                        <m:sSubPr>
+                          <m:ctrlPr>
+                            <a:rPr lang="en-US" sz="1873" i="1" smtClean="0">
+                              <a:latin typeface="Cambria Math" panose="02040503050406030204" pitchFamily="18" charset="0"/>
+                            </a:rPr>
+                          </m:ctrlPr>
+                        </m:sSubPr>
+                        <m:e>
+                          <m:r>
+                            <a:rPr lang="en-US" sz="1873" i="1">
+                              <a:latin typeface="Cambria Math" panose="02040503050406030204" pitchFamily="18" charset="0"/>
+                            </a:rPr>
+                            <m:t>(</m:t>
+                          </m:r>
+                          <m:r>
+                            <a:rPr lang="en-US" sz="1873" i="1">
+                              <a:latin typeface="Cambria Math" panose="02040503050406030204" pitchFamily="18" charset="0"/>
+                            </a:rPr>
+                            <m:t>𝐺</m:t>
+                          </m:r>
+                          <m:r>
+                            <a:rPr lang="en-US" sz="1873" i="1">
+                              <a:latin typeface="Cambria Math" panose="02040503050406030204" pitchFamily="18" charset="0"/>
+                            </a:rPr>
+                            <m:t>∗</m:t>
+                          </m:r>
+                          <m:r>
+                            <a:rPr lang="en-US" sz="1873" i="1">
+                              <a:latin typeface="Cambria Math" panose="02040503050406030204" pitchFamily="18" charset="0"/>
+                            </a:rPr>
+                            <m:t>𝑆</m:t>
+                          </m:r>
+                          <m:r>
+                            <a:rPr lang="en-US" sz="1873" i="1">
+                              <a:latin typeface="Cambria Math" panose="02040503050406030204" pitchFamily="18" charset="0"/>
+                            </a:rPr>
+                            <m:t>)</m:t>
+                          </m:r>
+                        </m:e>
+                        <m:sub>
+                          <m:r>
+                            <a:rPr lang="en-US" sz="1873" i="1">
+                              <a:latin typeface="Cambria Math" panose="02040503050406030204" pitchFamily="18" charset="0"/>
+                            </a:rPr>
+                            <m:t>𝑖</m:t>
+                          </m:r>
+                        </m:sub>
+                      </m:sSub>
+                      <m:r>
+                        <a:rPr lang="en-US" sz="1873" i="1">
+                          <a:latin typeface="Cambria Math" panose="02040503050406030204" pitchFamily="18" charset="0"/>
+                        </a:rPr>
+                        <m:t>=</m:t>
+                      </m:r>
+                      <m:nary>
+                        <m:naryPr>
+                          <m:chr m:val="∑"/>
+                          <m:ctrlPr>
+                            <a:rPr lang="en-US" sz="1873" i="1">
+                              <a:latin typeface="Cambria Math" panose="02040503050406030204" pitchFamily="18" charset="0"/>
+                            </a:rPr>
+                          </m:ctrlPr>
+                        </m:naryPr>
+                        <m:sub>
+                          <m:r>
+                            <a:rPr lang="en-US" sz="1873" i="1">
+                              <a:latin typeface="Cambria Math" panose="02040503050406030204" pitchFamily="18" charset="0"/>
+                            </a:rPr>
+                            <m:t>𝑖</m:t>
+                          </m:r>
+                          <m:r>
+                            <a:rPr lang="en-US" sz="1873" i="1">
+                              <a:latin typeface="Cambria Math" panose="02040503050406030204" pitchFamily="18" charset="0"/>
+                            </a:rPr>
+                            <m:t>=0</m:t>
+                          </m:r>
+                        </m:sub>
+                        <m:sup>
+                          <m:r>
+                            <a:rPr lang="en-US" sz="1873" i="1">
+                              <a:latin typeface="Cambria Math" panose="02040503050406030204" pitchFamily="18" charset="0"/>
+                            </a:rPr>
+                            <m:t>𝐷𝑢𝑚𝑚𝑦</m:t>
+                          </m:r>
+                          <m:r>
+                            <a:rPr lang="en-US" sz="1873" i="1">
+                              <a:latin typeface="Cambria Math" panose="02040503050406030204" pitchFamily="18" charset="0"/>
+                            </a:rPr>
+                            <m:t> </m:t>
+                          </m:r>
+                          <m:r>
+                            <a:rPr lang="en-US" sz="1873" i="1">
+                              <a:latin typeface="Cambria Math" panose="02040503050406030204" pitchFamily="18" charset="0"/>
+                            </a:rPr>
+                            <m:t>𝑎𝑥𝑖𝑠</m:t>
+                          </m:r>
+                          <m:r>
+                            <a:rPr lang="en-US" sz="1873" i="1">
+                              <a:latin typeface="Cambria Math" panose="02040503050406030204" pitchFamily="18" charset="0"/>
+                            </a:rPr>
+                            <m:t> </m:t>
+                          </m:r>
+                          <m:r>
+                            <a:rPr lang="en-US" sz="1873" i="1">
+                              <a:latin typeface="Cambria Math" panose="02040503050406030204" pitchFamily="18" charset="0"/>
+                            </a:rPr>
+                            <m:t>𝑙𝑒𝑛</m:t>
+                          </m:r>
+                        </m:sup>
+                        <m:e>
+                          <m:sSub>
+                            <m:sSubPr>
+                              <m:ctrlPr>
+                                <a:rPr lang="en-US" sz="1873" i="1">
+                                  <a:latin typeface="Cambria Math" panose="02040503050406030204" pitchFamily="18" charset="0"/>
+                                </a:rPr>
+                              </m:ctrlPr>
+                            </m:sSubPr>
+                            <m:e>
+                              <m:r>
+                                <a:rPr lang="en-US" sz="1873" i="1">
+                                  <a:latin typeface="Cambria Math" panose="02040503050406030204" pitchFamily="18" charset="0"/>
+                                </a:rPr>
+                                <m:t>𝐺</m:t>
+                              </m:r>
+                            </m:e>
+                            <m:sub>
+                              <m:r>
+                                <a:rPr lang="en-US" sz="1873" i="1">
+                                  <a:latin typeface="Cambria Math" panose="02040503050406030204" pitchFamily="18" charset="0"/>
+                                </a:rPr>
+                                <m:t>𝑗</m:t>
+                              </m:r>
+                              <m:r>
+                                <a:rPr lang="en-US" sz="1873" i="1">
+                                  <a:latin typeface="Cambria Math" panose="02040503050406030204" pitchFamily="18" charset="0"/>
+                                </a:rPr>
+                                <m:t>,</m:t>
+                              </m:r>
+                              <m:r>
+                                <a:rPr lang="en-US" sz="1873" i="1">
+                                  <a:latin typeface="Cambria Math" panose="02040503050406030204" pitchFamily="18" charset="0"/>
+                                </a:rPr>
+                                <m:t>𝑖</m:t>
+                              </m:r>
+                            </m:sub>
+                          </m:sSub>
+                          <m:r>
+                            <a:rPr lang="en-US" sz="1873" i="1">
+                              <a:latin typeface="Cambria Math" panose="02040503050406030204" pitchFamily="18" charset="0"/>
+                            </a:rPr>
+                            <m:t>⋅</m:t>
+                          </m:r>
+                          <m:sSub>
+                            <m:sSubPr>
+                              <m:ctrlPr>
+                                <a:rPr lang="en-US" sz="1873" i="1">
+                                  <a:latin typeface="Cambria Math" panose="02040503050406030204" pitchFamily="18" charset="0"/>
+                                </a:rPr>
+                              </m:ctrlPr>
+                            </m:sSubPr>
+                            <m:e>
+                              <m:r>
+                                <a:rPr lang="en-US" sz="1873" i="1">
+                                  <a:latin typeface="Cambria Math" panose="02040503050406030204" pitchFamily="18" charset="0"/>
+                                </a:rPr>
+                                <m:t>𝑆</m:t>
+                              </m:r>
+                            </m:e>
+                            <m:sub>
+                              <m:r>
+                                <a:rPr lang="en-US" sz="1873" i="1">
+                                  <a:latin typeface="Cambria Math" panose="02040503050406030204" pitchFamily="18" charset="0"/>
+                                </a:rPr>
+                                <m:t>𝑖</m:t>
+                              </m:r>
+                            </m:sub>
+                          </m:sSub>
+                          <m:r>
+                            <a:rPr lang="en-US" sz="1873" i="1">
+                              <a:latin typeface="Cambria Math" panose="02040503050406030204" pitchFamily="18" charset="0"/>
+                              <a:ea typeface="Cambria Math" panose="02040503050406030204" pitchFamily="18" charset="0"/>
+                            </a:rPr>
+                            <m:t>∆</m:t>
+                          </m:r>
+                          <m:r>
+                            <a:rPr lang="en-US" sz="1873" i="1">
+                              <a:latin typeface="Cambria Math" panose="02040503050406030204" pitchFamily="18" charset="0"/>
+                              <a:ea typeface="Cambria Math" panose="02040503050406030204" pitchFamily="18" charset="0"/>
+                            </a:rPr>
+                            <m:t>𝐸</m:t>
+                          </m:r>
+                        </m:e>
+                      </m:nary>
+                    </m:oMath>
+                  </m:oMathPara>
+                </a14:m>
+                <a:endParaRPr lang="en-US" sz="1873" dirty="0"/>
+              </a:p>
+            </p:txBody>
+          </p:sp>
+        </mc:Choice>
+        <mc:Fallback>
+          <p:sp>
+            <p:nvSpPr>
+              <p:cNvPr id="8" name="TextBox 7">
+                <a:extLst>
+                  <a:ext uri="{FF2B5EF4-FFF2-40B4-BE49-F238E27FC236}">
+                    <a16:creationId xmlns:a16="http://schemas.microsoft.com/office/drawing/2014/main" id="{B47F06A3-FE85-11F0-14E0-56A328E77DB7}"/>
+                  </a:ext>
+                </a:extLst>
+              </p:cNvPr>
+              <p:cNvSpPr txBox="1">
+                <a:spLocks noRot="1" noChangeAspect="1" noMove="1" noResize="1" noEditPoints="1" noAdjustHandles="1" noChangeArrowheads="1" noChangeShapeType="1" noTextEdit="1"/>
+              </p:cNvSpPr>
+              <p:nvPr/>
+            </p:nvSpPr>
+            <p:spPr>
+              <a:xfrm>
+                <a:off x="3227294" y="3572854"/>
+                <a:ext cx="3603812" cy="853439"/>
+              </a:xfrm>
+              <a:prstGeom prst="rect">
+                <a:avLst/>
+              </a:prstGeom>
+              <a:blipFill>
+                <a:blip r:embed="rId2"/>
+                <a:stretch>
+                  <a:fillRect/>
+                </a:stretch>
+              </a:blipFill>
+            </p:spPr>
+            <p:txBody>
+              <a:bodyPr/>
+              <a:lstStyle/>
+              <a:p>
+                <a:r>
+                  <a:rPr lang="en-US">
+                    <a:noFill/>
+                  </a:rPr>
+                  <a:t> </a:t>
+                </a:r>
+              </a:p>
+            </p:txBody>
+          </p:sp>
+        </mc:Fallback>
+      </mc:AlternateContent>
+      <mc:AlternateContent xmlns:mc="http://schemas.openxmlformats.org/markup-compatibility/2006" xmlns:a14="http://schemas.microsoft.com/office/drawing/2010/main">
+        <mc:Choice Requires="a14">
+          <p:sp>
+            <p:nvSpPr>
+              <p:cNvPr id="31" name="TextBox 30">
+                <a:extLst>
+                  <a:ext uri="{FF2B5EF4-FFF2-40B4-BE49-F238E27FC236}">
+                    <a16:creationId xmlns:a16="http://schemas.microsoft.com/office/drawing/2014/main" id="{7F78C53D-F36D-AF97-2A20-F114AA460E56}"/>
+                  </a:ext>
+                </a:extLst>
+              </p:cNvPr>
+              <p:cNvSpPr txBox="1"/>
+              <p:nvPr/>
+            </p:nvSpPr>
+            <p:spPr>
+              <a:xfrm>
+                <a:off x="1467839" y="824964"/>
+                <a:ext cx="3561361" cy="810863"/>
+              </a:xfrm>
+              <a:prstGeom prst="rect">
+                <a:avLst/>
+              </a:prstGeom>
+              <a:noFill/>
+            </p:spPr>
+            <p:txBody>
+              <a:bodyPr wrap="square" lIns="0" tIns="0" rIns="0" bIns="0" rtlCol="0">
+                <a:spAutoFit/>
+              </a:bodyPr>
+              <a:lstStyle/>
+              <a:p>
+                <a:pPr/>
+                <a14:m>
+                  <m:oMathPara xmlns:m="http://schemas.openxmlformats.org/officeDocument/2006/math">
+                    <m:oMathParaPr>
+                      <m:jc m:val="centerGroup"/>
+                    </m:oMathParaPr>
+                    <m:oMath xmlns:m="http://schemas.openxmlformats.org/officeDocument/2006/math">
+                      <m:sSub>
+                        <m:sSubPr>
+                          <m:ctrlPr>
+                            <a:rPr lang="en-US" sz="1873" i="1" smtClean="0">
+                              <a:latin typeface="Cambria Math" panose="02040503050406030204" pitchFamily="18" charset="0"/>
+                            </a:rPr>
+                          </m:ctrlPr>
+                        </m:sSubPr>
+                        <m:e>
+                          <m:r>
+                            <a:rPr lang="en-US" sz="1873" i="1">
+                              <a:latin typeface="Cambria Math" panose="02040503050406030204" pitchFamily="18" charset="0"/>
+                            </a:rPr>
+                            <m:t>(</m:t>
+                          </m:r>
+                          <m:r>
+                            <a:rPr lang="en-US" sz="1873" i="1">
+                              <a:latin typeface="Cambria Math" panose="02040503050406030204" pitchFamily="18" charset="0"/>
+                            </a:rPr>
+                            <m:t>𝐺</m:t>
+                          </m:r>
+                          <m:r>
+                            <a:rPr lang="en-US" sz="1873" i="1">
+                              <a:latin typeface="Cambria Math" panose="02040503050406030204" pitchFamily="18" charset="0"/>
+                            </a:rPr>
+                            <m:t>∗</m:t>
+                          </m:r>
+                          <m:r>
+                            <a:rPr lang="en-US" sz="1873" i="1">
+                              <a:latin typeface="Cambria Math" panose="02040503050406030204" pitchFamily="18" charset="0"/>
+                            </a:rPr>
+                            <m:t>𝑆</m:t>
+                          </m:r>
+                          <m:r>
+                            <a:rPr lang="en-US" sz="1873" i="1">
+                              <a:latin typeface="Cambria Math" panose="02040503050406030204" pitchFamily="18" charset="0"/>
+                            </a:rPr>
+                            <m:t>)(</m:t>
+                          </m:r>
+                          <m:r>
+                            <a:rPr lang="en-US" sz="1873" b="0" i="1" smtClean="0">
+                              <a:latin typeface="Cambria Math" panose="02040503050406030204" pitchFamily="18" charset="0"/>
+                            </a:rPr>
+                            <m:t>𝐸</m:t>
+                          </m:r>
+                        </m:e>
+                        <m:sub>
+                          <m:r>
+                            <a:rPr lang="en-US" sz="1873" i="1">
+                              <a:latin typeface="Cambria Math" panose="02040503050406030204" pitchFamily="18" charset="0"/>
+                            </a:rPr>
+                            <m:t>0</m:t>
+                          </m:r>
+                        </m:sub>
+                      </m:sSub>
+                      <m:r>
+                        <a:rPr lang="en-US" sz="1873" b="0" i="1" smtClean="0">
+                          <a:latin typeface="Cambria Math" panose="02040503050406030204" pitchFamily="18" charset="0"/>
+                        </a:rPr>
+                        <m:t>)</m:t>
+                      </m:r>
+                      <m:r>
+                        <a:rPr lang="en-US" sz="1873" i="1">
+                          <a:latin typeface="Cambria Math" panose="02040503050406030204" pitchFamily="18" charset="0"/>
+                        </a:rPr>
+                        <m:t>=</m:t>
+                      </m:r>
+                      <m:nary>
+                        <m:naryPr>
+                          <m:chr m:val="∑"/>
+                          <m:ctrlPr>
+                            <a:rPr lang="en-US" sz="1873" i="1">
+                              <a:latin typeface="Cambria Math" panose="02040503050406030204" pitchFamily="18" charset="0"/>
+                            </a:rPr>
+                          </m:ctrlPr>
+                        </m:naryPr>
+                        <m:sub>
+                          <m:r>
+                            <a:rPr lang="en-US" sz="1873" b="0" i="1" smtClean="0">
+                              <a:latin typeface="Cambria Math" panose="02040503050406030204" pitchFamily="18" charset="0"/>
+                            </a:rPr>
+                            <m:t>𝑖</m:t>
+                          </m:r>
+                          <m:r>
+                            <a:rPr lang="en-US" sz="1873" i="1">
+                              <a:latin typeface="Cambria Math" panose="02040503050406030204" pitchFamily="18" charset="0"/>
+                            </a:rPr>
+                            <m:t>=0</m:t>
+                          </m:r>
+                        </m:sub>
+                        <m:sup>
+                          <m:r>
+                            <a:rPr lang="en-US" sz="1873" b="0" i="1" smtClean="0">
+                              <a:latin typeface="Cambria Math" panose="02040503050406030204" pitchFamily="18" charset="0"/>
+                            </a:rPr>
+                            <m:t>9</m:t>
+                          </m:r>
+                        </m:sup>
+                        <m:e>
+                          <m:sSub>
+                            <m:sSubPr>
+                              <m:ctrlPr>
+                                <a:rPr lang="en-US" sz="1873" i="1">
+                                  <a:latin typeface="Cambria Math" panose="02040503050406030204" pitchFamily="18" charset="0"/>
+                                </a:rPr>
+                              </m:ctrlPr>
+                            </m:sSubPr>
+                            <m:e>
+                              <m:r>
+                                <a:rPr lang="en-US" sz="1873" i="1">
+                                  <a:latin typeface="Cambria Math" panose="02040503050406030204" pitchFamily="18" charset="0"/>
+                                </a:rPr>
+                                <m:t>𝐺</m:t>
+                              </m:r>
+                            </m:e>
+                            <m:sub>
+                              <m:r>
+                                <a:rPr lang="en-US" sz="1873" i="1" smtClean="0">
+                                  <a:latin typeface="Cambria Math" panose="02040503050406030204" pitchFamily="18" charset="0"/>
+                                </a:rPr>
+                                <m:t>0,</m:t>
+                              </m:r>
+                              <m:r>
+                                <a:rPr lang="en-US" sz="1873" b="0" i="1" smtClean="0">
+                                  <a:latin typeface="Cambria Math" panose="02040503050406030204" pitchFamily="18" charset="0"/>
+                                </a:rPr>
+                                <m:t>𝑖</m:t>
+                              </m:r>
+                            </m:sub>
+                          </m:sSub>
+                          <m:r>
+                            <a:rPr lang="en-US" sz="1873" i="1">
+                              <a:latin typeface="Cambria Math" panose="02040503050406030204" pitchFamily="18" charset="0"/>
+                            </a:rPr>
+                            <m:t>⋅</m:t>
+                          </m:r>
+                          <m:sSub>
+                            <m:sSubPr>
+                              <m:ctrlPr>
+                                <a:rPr lang="en-US" sz="1873" i="1">
+                                  <a:latin typeface="Cambria Math" panose="02040503050406030204" pitchFamily="18" charset="0"/>
+                                </a:rPr>
+                              </m:ctrlPr>
+                            </m:sSubPr>
+                            <m:e>
+                              <m:r>
+                                <a:rPr lang="en-US" sz="1873" i="1">
+                                  <a:latin typeface="Cambria Math" panose="02040503050406030204" pitchFamily="18" charset="0"/>
+                                </a:rPr>
+                                <m:t>𝑆</m:t>
+                              </m:r>
+                            </m:e>
+                            <m:sub>
+                              <m:r>
+                                <a:rPr lang="en-US" sz="1873" b="0" i="1" smtClean="0">
+                                  <a:latin typeface="Cambria Math" panose="02040503050406030204" pitchFamily="18" charset="0"/>
+                                </a:rPr>
+                                <m:t>𝑖</m:t>
+                              </m:r>
+                            </m:sub>
+                          </m:sSub>
+                        </m:e>
+                      </m:nary>
+                      <m:r>
+                        <a:rPr lang="en-US" sz="1873" i="1">
+                          <a:latin typeface="Cambria Math" panose="02040503050406030204" pitchFamily="18" charset="0"/>
+                          <a:ea typeface="Cambria Math" panose="02040503050406030204" pitchFamily="18" charset="0"/>
+                        </a:rPr>
+                        <m:t>∆</m:t>
+                      </m:r>
+                      <m:r>
+                        <m:rPr>
+                          <m:sty m:val="p"/>
+                        </m:rPr>
+                        <a:rPr lang="en-US" sz="1873">
+                          <a:latin typeface="Cambria Math" panose="02040503050406030204" pitchFamily="18" charset="0"/>
+                          <a:ea typeface="Cambria Math" panose="02040503050406030204" pitchFamily="18" charset="0"/>
+                        </a:rPr>
+                        <m:t>E</m:t>
+                      </m:r>
+                      <m:r>
+                        <a:rPr lang="en-US" sz="1873">
+                          <a:latin typeface="Cambria Math" panose="02040503050406030204" pitchFamily="18" charset="0"/>
+                        </a:rPr>
+                        <m:t>=20</m:t>
+                      </m:r>
+                    </m:oMath>
+                  </m:oMathPara>
+                </a14:m>
+                <a:endParaRPr lang="en-US" sz="1873" dirty="0"/>
+              </a:p>
+            </p:txBody>
+          </p:sp>
+        </mc:Choice>
+        <mc:Fallback xmlns="">
+          <p:sp>
+            <p:nvSpPr>
+              <p:cNvPr id="31" name="TextBox 30">
+                <a:extLst>
+                  <a:ext uri="{FF2B5EF4-FFF2-40B4-BE49-F238E27FC236}">
+                    <a16:creationId xmlns:a16="http://schemas.microsoft.com/office/drawing/2014/main" id="{7F78C53D-F36D-AF97-2A20-F114AA460E56}"/>
+                  </a:ext>
+                </a:extLst>
+              </p:cNvPr>
+              <p:cNvSpPr txBox="1">
+                <a:spLocks noRot="1" noChangeAspect="1" noMove="1" noResize="1" noEditPoints="1" noAdjustHandles="1" noChangeArrowheads="1" noChangeShapeType="1" noTextEdit="1"/>
+              </p:cNvSpPr>
+              <p:nvPr/>
+            </p:nvSpPr>
+            <p:spPr>
+              <a:xfrm>
+                <a:off x="1467839" y="824964"/>
+                <a:ext cx="3561361" cy="810863"/>
+              </a:xfrm>
+              <a:prstGeom prst="rect">
+                <a:avLst/>
+              </a:prstGeom>
+              <a:blipFill>
+                <a:blip r:embed="rId3"/>
+                <a:stretch>
+                  <a:fillRect/>
+                </a:stretch>
+              </a:blipFill>
+            </p:spPr>
+            <p:txBody>
+              <a:bodyPr/>
+              <a:lstStyle/>
+              <a:p>
+                <a:r>
+                  <a:rPr lang="en-US">
+                    <a:noFill/>
+                  </a:rPr>
+                  <a:t> </a:t>
+                </a:r>
+              </a:p>
+            </p:txBody>
+          </p:sp>
+        </mc:Fallback>
+      </mc:AlternateContent>
+      <mc:AlternateContent xmlns:mc="http://schemas.openxmlformats.org/markup-compatibility/2006" xmlns:a14="http://schemas.microsoft.com/office/drawing/2010/main">
+        <mc:Choice Requires="a14">
+          <p:sp>
+            <p:nvSpPr>
+              <p:cNvPr id="32" name="TextBox 31">
+                <a:extLst>
+                  <a:ext uri="{FF2B5EF4-FFF2-40B4-BE49-F238E27FC236}">
+                    <a16:creationId xmlns:a16="http://schemas.microsoft.com/office/drawing/2014/main" id="{37A876E0-E158-272F-51AB-47F7A4DFC951}"/>
+                  </a:ext>
+                </a:extLst>
+              </p:cNvPr>
+              <p:cNvSpPr txBox="1"/>
+              <p:nvPr/>
+            </p:nvSpPr>
+            <p:spPr>
+              <a:xfrm>
+                <a:off x="1467839" y="1712117"/>
+                <a:ext cx="3590847" cy="810863"/>
+              </a:xfrm>
+              <a:prstGeom prst="rect">
+                <a:avLst/>
+              </a:prstGeom>
+              <a:noFill/>
+            </p:spPr>
+            <p:txBody>
+              <a:bodyPr wrap="square" lIns="0" tIns="0" rIns="0" bIns="0" rtlCol="0">
+                <a:spAutoFit/>
+              </a:bodyPr>
+              <a:lstStyle/>
+              <a:p>
+                <a:pPr/>
+                <a14:m>
+                  <m:oMathPara xmlns:m="http://schemas.openxmlformats.org/officeDocument/2006/math">
+                    <m:oMathParaPr>
+                      <m:jc m:val="centerGroup"/>
+                    </m:oMathParaPr>
+                    <m:oMath xmlns:m="http://schemas.openxmlformats.org/officeDocument/2006/math">
+                      <m:sSub>
+                        <m:sSubPr>
+                          <m:ctrlPr>
+                            <a:rPr lang="en-US" sz="1873" i="1" smtClean="0">
+                              <a:latin typeface="Cambria Math" panose="02040503050406030204" pitchFamily="18" charset="0"/>
+                            </a:rPr>
+                          </m:ctrlPr>
+                        </m:sSubPr>
+                        <m:e>
+                          <m:r>
+                            <a:rPr lang="en-US" sz="1873" i="1">
+                              <a:latin typeface="Cambria Math" panose="02040503050406030204" pitchFamily="18" charset="0"/>
+                            </a:rPr>
+                            <m:t>(</m:t>
+                          </m:r>
+                          <m:r>
+                            <a:rPr lang="en-US" sz="1873" i="1">
+                              <a:latin typeface="Cambria Math" panose="02040503050406030204" pitchFamily="18" charset="0"/>
+                            </a:rPr>
+                            <m:t>𝐺</m:t>
+                          </m:r>
+                          <m:r>
+                            <a:rPr lang="en-US" sz="1873" i="1">
+                              <a:latin typeface="Cambria Math" panose="02040503050406030204" pitchFamily="18" charset="0"/>
+                            </a:rPr>
+                            <m:t>∗</m:t>
+                          </m:r>
+                          <m:r>
+                            <a:rPr lang="en-US" sz="1873" i="1">
+                              <a:latin typeface="Cambria Math" panose="02040503050406030204" pitchFamily="18" charset="0"/>
+                            </a:rPr>
+                            <m:t>𝑆</m:t>
+                          </m:r>
+                          <m:r>
+                            <a:rPr lang="en-US" sz="1873" i="1">
+                              <a:latin typeface="Cambria Math" panose="02040503050406030204" pitchFamily="18" charset="0"/>
+                            </a:rPr>
+                            <m:t>)(</m:t>
+                          </m:r>
+                          <m:r>
+                            <a:rPr lang="en-US" sz="1873" b="0" i="1" smtClean="0">
+                              <a:latin typeface="Cambria Math" panose="02040503050406030204" pitchFamily="18" charset="0"/>
+                            </a:rPr>
+                            <m:t>𝐸</m:t>
+                          </m:r>
+                        </m:e>
+                        <m:sub>
+                          <m:r>
+                            <a:rPr lang="en-US" sz="1873" i="1">
+                              <a:latin typeface="Cambria Math" panose="02040503050406030204" pitchFamily="18" charset="0"/>
+                            </a:rPr>
+                            <m:t>1</m:t>
+                          </m:r>
+                        </m:sub>
+                      </m:sSub>
+                      <m:r>
+                        <a:rPr lang="en-US" sz="1873" b="0" i="1" smtClean="0">
+                          <a:latin typeface="Cambria Math" panose="02040503050406030204" pitchFamily="18" charset="0"/>
+                        </a:rPr>
+                        <m:t>)</m:t>
+                      </m:r>
+                      <m:r>
+                        <a:rPr lang="en-US" sz="1873" i="1">
+                          <a:latin typeface="Cambria Math" panose="02040503050406030204" pitchFamily="18" charset="0"/>
+                        </a:rPr>
+                        <m:t>=</m:t>
+                      </m:r>
+                      <m:nary>
+                        <m:naryPr>
+                          <m:chr m:val="∑"/>
+                          <m:ctrlPr>
+                            <a:rPr lang="en-US" sz="1873" i="1">
+                              <a:latin typeface="Cambria Math" panose="02040503050406030204" pitchFamily="18" charset="0"/>
+                            </a:rPr>
+                          </m:ctrlPr>
+                        </m:naryPr>
+                        <m:sub>
+                          <m:r>
+                            <a:rPr lang="en-US" sz="1873" b="0" i="1" smtClean="0">
+                              <a:latin typeface="Cambria Math" panose="02040503050406030204" pitchFamily="18" charset="0"/>
+                            </a:rPr>
+                            <m:t>𝑖</m:t>
+                          </m:r>
+                          <m:r>
+                            <a:rPr lang="en-US" sz="1873" i="1">
+                              <a:latin typeface="Cambria Math" panose="02040503050406030204" pitchFamily="18" charset="0"/>
+                            </a:rPr>
+                            <m:t>=</m:t>
+                          </m:r>
+                          <m:r>
+                            <a:rPr lang="en-US" sz="1873" b="0" i="1" smtClean="0">
+                              <a:latin typeface="Cambria Math" panose="02040503050406030204" pitchFamily="18" charset="0"/>
+                            </a:rPr>
+                            <m:t>0</m:t>
+                          </m:r>
+                        </m:sub>
+                        <m:sup>
+                          <m:r>
+                            <a:rPr lang="en-US" sz="1873" b="0" i="1" smtClean="0">
+                              <a:latin typeface="Cambria Math" panose="02040503050406030204" pitchFamily="18" charset="0"/>
+                            </a:rPr>
+                            <m:t>9</m:t>
+                          </m:r>
+                        </m:sup>
+                        <m:e>
+                          <m:sSub>
+                            <m:sSubPr>
+                              <m:ctrlPr>
+                                <a:rPr lang="en-US" sz="1873" i="1">
+                                  <a:latin typeface="Cambria Math" panose="02040503050406030204" pitchFamily="18" charset="0"/>
+                                </a:rPr>
+                              </m:ctrlPr>
+                            </m:sSubPr>
+                            <m:e>
+                              <m:r>
+                                <a:rPr lang="en-US" sz="1873" i="1">
+                                  <a:latin typeface="Cambria Math" panose="02040503050406030204" pitchFamily="18" charset="0"/>
+                                </a:rPr>
+                                <m:t>𝐺</m:t>
+                              </m:r>
+                            </m:e>
+                            <m:sub>
+                              <m:r>
+                                <a:rPr lang="en-US" sz="1873" i="1">
+                                  <a:latin typeface="Cambria Math" panose="02040503050406030204" pitchFamily="18" charset="0"/>
+                                </a:rPr>
+                                <m:t>1,</m:t>
+                              </m:r>
+                              <m:r>
+                                <a:rPr lang="en-US" sz="1873" b="0" i="1" smtClean="0">
+                                  <a:latin typeface="Cambria Math" panose="02040503050406030204" pitchFamily="18" charset="0"/>
+                                </a:rPr>
+                                <m:t>𝑖</m:t>
+                              </m:r>
+                            </m:sub>
+                          </m:sSub>
+                          <m:r>
+                            <a:rPr lang="en-US" sz="1873" i="1">
+                              <a:latin typeface="Cambria Math" panose="02040503050406030204" pitchFamily="18" charset="0"/>
+                            </a:rPr>
+                            <m:t>⋅</m:t>
+                          </m:r>
+                          <m:sSub>
+                            <m:sSubPr>
+                              <m:ctrlPr>
+                                <a:rPr lang="en-US" sz="1873" i="1">
+                                  <a:latin typeface="Cambria Math" panose="02040503050406030204" pitchFamily="18" charset="0"/>
+                                </a:rPr>
+                              </m:ctrlPr>
+                            </m:sSubPr>
+                            <m:e>
+                              <m:r>
+                                <a:rPr lang="en-US" sz="1873" i="1">
+                                  <a:latin typeface="Cambria Math" panose="02040503050406030204" pitchFamily="18" charset="0"/>
+                                </a:rPr>
+                                <m:t>𝑆</m:t>
+                              </m:r>
+                            </m:e>
+                            <m:sub>
+                              <m:r>
+                                <a:rPr lang="en-US" sz="1873" b="0" i="1" smtClean="0">
+                                  <a:latin typeface="Cambria Math" panose="02040503050406030204" pitchFamily="18" charset="0"/>
+                                </a:rPr>
+                                <m:t>𝑖</m:t>
+                              </m:r>
+                            </m:sub>
+                          </m:sSub>
+                        </m:e>
+                      </m:nary>
+                      <m:r>
+                        <a:rPr lang="en-US" sz="1873" i="1">
+                          <a:latin typeface="Cambria Math" panose="02040503050406030204" pitchFamily="18" charset="0"/>
+                          <a:ea typeface="Cambria Math" panose="02040503050406030204" pitchFamily="18" charset="0"/>
+                        </a:rPr>
+                        <m:t>∆</m:t>
+                      </m:r>
+                      <m:r>
+                        <m:rPr>
+                          <m:sty m:val="p"/>
+                        </m:rPr>
+                        <a:rPr lang="en-US" sz="1873">
+                          <a:latin typeface="Cambria Math" panose="02040503050406030204" pitchFamily="18" charset="0"/>
+                          <a:ea typeface="Cambria Math" panose="02040503050406030204" pitchFamily="18" charset="0"/>
+                        </a:rPr>
+                        <m:t>E</m:t>
+                      </m:r>
+                      <m:r>
+                        <a:rPr lang="en-US" sz="1873">
+                          <a:latin typeface="Cambria Math" panose="02040503050406030204" pitchFamily="18" charset="0"/>
+                        </a:rPr>
+                        <m:t>=36</m:t>
+                      </m:r>
+                    </m:oMath>
+                  </m:oMathPara>
+                </a14:m>
+                <a:endParaRPr lang="en-US" sz="1873" dirty="0"/>
+              </a:p>
+            </p:txBody>
+          </p:sp>
+        </mc:Choice>
+        <mc:Fallback xmlns="">
+          <p:sp>
+            <p:nvSpPr>
+              <p:cNvPr id="32" name="TextBox 31">
+                <a:extLst>
+                  <a:ext uri="{FF2B5EF4-FFF2-40B4-BE49-F238E27FC236}">
+                    <a16:creationId xmlns:a16="http://schemas.microsoft.com/office/drawing/2014/main" id="{37A876E0-E158-272F-51AB-47F7A4DFC951}"/>
+                  </a:ext>
+                </a:extLst>
+              </p:cNvPr>
+              <p:cNvSpPr txBox="1">
+                <a:spLocks noRot="1" noChangeAspect="1" noMove="1" noResize="1" noEditPoints="1" noAdjustHandles="1" noChangeArrowheads="1" noChangeShapeType="1" noTextEdit="1"/>
+              </p:cNvSpPr>
+              <p:nvPr/>
+            </p:nvSpPr>
+            <p:spPr>
+              <a:xfrm>
+                <a:off x="1467839" y="1712117"/>
+                <a:ext cx="3590847" cy="810863"/>
+              </a:xfrm>
+              <a:prstGeom prst="rect">
+                <a:avLst/>
+              </a:prstGeom>
+              <a:blipFill>
+                <a:blip r:embed="rId4"/>
+                <a:stretch>
+                  <a:fillRect/>
+                </a:stretch>
+              </a:blipFill>
+            </p:spPr>
+            <p:txBody>
+              <a:bodyPr/>
+              <a:lstStyle/>
+              <a:p>
+                <a:r>
+                  <a:rPr lang="en-US">
+                    <a:noFill/>
+                  </a:rPr>
+                  <a:t> </a:t>
+                </a:r>
+              </a:p>
+            </p:txBody>
+          </p:sp>
+        </mc:Fallback>
+      </mc:AlternateContent>
+      <mc:AlternateContent xmlns:mc="http://schemas.openxmlformats.org/markup-compatibility/2006">
+        <mc:Choice xmlns:a14="http://schemas.microsoft.com/office/drawing/2010/main" Requires="a14">
+          <p:sp>
+            <p:nvSpPr>
+              <p:cNvPr id="33" name="TextBox 32">
+                <a:extLst>
+                  <a:ext uri="{FF2B5EF4-FFF2-40B4-BE49-F238E27FC236}">
+                    <a16:creationId xmlns:a16="http://schemas.microsoft.com/office/drawing/2014/main" id="{9A57316E-1C73-AB62-911E-5CB74F4BDF52}"/>
+                  </a:ext>
+                </a:extLst>
+              </p:cNvPr>
+              <p:cNvSpPr txBox="1"/>
+              <p:nvPr/>
+            </p:nvSpPr>
+            <p:spPr>
+              <a:xfrm>
+                <a:off x="1372736" y="2559724"/>
+                <a:ext cx="3751566" cy="810863"/>
+              </a:xfrm>
+              <a:prstGeom prst="rect">
+                <a:avLst/>
+              </a:prstGeom>
+              <a:noFill/>
+            </p:spPr>
+            <p:txBody>
+              <a:bodyPr wrap="square" lIns="0" tIns="0" rIns="0" bIns="0" rtlCol="0">
+                <a:spAutoFit/>
+              </a:bodyPr>
+              <a:lstStyle/>
+              <a:p>
+                <a:pPr/>
+                <a14:m>
+                  <m:oMathPara xmlns:m="http://schemas.openxmlformats.org/officeDocument/2006/math">
+                    <m:oMathParaPr>
+                      <m:jc m:val="centerGroup"/>
+                    </m:oMathParaPr>
+                    <m:oMath xmlns:m="http://schemas.openxmlformats.org/officeDocument/2006/math">
+                      <m:sSub>
+                        <m:sSubPr>
+                          <m:ctrlPr>
+                            <a:rPr lang="en-US" sz="1873" i="1" smtClean="0">
+                              <a:latin typeface="Cambria Math" panose="02040503050406030204" pitchFamily="18" charset="0"/>
+                            </a:rPr>
+                          </m:ctrlPr>
+                        </m:sSubPr>
+                        <m:e>
+                          <m:d>
+                            <m:dPr>
+                              <m:ctrlPr>
+                                <a:rPr lang="en-US" sz="1873" i="1">
+                                  <a:latin typeface="Cambria Math" panose="02040503050406030204" pitchFamily="18" charset="0"/>
+                                </a:rPr>
+                              </m:ctrlPr>
+                            </m:dPr>
+                            <m:e>
+                              <m:r>
+                                <a:rPr lang="en-US" sz="1873" i="1">
+                                  <a:latin typeface="Cambria Math" panose="02040503050406030204" pitchFamily="18" charset="0"/>
+                                </a:rPr>
+                                <m:t>𝐺</m:t>
+                              </m:r>
+                              <m:r>
+                                <a:rPr lang="en-US" sz="1873" i="1">
+                                  <a:latin typeface="Cambria Math" panose="02040503050406030204" pitchFamily="18" charset="0"/>
+                                </a:rPr>
+                                <m:t>∗</m:t>
+                              </m:r>
+                              <m:r>
+                                <a:rPr lang="en-US" sz="1873" i="1">
+                                  <a:latin typeface="Cambria Math" panose="02040503050406030204" pitchFamily="18" charset="0"/>
+                                </a:rPr>
+                                <m:t>𝑆</m:t>
+                              </m:r>
+                            </m:e>
+                          </m:d>
+                          <m:r>
+                            <a:rPr lang="en-US" sz="1873" b="0" i="1" smtClean="0">
+                              <a:latin typeface="Cambria Math" panose="02040503050406030204" pitchFamily="18" charset="0"/>
+                            </a:rPr>
+                            <m:t>(</m:t>
+                          </m:r>
+                          <m:r>
+                            <a:rPr lang="en-US" sz="1873" b="0" i="1" smtClean="0">
+                              <a:latin typeface="Cambria Math" panose="02040503050406030204" pitchFamily="18" charset="0"/>
+                            </a:rPr>
+                            <m:t>𝐸</m:t>
+                          </m:r>
+                        </m:e>
+                        <m:sub>
+                          <m:r>
+                            <a:rPr lang="en-US" sz="1873" i="1">
+                              <a:latin typeface="Cambria Math" panose="02040503050406030204" pitchFamily="18" charset="0"/>
+                            </a:rPr>
+                            <m:t>2</m:t>
+                          </m:r>
+                        </m:sub>
+                      </m:sSub>
+                      <m:r>
+                        <a:rPr lang="en-US" sz="1873" b="0" i="1" smtClean="0">
+                          <a:latin typeface="Cambria Math" panose="02040503050406030204" pitchFamily="18" charset="0"/>
+                        </a:rPr>
+                        <m:t>)</m:t>
+                      </m:r>
+                      <m:r>
+                        <a:rPr lang="en-US" sz="1873" i="1">
+                          <a:latin typeface="Cambria Math" panose="02040503050406030204" pitchFamily="18" charset="0"/>
+                        </a:rPr>
+                        <m:t>=</m:t>
+                      </m:r>
+                      <m:nary>
+                        <m:naryPr>
+                          <m:chr m:val="∑"/>
+                          <m:ctrlPr>
+                            <a:rPr lang="en-US" sz="1873" i="1">
+                              <a:latin typeface="Cambria Math" panose="02040503050406030204" pitchFamily="18" charset="0"/>
+                            </a:rPr>
+                          </m:ctrlPr>
+                        </m:naryPr>
+                        <m:sub>
+                          <m:r>
+                            <a:rPr lang="en-US" sz="1873" b="0" i="1" smtClean="0">
+                              <a:latin typeface="Cambria Math" panose="02040503050406030204" pitchFamily="18" charset="0"/>
+                            </a:rPr>
+                            <m:t>𝑖</m:t>
+                          </m:r>
+                          <m:r>
+                            <a:rPr lang="en-US" sz="1873" i="1">
+                              <a:latin typeface="Cambria Math" panose="02040503050406030204" pitchFamily="18" charset="0"/>
+                            </a:rPr>
+                            <m:t>=0</m:t>
+                          </m:r>
+                        </m:sub>
+                        <m:sup>
+                          <m:r>
+                            <a:rPr lang="en-US" sz="1873" b="0" i="1" smtClean="0">
+                              <a:latin typeface="Cambria Math" panose="02040503050406030204" pitchFamily="18" charset="0"/>
+                            </a:rPr>
+                            <m:t>9</m:t>
+                          </m:r>
+                        </m:sup>
+                        <m:e>
+                          <m:sSub>
+                            <m:sSubPr>
+                              <m:ctrlPr>
+                                <a:rPr lang="en-US" sz="1873" i="1">
+                                  <a:latin typeface="Cambria Math" panose="02040503050406030204" pitchFamily="18" charset="0"/>
+                                </a:rPr>
+                              </m:ctrlPr>
+                            </m:sSubPr>
+                            <m:e>
+                              <m:r>
+                                <a:rPr lang="en-US" sz="1873" i="1">
+                                  <a:latin typeface="Cambria Math" panose="02040503050406030204" pitchFamily="18" charset="0"/>
+                                </a:rPr>
+                                <m:t>𝐺</m:t>
+                              </m:r>
+                            </m:e>
+                            <m:sub>
+                              <m:r>
+                                <a:rPr lang="en-US" sz="1873" i="1">
+                                  <a:latin typeface="Cambria Math" panose="02040503050406030204" pitchFamily="18" charset="0"/>
+                                </a:rPr>
+                                <m:t>2,</m:t>
+                              </m:r>
+                              <m:r>
+                                <a:rPr lang="en-US" sz="1873" b="0" i="1" smtClean="0">
+                                  <a:latin typeface="Cambria Math" panose="02040503050406030204" pitchFamily="18" charset="0"/>
+                                </a:rPr>
+                                <m:t>𝑖</m:t>
+                              </m:r>
+                            </m:sub>
+                          </m:sSub>
+                          <m:r>
+                            <a:rPr lang="en-US" sz="1873" i="1">
+                              <a:latin typeface="Cambria Math" panose="02040503050406030204" pitchFamily="18" charset="0"/>
+                            </a:rPr>
+                            <m:t>⋅</m:t>
+                          </m:r>
+                          <m:sSub>
+                            <m:sSubPr>
+                              <m:ctrlPr>
+                                <a:rPr lang="en-US" sz="1873" i="1">
+                                  <a:latin typeface="Cambria Math" panose="02040503050406030204" pitchFamily="18" charset="0"/>
+                                </a:rPr>
+                              </m:ctrlPr>
+                            </m:sSubPr>
+                            <m:e>
+                              <m:r>
+                                <a:rPr lang="en-US" sz="1873" i="1">
+                                  <a:latin typeface="Cambria Math" panose="02040503050406030204" pitchFamily="18" charset="0"/>
+                                </a:rPr>
+                                <m:t>𝑆</m:t>
+                              </m:r>
+                            </m:e>
+                            <m:sub>
+                              <m:r>
+                                <a:rPr lang="en-US" sz="1873" b="0" i="1" smtClean="0">
+                                  <a:latin typeface="Cambria Math" panose="02040503050406030204" pitchFamily="18" charset="0"/>
+                                </a:rPr>
+                                <m:t>𝑖</m:t>
+                              </m:r>
+                            </m:sub>
+                          </m:sSub>
+                        </m:e>
+                      </m:nary>
+                      <m:r>
+                        <a:rPr lang="en-US" sz="1873" i="1">
+                          <a:latin typeface="Cambria Math" panose="02040503050406030204" pitchFamily="18" charset="0"/>
+                          <a:ea typeface="Cambria Math" panose="02040503050406030204" pitchFamily="18" charset="0"/>
+                        </a:rPr>
+                        <m:t>∆</m:t>
+                      </m:r>
+                      <m:r>
+                        <m:rPr>
+                          <m:sty m:val="p"/>
+                        </m:rPr>
+                        <a:rPr lang="en-US" sz="1873">
+                          <a:latin typeface="Cambria Math" panose="02040503050406030204" pitchFamily="18" charset="0"/>
+                          <a:ea typeface="Cambria Math" panose="02040503050406030204" pitchFamily="18" charset="0"/>
+                        </a:rPr>
+                        <m:t>E</m:t>
+                      </m:r>
+                      <m:r>
+                        <a:rPr lang="en-US" sz="1873">
+                          <a:latin typeface="Cambria Math" panose="02040503050406030204" pitchFamily="18" charset="0"/>
+                        </a:rPr>
+                        <m:t>=38</m:t>
+                      </m:r>
+                    </m:oMath>
+                  </m:oMathPara>
+                </a14:m>
+                <a:endParaRPr lang="en-US" sz="1873" dirty="0"/>
+              </a:p>
+            </p:txBody>
+          </p:sp>
+        </mc:Choice>
+        <mc:Fallback>
+          <p:sp>
+            <p:nvSpPr>
+              <p:cNvPr id="33" name="TextBox 32">
+                <a:extLst>
+                  <a:ext uri="{FF2B5EF4-FFF2-40B4-BE49-F238E27FC236}">
+                    <a16:creationId xmlns:a16="http://schemas.microsoft.com/office/drawing/2014/main" id="{9A57316E-1C73-AB62-911E-5CB74F4BDF52}"/>
+                  </a:ext>
+                </a:extLst>
+              </p:cNvPr>
+              <p:cNvSpPr txBox="1">
+                <a:spLocks noRot="1" noChangeAspect="1" noMove="1" noResize="1" noEditPoints="1" noAdjustHandles="1" noChangeArrowheads="1" noChangeShapeType="1" noTextEdit="1"/>
+              </p:cNvSpPr>
+              <p:nvPr/>
+            </p:nvSpPr>
+            <p:spPr>
+              <a:xfrm>
+                <a:off x="1372736" y="2559724"/>
+                <a:ext cx="3751566" cy="810863"/>
+              </a:xfrm>
+              <a:prstGeom prst="rect">
+                <a:avLst/>
+              </a:prstGeom>
+              <a:blipFill>
+                <a:blip r:embed="rId5"/>
+                <a:stretch>
+                  <a:fillRect/>
+                </a:stretch>
+              </a:blipFill>
+            </p:spPr>
+            <p:txBody>
+              <a:bodyPr/>
+              <a:lstStyle/>
+              <a:p>
+                <a:r>
+                  <a:rPr lang="en-US">
+                    <a:noFill/>
+                  </a:rPr>
+                  <a:t> </a:t>
+                </a:r>
+              </a:p>
+            </p:txBody>
+          </p:sp>
+        </mc:Fallback>
+      </mc:AlternateContent>
+      <p:graphicFrame>
+        <p:nvGraphicFramePr>
+          <p:cNvPr id="2" name="Table 1">
+            <a:extLst>
+              <a:ext uri="{FF2B5EF4-FFF2-40B4-BE49-F238E27FC236}">
+                <a16:creationId xmlns:a16="http://schemas.microsoft.com/office/drawing/2014/main" id="{6B3D8B40-9749-1FE2-CD74-77EE3E5411E3}"/>
+              </a:ext>
+            </a:extLst>
+          </p:cNvPr>
+          <p:cNvGraphicFramePr>
+            <a:graphicFrameLocks noGrp="1"/>
+          </p:cNvGraphicFramePr>
+          <p:nvPr>
+            <p:extLst>
+              <p:ext uri="{D42A27DB-BD31-4B8C-83A1-F6EECF244321}">
+                <p14:modId xmlns:p14="http://schemas.microsoft.com/office/powerpoint/2010/main" val="2736477974"/>
+              </p:ext>
+            </p:extLst>
+          </p:nvPr>
+        </p:nvGraphicFramePr>
+        <p:xfrm>
+          <a:off x="5279085" y="837203"/>
+          <a:ext cx="3165660" cy="786384"/>
+        </p:xfrm>
+        <a:graphic>
+          <a:graphicData uri="http://schemas.openxmlformats.org/drawingml/2006/table">
+            <a:tbl>
+              <a:tblPr firstRow="1" bandRow="1">
+                <a:tableStyleId>{5C22544A-7EE6-4342-B048-85BDC9FD1C3A}</a:tableStyleId>
+              </a:tblPr>
+              <a:tblGrid>
+                <a:gridCol w="316566">
+                  <a:extLst>
+                    <a:ext uri="{9D8B030D-6E8A-4147-A177-3AD203B41FA5}">
+                      <a16:colId xmlns:a16="http://schemas.microsoft.com/office/drawing/2014/main" val="2358392549"/>
+                    </a:ext>
+                  </a:extLst>
+                </a:gridCol>
+                <a:gridCol w="316566">
+                  <a:extLst>
+                    <a:ext uri="{9D8B030D-6E8A-4147-A177-3AD203B41FA5}">
+                      <a16:colId xmlns:a16="http://schemas.microsoft.com/office/drawing/2014/main" val="871863438"/>
+                    </a:ext>
+                  </a:extLst>
+                </a:gridCol>
+                <a:gridCol w="316566">
+                  <a:extLst>
+                    <a:ext uri="{9D8B030D-6E8A-4147-A177-3AD203B41FA5}">
+                      <a16:colId xmlns:a16="http://schemas.microsoft.com/office/drawing/2014/main" val="1436691247"/>
+                    </a:ext>
+                  </a:extLst>
+                </a:gridCol>
+                <a:gridCol w="316566">
+                  <a:extLst>
+                    <a:ext uri="{9D8B030D-6E8A-4147-A177-3AD203B41FA5}">
+                      <a16:colId xmlns:a16="http://schemas.microsoft.com/office/drawing/2014/main" val="2617078870"/>
+                    </a:ext>
+                  </a:extLst>
+                </a:gridCol>
+                <a:gridCol w="316566">
+                  <a:extLst>
+                    <a:ext uri="{9D8B030D-6E8A-4147-A177-3AD203B41FA5}">
+                      <a16:colId xmlns:a16="http://schemas.microsoft.com/office/drawing/2014/main" val="181329175"/>
+                    </a:ext>
+                  </a:extLst>
+                </a:gridCol>
+                <a:gridCol w="316566">
+                  <a:extLst>
+                    <a:ext uri="{9D8B030D-6E8A-4147-A177-3AD203B41FA5}">
+                      <a16:colId xmlns:a16="http://schemas.microsoft.com/office/drawing/2014/main" val="2895307247"/>
+                    </a:ext>
+                  </a:extLst>
+                </a:gridCol>
+                <a:gridCol w="316566">
+                  <a:extLst>
+                    <a:ext uri="{9D8B030D-6E8A-4147-A177-3AD203B41FA5}">
+                      <a16:colId xmlns:a16="http://schemas.microsoft.com/office/drawing/2014/main" val="1354488270"/>
+                    </a:ext>
+                  </a:extLst>
+                </a:gridCol>
+                <a:gridCol w="316566">
+                  <a:extLst>
+                    <a:ext uri="{9D8B030D-6E8A-4147-A177-3AD203B41FA5}">
+                      <a16:colId xmlns:a16="http://schemas.microsoft.com/office/drawing/2014/main" val="651173928"/>
+                    </a:ext>
+                  </a:extLst>
+                </a:gridCol>
+                <a:gridCol w="316566">
+                  <a:extLst>
+                    <a:ext uri="{9D8B030D-6E8A-4147-A177-3AD203B41FA5}">
+                      <a16:colId xmlns:a16="http://schemas.microsoft.com/office/drawing/2014/main" val="437583720"/>
+                    </a:ext>
+                  </a:extLst>
+                </a:gridCol>
+                <a:gridCol w="316566">
+                  <a:extLst>
+                    <a:ext uri="{9D8B030D-6E8A-4147-A177-3AD203B41FA5}">
+                      <a16:colId xmlns:a16="http://schemas.microsoft.com/office/drawing/2014/main" val="36117325"/>
+                    </a:ext>
+                  </a:extLst>
+                </a:gridCol>
+              </a:tblGrid>
+              <a:tr h="370840">
+                <a:tc>
+                  <a:txBody>
+                    <a:bodyPr/>
+                    <a:lstStyle/>
+                    <a:p>
+                      <a:r>
+                        <a:rPr lang="en-US" dirty="0">
+                          <a:solidFill>
+                            <a:schemeClr val="tx1"/>
+                          </a:solidFill>
+                        </a:rPr>
+                        <a:t>4</a:t>
+                      </a:r>
+                    </a:p>
+                  </a:txBody>
+                  <a:tcPr>
+                    <a:solidFill>
+                      <a:schemeClr val="bg1">
+                        <a:lumMod val="75000"/>
+                      </a:schemeClr>
+                    </a:solidFill>
+                  </a:tcPr>
+                </a:tc>
+                <a:tc>
+                  <a:txBody>
+                    <a:bodyPr/>
+                    <a:lstStyle/>
+                    <a:p>
+                      <a:r>
+                        <a:rPr lang="en-US" dirty="0">
+                          <a:solidFill>
+                            <a:schemeClr val="tx1"/>
+                          </a:solidFill>
+                        </a:rPr>
+                        <a:t>2</a:t>
+                      </a:r>
+                    </a:p>
+                  </a:txBody>
+                  <a:tcPr>
+                    <a:solidFill>
+                      <a:schemeClr val="bg1">
+                        <a:lumMod val="75000"/>
+                      </a:schemeClr>
+                    </a:solidFill>
+                  </a:tcPr>
+                </a:tc>
+                <a:tc>
+                  <a:txBody>
+                    <a:bodyPr/>
+                    <a:lstStyle/>
+                    <a:p>
+                      <a:r>
+                        <a:rPr lang="en-US" dirty="0">
+                          <a:solidFill>
+                            <a:schemeClr val="tx1"/>
+                          </a:solidFill>
+                        </a:rPr>
+                        <a:t>0</a:t>
+                      </a:r>
+                    </a:p>
+                  </a:txBody>
+                  <a:tcPr>
+                    <a:solidFill>
+                      <a:schemeClr val="bg1">
+                        <a:lumMod val="75000"/>
+                      </a:schemeClr>
+                    </a:solidFill>
+                  </a:tcPr>
+                </a:tc>
+                <a:tc>
+                  <a:txBody>
+                    <a:bodyPr/>
+                    <a:lstStyle/>
+                    <a:p>
+                      <a:r>
+                        <a:rPr lang="en-US" dirty="0">
+                          <a:solidFill>
+                            <a:schemeClr val="tx1"/>
+                          </a:solidFill>
+                        </a:rPr>
+                        <a:t>0</a:t>
+                      </a:r>
+                    </a:p>
+                  </a:txBody>
+                  <a:tcPr>
+                    <a:solidFill>
+                      <a:schemeClr val="bg1">
+                        <a:lumMod val="75000"/>
+                      </a:schemeClr>
+                    </a:solidFill>
+                  </a:tcPr>
+                </a:tc>
+                <a:tc>
+                  <a:txBody>
+                    <a:bodyPr/>
+                    <a:lstStyle/>
+                    <a:p>
+                      <a:r>
+                        <a:rPr lang="en-US" dirty="0">
+                          <a:solidFill>
+                            <a:schemeClr val="tx1"/>
+                          </a:solidFill>
+                        </a:rPr>
+                        <a:t>0</a:t>
+                      </a:r>
+                    </a:p>
+                  </a:txBody>
+                  <a:tcPr>
+                    <a:solidFill>
+                      <a:schemeClr val="bg1">
+                        <a:lumMod val="75000"/>
+                      </a:schemeClr>
+                    </a:solidFill>
+                  </a:tcPr>
+                </a:tc>
+                <a:tc>
+                  <a:txBody>
+                    <a:bodyPr/>
+                    <a:lstStyle/>
+                    <a:p>
+                      <a:r>
+                        <a:rPr lang="en-US" dirty="0">
+                          <a:solidFill>
+                            <a:schemeClr val="tx1"/>
+                          </a:solidFill>
+                        </a:rPr>
+                        <a:t>0</a:t>
+                      </a:r>
+                    </a:p>
+                  </a:txBody>
+                  <a:tcPr>
+                    <a:solidFill>
+                      <a:schemeClr val="bg1">
+                        <a:lumMod val="75000"/>
+                      </a:schemeClr>
+                    </a:solidFill>
+                  </a:tcPr>
+                </a:tc>
+                <a:tc>
+                  <a:txBody>
+                    <a:bodyPr/>
+                    <a:lstStyle/>
+                    <a:p>
+                      <a:r>
+                        <a:rPr lang="en-US" dirty="0">
+                          <a:solidFill>
+                            <a:schemeClr val="tx1"/>
+                          </a:solidFill>
+                        </a:rPr>
+                        <a:t>0</a:t>
+                      </a:r>
+                    </a:p>
+                  </a:txBody>
+                  <a:tcPr>
+                    <a:solidFill>
+                      <a:schemeClr val="bg1">
+                        <a:lumMod val="75000"/>
+                      </a:schemeClr>
+                    </a:solidFill>
+                  </a:tcPr>
+                </a:tc>
+                <a:tc>
+                  <a:txBody>
+                    <a:bodyPr/>
+                    <a:lstStyle/>
+                    <a:p>
+                      <a:r>
+                        <a:rPr lang="en-US" dirty="0">
+                          <a:solidFill>
+                            <a:schemeClr val="tx1"/>
+                          </a:solidFill>
+                        </a:rPr>
+                        <a:t>0</a:t>
+                      </a:r>
+                    </a:p>
+                  </a:txBody>
+                  <a:tcPr>
+                    <a:solidFill>
+                      <a:schemeClr val="bg1">
+                        <a:lumMod val="75000"/>
+                      </a:schemeClr>
+                    </a:solidFill>
+                  </a:tcPr>
+                </a:tc>
+                <a:tc>
+                  <a:txBody>
+                    <a:bodyPr/>
+                    <a:lstStyle/>
+                    <a:p>
+                      <a:r>
+                        <a:rPr lang="en-US" dirty="0">
+                          <a:solidFill>
+                            <a:schemeClr val="tx1"/>
+                          </a:solidFill>
+                        </a:rPr>
+                        <a:t>0</a:t>
+                      </a:r>
+                    </a:p>
+                  </a:txBody>
+                  <a:tcPr>
+                    <a:solidFill>
+                      <a:schemeClr val="bg1">
+                        <a:lumMod val="75000"/>
+                      </a:schemeClr>
+                    </a:solidFill>
+                  </a:tcPr>
+                </a:tc>
+                <a:tc>
+                  <a:txBody>
+                    <a:bodyPr/>
+                    <a:lstStyle/>
+                    <a:p>
+                      <a:r>
+                        <a:rPr lang="en-US" dirty="0">
+                          <a:solidFill>
+                            <a:schemeClr val="tx1"/>
+                          </a:solidFill>
+                        </a:rPr>
+                        <a:t>0</a:t>
+                      </a:r>
+                    </a:p>
+                  </a:txBody>
+                  <a:tcPr>
+                    <a:solidFill>
+                      <a:schemeClr val="bg1">
+                        <a:lumMod val="75000"/>
+                      </a:schemeClr>
+                    </a:solidFill>
+                  </a:tcPr>
+                </a:tc>
+                <a:extLst>
+                  <a:ext uri="{0D108BD9-81ED-4DB2-BD59-A6C34878D82A}">
+                    <a16:rowId xmlns:a16="http://schemas.microsoft.com/office/drawing/2014/main" val="3352436727"/>
+                  </a:ext>
+                </a:extLst>
+              </a:tr>
+              <a:tr h="370840">
+                <a:tc>
+                  <a:txBody>
+                    <a:bodyPr/>
+                    <a:lstStyle/>
+                    <a:p>
+                      <a:r>
+                        <a:rPr lang="en-US" dirty="0"/>
+                        <a:t>2</a:t>
+                      </a:r>
+                    </a:p>
+                  </a:txBody>
+                  <a:tcPr>
+                    <a:solidFill>
+                      <a:schemeClr val="bg1">
+                        <a:lumMod val="75000"/>
+                      </a:schemeClr>
+                    </a:solidFill>
+                  </a:tcPr>
+                </a:tc>
+                <a:tc>
+                  <a:txBody>
+                    <a:bodyPr/>
+                    <a:lstStyle/>
+                    <a:p>
+                      <a:r>
+                        <a:rPr lang="en-US" dirty="0"/>
+                        <a:t>6</a:t>
+                      </a:r>
+                    </a:p>
+                  </a:txBody>
+                  <a:tcPr>
+                    <a:solidFill>
+                      <a:schemeClr val="bg1">
+                        <a:lumMod val="75000"/>
+                      </a:schemeClr>
+                    </a:solidFill>
+                  </a:tcPr>
+                </a:tc>
+                <a:tc>
+                  <a:txBody>
+                    <a:bodyPr/>
+                    <a:lstStyle/>
+                    <a:p>
+                      <a:r>
+                        <a:rPr lang="en-US" dirty="0"/>
+                        <a:t>2</a:t>
+                      </a:r>
+                    </a:p>
+                  </a:txBody>
+                  <a:tcPr>
+                    <a:solidFill>
+                      <a:schemeClr val="bg1">
+                        <a:lumMod val="75000"/>
+                      </a:schemeClr>
+                    </a:solidFill>
+                  </a:tcPr>
+                </a:tc>
+                <a:tc>
+                  <a:txBody>
+                    <a:bodyPr/>
+                    <a:lstStyle/>
+                    <a:p>
+                      <a:r>
+                        <a:rPr lang="en-US" dirty="0"/>
+                        <a:t>1</a:t>
+                      </a:r>
+                    </a:p>
+                  </a:txBody>
+                  <a:tcPr>
+                    <a:solidFill>
+                      <a:schemeClr val="bg1">
+                        <a:lumMod val="75000"/>
+                      </a:schemeClr>
+                    </a:solidFill>
+                  </a:tcPr>
+                </a:tc>
+                <a:tc>
+                  <a:txBody>
+                    <a:bodyPr/>
+                    <a:lstStyle/>
+                    <a:p>
+                      <a:r>
+                        <a:rPr lang="en-US" dirty="0"/>
+                        <a:t>1</a:t>
+                      </a:r>
+                    </a:p>
+                  </a:txBody>
+                  <a:tcPr>
+                    <a:solidFill>
+                      <a:schemeClr val="bg1">
+                        <a:lumMod val="75000"/>
+                      </a:schemeClr>
+                    </a:solidFill>
+                  </a:tcPr>
+                </a:tc>
+                <a:tc>
+                  <a:txBody>
+                    <a:bodyPr/>
+                    <a:lstStyle/>
+                    <a:p>
+                      <a:r>
+                        <a:rPr lang="en-US" dirty="0"/>
+                        <a:t>5</a:t>
+                      </a:r>
+                    </a:p>
+                  </a:txBody>
+                  <a:tcPr>
+                    <a:solidFill>
+                      <a:schemeClr val="bg1">
+                        <a:lumMod val="75000"/>
+                      </a:schemeClr>
+                    </a:solidFill>
+                  </a:tcPr>
+                </a:tc>
+                <a:tc>
+                  <a:txBody>
+                    <a:bodyPr/>
+                    <a:lstStyle/>
+                    <a:p>
+                      <a:r>
+                        <a:rPr lang="en-US" dirty="0"/>
+                        <a:t>5</a:t>
+                      </a:r>
+                    </a:p>
+                  </a:txBody>
+                  <a:tcPr>
+                    <a:solidFill>
+                      <a:schemeClr val="bg1">
+                        <a:lumMod val="75000"/>
+                      </a:schemeClr>
+                    </a:solidFill>
+                  </a:tcPr>
+                </a:tc>
+                <a:tc>
+                  <a:txBody>
+                    <a:bodyPr/>
+                    <a:lstStyle/>
+                    <a:p>
+                      <a:r>
+                        <a:rPr lang="en-US" dirty="0"/>
+                        <a:t>2</a:t>
+                      </a:r>
+                    </a:p>
+                  </a:txBody>
+                  <a:tcPr>
+                    <a:solidFill>
+                      <a:schemeClr val="bg1">
+                        <a:lumMod val="75000"/>
+                      </a:schemeClr>
+                    </a:solidFill>
+                  </a:tcPr>
+                </a:tc>
+                <a:tc>
+                  <a:txBody>
+                    <a:bodyPr/>
+                    <a:lstStyle/>
+                    <a:p>
+                      <a:r>
+                        <a:rPr lang="en-US" dirty="0"/>
+                        <a:t>4</a:t>
+                      </a:r>
+                    </a:p>
+                  </a:txBody>
+                  <a:tcPr>
+                    <a:solidFill>
+                      <a:schemeClr val="bg1">
+                        <a:lumMod val="75000"/>
+                      </a:schemeClr>
+                    </a:solidFill>
+                  </a:tcPr>
+                </a:tc>
+                <a:tc>
+                  <a:txBody>
+                    <a:bodyPr/>
+                    <a:lstStyle/>
+                    <a:p>
+                      <a:r>
+                        <a:rPr lang="en-US" dirty="0"/>
+                        <a:t>2</a:t>
+                      </a:r>
+                    </a:p>
+                  </a:txBody>
+                  <a:tcPr>
+                    <a:solidFill>
+                      <a:schemeClr val="bg1">
+                        <a:lumMod val="75000"/>
+                      </a:schemeClr>
+                    </a:solidFill>
+                  </a:tcPr>
+                </a:tc>
+                <a:extLst>
+                  <a:ext uri="{0D108BD9-81ED-4DB2-BD59-A6C34878D82A}">
+                    <a16:rowId xmlns:a16="http://schemas.microsoft.com/office/drawing/2014/main" val="2627761320"/>
+                  </a:ext>
+                </a:extLst>
+              </a:tr>
+            </a:tbl>
+          </a:graphicData>
+        </a:graphic>
+      </p:graphicFrame>
+      <p:graphicFrame>
+        <p:nvGraphicFramePr>
+          <p:cNvPr id="3" name="Table 2">
+            <a:extLst>
+              <a:ext uri="{FF2B5EF4-FFF2-40B4-BE49-F238E27FC236}">
+                <a16:creationId xmlns:a16="http://schemas.microsoft.com/office/drawing/2014/main" id="{1C21FF5A-4A89-5D96-833B-B10D893A57FA}"/>
+              </a:ext>
+            </a:extLst>
+          </p:cNvPr>
+          <p:cNvGraphicFramePr>
+            <a:graphicFrameLocks noGrp="1"/>
+          </p:cNvGraphicFramePr>
+          <p:nvPr>
+            <p:extLst>
+              <p:ext uri="{D42A27DB-BD31-4B8C-83A1-F6EECF244321}">
+                <p14:modId xmlns:p14="http://schemas.microsoft.com/office/powerpoint/2010/main" val="1431334994"/>
+              </p:ext>
+            </p:extLst>
+          </p:nvPr>
+        </p:nvGraphicFramePr>
+        <p:xfrm>
+          <a:off x="5279076" y="1724356"/>
+          <a:ext cx="3165660" cy="786384"/>
+        </p:xfrm>
+        <a:graphic>
+          <a:graphicData uri="http://schemas.openxmlformats.org/drawingml/2006/table">
+            <a:tbl>
+              <a:tblPr firstRow="1" bandRow="1">
+                <a:tableStyleId>{5C22544A-7EE6-4342-B048-85BDC9FD1C3A}</a:tableStyleId>
+              </a:tblPr>
+              <a:tblGrid>
+                <a:gridCol w="316566">
+                  <a:extLst>
+                    <a:ext uri="{9D8B030D-6E8A-4147-A177-3AD203B41FA5}">
+                      <a16:colId xmlns:a16="http://schemas.microsoft.com/office/drawing/2014/main" val="2358392549"/>
+                    </a:ext>
+                  </a:extLst>
+                </a:gridCol>
+                <a:gridCol w="316566">
+                  <a:extLst>
+                    <a:ext uri="{9D8B030D-6E8A-4147-A177-3AD203B41FA5}">
+                      <a16:colId xmlns:a16="http://schemas.microsoft.com/office/drawing/2014/main" val="871863438"/>
+                    </a:ext>
+                  </a:extLst>
+                </a:gridCol>
+                <a:gridCol w="316566">
+                  <a:extLst>
+                    <a:ext uri="{9D8B030D-6E8A-4147-A177-3AD203B41FA5}">
+                      <a16:colId xmlns:a16="http://schemas.microsoft.com/office/drawing/2014/main" val="1436691247"/>
+                    </a:ext>
+                  </a:extLst>
+                </a:gridCol>
+                <a:gridCol w="316566">
+                  <a:extLst>
+                    <a:ext uri="{9D8B030D-6E8A-4147-A177-3AD203B41FA5}">
+                      <a16:colId xmlns:a16="http://schemas.microsoft.com/office/drawing/2014/main" val="2617078870"/>
+                    </a:ext>
+                  </a:extLst>
+                </a:gridCol>
+                <a:gridCol w="316566">
+                  <a:extLst>
+                    <a:ext uri="{9D8B030D-6E8A-4147-A177-3AD203B41FA5}">
+                      <a16:colId xmlns:a16="http://schemas.microsoft.com/office/drawing/2014/main" val="181329175"/>
+                    </a:ext>
+                  </a:extLst>
+                </a:gridCol>
+                <a:gridCol w="316566">
+                  <a:extLst>
+                    <a:ext uri="{9D8B030D-6E8A-4147-A177-3AD203B41FA5}">
+                      <a16:colId xmlns:a16="http://schemas.microsoft.com/office/drawing/2014/main" val="2895307247"/>
+                    </a:ext>
+                  </a:extLst>
+                </a:gridCol>
+                <a:gridCol w="316566">
+                  <a:extLst>
+                    <a:ext uri="{9D8B030D-6E8A-4147-A177-3AD203B41FA5}">
+                      <a16:colId xmlns:a16="http://schemas.microsoft.com/office/drawing/2014/main" val="1354488270"/>
+                    </a:ext>
+                  </a:extLst>
+                </a:gridCol>
+                <a:gridCol w="316566">
+                  <a:extLst>
+                    <a:ext uri="{9D8B030D-6E8A-4147-A177-3AD203B41FA5}">
+                      <a16:colId xmlns:a16="http://schemas.microsoft.com/office/drawing/2014/main" val="651173928"/>
+                    </a:ext>
+                  </a:extLst>
+                </a:gridCol>
+                <a:gridCol w="316566">
+                  <a:extLst>
+                    <a:ext uri="{9D8B030D-6E8A-4147-A177-3AD203B41FA5}">
+                      <a16:colId xmlns:a16="http://schemas.microsoft.com/office/drawing/2014/main" val="437583720"/>
+                    </a:ext>
+                  </a:extLst>
+                </a:gridCol>
+                <a:gridCol w="316566">
+                  <a:extLst>
+                    <a:ext uri="{9D8B030D-6E8A-4147-A177-3AD203B41FA5}">
+                      <a16:colId xmlns:a16="http://schemas.microsoft.com/office/drawing/2014/main" val="36117325"/>
+                    </a:ext>
+                  </a:extLst>
+                </a:gridCol>
+              </a:tblGrid>
+              <a:tr h="370840">
+                <a:tc>
+                  <a:txBody>
+                    <a:bodyPr/>
+                    <a:lstStyle/>
+                    <a:p>
+                      <a:r>
+                        <a:rPr lang="en-US" dirty="0">
+                          <a:solidFill>
+                            <a:schemeClr val="tx1"/>
+                          </a:solidFill>
+                        </a:rPr>
+                        <a:t>4</a:t>
+                      </a:r>
+                    </a:p>
+                  </a:txBody>
+                  <a:tcPr>
+                    <a:solidFill>
+                      <a:schemeClr val="bg1">
+                        <a:lumMod val="75000"/>
+                      </a:schemeClr>
+                    </a:solidFill>
+                  </a:tcPr>
+                </a:tc>
+                <a:tc>
+                  <a:txBody>
+                    <a:bodyPr/>
+                    <a:lstStyle/>
+                    <a:p>
+                      <a:r>
+                        <a:rPr lang="en-US" dirty="0">
+                          <a:solidFill>
+                            <a:schemeClr val="tx1"/>
+                          </a:solidFill>
+                        </a:rPr>
+                        <a:t>4</a:t>
+                      </a:r>
+                    </a:p>
+                  </a:txBody>
+                  <a:tcPr>
+                    <a:solidFill>
+                      <a:schemeClr val="bg1">
+                        <a:lumMod val="75000"/>
+                      </a:schemeClr>
+                    </a:solidFill>
+                  </a:tcPr>
+                </a:tc>
+                <a:tc>
+                  <a:txBody>
+                    <a:bodyPr/>
+                    <a:lstStyle/>
+                    <a:p>
+                      <a:r>
+                        <a:rPr lang="en-US" dirty="0">
+                          <a:solidFill>
+                            <a:schemeClr val="tx1"/>
+                          </a:solidFill>
+                        </a:rPr>
+                        <a:t>2</a:t>
+                      </a:r>
+                    </a:p>
+                  </a:txBody>
+                  <a:tcPr>
+                    <a:solidFill>
+                      <a:schemeClr val="bg1">
+                        <a:lumMod val="75000"/>
+                      </a:schemeClr>
+                    </a:solidFill>
+                  </a:tcPr>
+                </a:tc>
+                <a:tc>
+                  <a:txBody>
+                    <a:bodyPr/>
+                    <a:lstStyle/>
+                    <a:p>
+                      <a:r>
+                        <a:rPr lang="en-US" dirty="0">
+                          <a:solidFill>
+                            <a:schemeClr val="tx1"/>
+                          </a:solidFill>
+                        </a:rPr>
+                        <a:t>0</a:t>
+                      </a:r>
+                    </a:p>
+                  </a:txBody>
+                  <a:tcPr>
+                    <a:solidFill>
+                      <a:schemeClr val="bg1">
+                        <a:lumMod val="75000"/>
+                      </a:schemeClr>
+                    </a:solidFill>
+                  </a:tcPr>
+                </a:tc>
+                <a:tc>
+                  <a:txBody>
+                    <a:bodyPr/>
+                    <a:lstStyle/>
+                    <a:p>
+                      <a:r>
+                        <a:rPr lang="en-US" dirty="0">
+                          <a:solidFill>
+                            <a:schemeClr val="tx1"/>
+                          </a:solidFill>
+                        </a:rPr>
+                        <a:t>0</a:t>
+                      </a:r>
+                    </a:p>
+                  </a:txBody>
+                  <a:tcPr>
+                    <a:solidFill>
+                      <a:schemeClr val="bg1">
+                        <a:lumMod val="75000"/>
+                      </a:schemeClr>
+                    </a:solidFill>
+                  </a:tcPr>
+                </a:tc>
+                <a:tc>
+                  <a:txBody>
+                    <a:bodyPr/>
+                    <a:lstStyle/>
+                    <a:p>
+                      <a:r>
+                        <a:rPr lang="en-US" dirty="0">
+                          <a:solidFill>
+                            <a:schemeClr val="tx1"/>
+                          </a:solidFill>
+                        </a:rPr>
+                        <a:t>0</a:t>
+                      </a:r>
+                    </a:p>
+                  </a:txBody>
+                  <a:tcPr>
+                    <a:solidFill>
+                      <a:schemeClr val="bg1">
+                        <a:lumMod val="75000"/>
+                      </a:schemeClr>
+                    </a:solidFill>
+                  </a:tcPr>
+                </a:tc>
+                <a:tc>
+                  <a:txBody>
+                    <a:bodyPr/>
+                    <a:lstStyle/>
+                    <a:p>
+                      <a:r>
+                        <a:rPr lang="en-US" dirty="0">
+                          <a:solidFill>
+                            <a:schemeClr val="tx1"/>
+                          </a:solidFill>
+                        </a:rPr>
+                        <a:t>0</a:t>
+                      </a:r>
+                    </a:p>
+                  </a:txBody>
+                  <a:tcPr>
+                    <a:solidFill>
+                      <a:schemeClr val="bg1">
+                        <a:lumMod val="75000"/>
+                      </a:schemeClr>
+                    </a:solidFill>
+                  </a:tcPr>
+                </a:tc>
+                <a:tc>
+                  <a:txBody>
+                    <a:bodyPr/>
+                    <a:lstStyle/>
+                    <a:p>
+                      <a:r>
+                        <a:rPr lang="en-US" dirty="0">
+                          <a:solidFill>
+                            <a:schemeClr val="tx1"/>
+                          </a:solidFill>
+                        </a:rPr>
+                        <a:t>0</a:t>
+                      </a:r>
+                    </a:p>
+                  </a:txBody>
+                  <a:tcPr>
+                    <a:solidFill>
+                      <a:schemeClr val="bg1">
+                        <a:lumMod val="75000"/>
+                      </a:schemeClr>
+                    </a:solidFill>
+                  </a:tcPr>
+                </a:tc>
+                <a:tc>
+                  <a:txBody>
+                    <a:bodyPr/>
+                    <a:lstStyle/>
+                    <a:p>
+                      <a:r>
+                        <a:rPr lang="en-US" dirty="0">
+                          <a:solidFill>
+                            <a:schemeClr val="tx1"/>
+                          </a:solidFill>
+                        </a:rPr>
+                        <a:t>0</a:t>
+                      </a:r>
+                    </a:p>
+                  </a:txBody>
+                  <a:tcPr>
+                    <a:solidFill>
+                      <a:schemeClr val="bg1">
+                        <a:lumMod val="75000"/>
+                      </a:schemeClr>
+                    </a:solidFill>
+                  </a:tcPr>
+                </a:tc>
+                <a:tc>
+                  <a:txBody>
+                    <a:bodyPr/>
+                    <a:lstStyle/>
+                    <a:p>
+                      <a:r>
+                        <a:rPr lang="en-US" dirty="0">
+                          <a:solidFill>
+                            <a:schemeClr val="tx1"/>
+                          </a:solidFill>
+                        </a:rPr>
+                        <a:t>0</a:t>
+                      </a:r>
+                    </a:p>
+                  </a:txBody>
+                  <a:tcPr>
+                    <a:solidFill>
+                      <a:schemeClr val="bg1">
+                        <a:lumMod val="75000"/>
+                      </a:schemeClr>
+                    </a:solidFill>
+                  </a:tcPr>
+                </a:tc>
+                <a:extLst>
+                  <a:ext uri="{0D108BD9-81ED-4DB2-BD59-A6C34878D82A}">
+                    <a16:rowId xmlns:a16="http://schemas.microsoft.com/office/drawing/2014/main" val="3352436727"/>
+                  </a:ext>
+                </a:extLst>
+              </a:tr>
+              <a:tr h="370840">
+                <a:tc>
+                  <a:txBody>
+                    <a:bodyPr/>
+                    <a:lstStyle/>
+                    <a:p>
+                      <a:r>
+                        <a:rPr lang="en-US" dirty="0"/>
+                        <a:t>2</a:t>
+                      </a:r>
+                    </a:p>
+                  </a:txBody>
+                  <a:tcPr>
+                    <a:solidFill>
+                      <a:schemeClr val="bg1">
+                        <a:lumMod val="75000"/>
+                      </a:schemeClr>
+                    </a:solidFill>
+                  </a:tcPr>
+                </a:tc>
+                <a:tc>
+                  <a:txBody>
+                    <a:bodyPr/>
+                    <a:lstStyle/>
+                    <a:p>
+                      <a:r>
+                        <a:rPr lang="en-US" dirty="0"/>
+                        <a:t>6</a:t>
+                      </a:r>
+                    </a:p>
+                  </a:txBody>
+                  <a:tcPr>
+                    <a:solidFill>
+                      <a:schemeClr val="bg1">
+                        <a:lumMod val="75000"/>
+                      </a:schemeClr>
+                    </a:solidFill>
+                  </a:tcPr>
+                </a:tc>
+                <a:tc>
+                  <a:txBody>
+                    <a:bodyPr/>
+                    <a:lstStyle/>
+                    <a:p>
+                      <a:r>
+                        <a:rPr lang="en-US" dirty="0"/>
+                        <a:t>2</a:t>
+                      </a:r>
+                    </a:p>
+                  </a:txBody>
+                  <a:tcPr>
+                    <a:solidFill>
+                      <a:schemeClr val="bg1">
+                        <a:lumMod val="75000"/>
+                      </a:schemeClr>
+                    </a:solidFill>
+                  </a:tcPr>
+                </a:tc>
+                <a:tc>
+                  <a:txBody>
+                    <a:bodyPr/>
+                    <a:lstStyle/>
+                    <a:p>
+                      <a:r>
+                        <a:rPr lang="en-US" dirty="0"/>
+                        <a:t>1</a:t>
+                      </a:r>
+                    </a:p>
+                  </a:txBody>
+                  <a:tcPr>
+                    <a:solidFill>
+                      <a:schemeClr val="bg1">
+                        <a:lumMod val="75000"/>
+                      </a:schemeClr>
+                    </a:solidFill>
+                  </a:tcPr>
+                </a:tc>
+                <a:tc>
+                  <a:txBody>
+                    <a:bodyPr/>
+                    <a:lstStyle/>
+                    <a:p>
+                      <a:r>
+                        <a:rPr lang="en-US" dirty="0"/>
+                        <a:t>1</a:t>
+                      </a:r>
+                    </a:p>
+                  </a:txBody>
+                  <a:tcPr>
+                    <a:solidFill>
+                      <a:schemeClr val="bg1">
+                        <a:lumMod val="75000"/>
+                      </a:schemeClr>
+                    </a:solidFill>
+                  </a:tcPr>
+                </a:tc>
+                <a:tc>
+                  <a:txBody>
+                    <a:bodyPr/>
+                    <a:lstStyle/>
+                    <a:p>
+                      <a:r>
+                        <a:rPr lang="en-US" dirty="0"/>
+                        <a:t>5</a:t>
+                      </a:r>
+                    </a:p>
+                  </a:txBody>
+                  <a:tcPr>
+                    <a:solidFill>
+                      <a:schemeClr val="bg1">
+                        <a:lumMod val="75000"/>
+                      </a:schemeClr>
+                    </a:solidFill>
+                  </a:tcPr>
+                </a:tc>
+                <a:tc>
+                  <a:txBody>
+                    <a:bodyPr/>
+                    <a:lstStyle/>
+                    <a:p>
+                      <a:r>
+                        <a:rPr lang="en-US" dirty="0"/>
+                        <a:t>5</a:t>
+                      </a:r>
+                    </a:p>
+                  </a:txBody>
+                  <a:tcPr>
+                    <a:solidFill>
+                      <a:schemeClr val="bg1">
+                        <a:lumMod val="75000"/>
+                      </a:schemeClr>
+                    </a:solidFill>
+                  </a:tcPr>
+                </a:tc>
+                <a:tc>
+                  <a:txBody>
+                    <a:bodyPr/>
+                    <a:lstStyle/>
+                    <a:p>
+                      <a:r>
+                        <a:rPr lang="en-US" dirty="0"/>
+                        <a:t>2</a:t>
+                      </a:r>
+                    </a:p>
+                  </a:txBody>
+                  <a:tcPr>
+                    <a:solidFill>
+                      <a:schemeClr val="bg1">
+                        <a:lumMod val="75000"/>
+                      </a:schemeClr>
+                    </a:solidFill>
+                  </a:tcPr>
+                </a:tc>
+                <a:tc>
+                  <a:txBody>
+                    <a:bodyPr/>
+                    <a:lstStyle/>
+                    <a:p>
+                      <a:r>
+                        <a:rPr lang="en-US" dirty="0"/>
+                        <a:t>4</a:t>
+                      </a:r>
+                    </a:p>
+                  </a:txBody>
+                  <a:tcPr>
+                    <a:solidFill>
+                      <a:schemeClr val="bg1">
+                        <a:lumMod val="75000"/>
+                      </a:schemeClr>
+                    </a:solidFill>
+                  </a:tcPr>
+                </a:tc>
+                <a:tc>
+                  <a:txBody>
+                    <a:bodyPr/>
+                    <a:lstStyle/>
+                    <a:p>
+                      <a:r>
+                        <a:rPr lang="en-US" dirty="0"/>
+                        <a:t>2</a:t>
+                      </a:r>
+                    </a:p>
+                  </a:txBody>
+                  <a:tcPr>
+                    <a:solidFill>
+                      <a:schemeClr val="bg1">
+                        <a:lumMod val="75000"/>
+                      </a:schemeClr>
+                    </a:solidFill>
+                  </a:tcPr>
+                </a:tc>
+                <a:extLst>
+                  <a:ext uri="{0D108BD9-81ED-4DB2-BD59-A6C34878D82A}">
+                    <a16:rowId xmlns:a16="http://schemas.microsoft.com/office/drawing/2014/main" val="2627761320"/>
+                  </a:ext>
+                </a:extLst>
+              </a:tr>
+            </a:tbl>
+          </a:graphicData>
+        </a:graphic>
+      </p:graphicFrame>
+      <p:graphicFrame>
+        <p:nvGraphicFramePr>
+          <p:cNvPr id="4" name="Table 3">
+            <a:extLst>
+              <a:ext uri="{FF2B5EF4-FFF2-40B4-BE49-F238E27FC236}">
+                <a16:creationId xmlns:a16="http://schemas.microsoft.com/office/drawing/2014/main" id="{3181B907-4CCB-5EF6-CBDC-6A91AA8C1897}"/>
+              </a:ext>
+            </a:extLst>
+          </p:cNvPr>
+          <p:cNvGraphicFramePr>
+            <a:graphicFrameLocks noGrp="1"/>
+          </p:cNvGraphicFramePr>
+          <p:nvPr>
+            <p:extLst>
+              <p:ext uri="{D42A27DB-BD31-4B8C-83A1-F6EECF244321}">
+                <p14:modId xmlns:p14="http://schemas.microsoft.com/office/powerpoint/2010/main" val="2548542529"/>
+              </p:ext>
+            </p:extLst>
+          </p:nvPr>
+        </p:nvGraphicFramePr>
+        <p:xfrm>
+          <a:off x="5279076" y="2559724"/>
+          <a:ext cx="3165660" cy="786384"/>
+        </p:xfrm>
+        <a:graphic>
+          <a:graphicData uri="http://schemas.openxmlformats.org/drawingml/2006/table">
+            <a:tbl>
+              <a:tblPr firstRow="1" bandRow="1">
+                <a:tableStyleId>{5C22544A-7EE6-4342-B048-85BDC9FD1C3A}</a:tableStyleId>
+              </a:tblPr>
+              <a:tblGrid>
+                <a:gridCol w="316566">
+                  <a:extLst>
+                    <a:ext uri="{9D8B030D-6E8A-4147-A177-3AD203B41FA5}">
+                      <a16:colId xmlns:a16="http://schemas.microsoft.com/office/drawing/2014/main" val="2358392549"/>
+                    </a:ext>
+                  </a:extLst>
+                </a:gridCol>
+                <a:gridCol w="316566">
+                  <a:extLst>
+                    <a:ext uri="{9D8B030D-6E8A-4147-A177-3AD203B41FA5}">
+                      <a16:colId xmlns:a16="http://schemas.microsoft.com/office/drawing/2014/main" val="871863438"/>
+                    </a:ext>
+                  </a:extLst>
+                </a:gridCol>
+                <a:gridCol w="316566">
+                  <a:extLst>
+                    <a:ext uri="{9D8B030D-6E8A-4147-A177-3AD203B41FA5}">
+                      <a16:colId xmlns:a16="http://schemas.microsoft.com/office/drawing/2014/main" val="1436691247"/>
+                    </a:ext>
+                  </a:extLst>
+                </a:gridCol>
+                <a:gridCol w="316566">
+                  <a:extLst>
+                    <a:ext uri="{9D8B030D-6E8A-4147-A177-3AD203B41FA5}">
+                      <a16:colId xmlns:a16="http://schemas.microsoft.com/office/drawing/2014/main" val="2617078870"/>
+                    </a:ext>
+                  </a:extLst>
+                </a:gridCol>
+                <a:gridCol w="316566">
+                  <a:extLst>
+                    <a:ext uri="{9D8B030D-6E8A-4147-A177-3AD203B41FA5}">
+                      <a16:colId xmlns:a16="http://schemas.microsoft.com/office/drawing/2014/main" val="181329175"/>
+                    </a:ext>
+                  </a:extLst>
+                </a:gridCol>
+                <a:gridCol w="316566">
+                  <a:extLst>
+                    <a:ext uri="{9D8B030D-6E8A-4147-A177-3AD203B41FA5}">
+                      <a16:colId xmlns:a16="http://schemas.microsoft.com/office/drawing/2014/main" val="2895307247"/>
+                    </a:ext>
+                  </a:extLst>
+                </a:gridCol>
+                <a:gridCol w="316566">
+                  <a:extLst>
+                    <a:ext uri="{9D8B030D-6E8A-4147-A177-3AD203B41FA5}">
+                      <a16:colId xmlns:a16="http://schemas.microsoft.com/office/drawing/2014/main" val="1354488270"/>
+                    </a:ext>
+                  </a:extLst>
+                </a:gridCol>
+                <a:gridCol w="316566">
+                  <a:extLst>
+                    <a:ext uri="{9D8B030D-6E8A-4147-A177-3AD203B41FA5}">
+                      <a16:colId xmlns:a16="http://schemas.microsoft.com/office/drawing/2014/main" val="651173928"/>
+                    </a:ext>
+                  </a:extLst>
+                </a:gridCol>
+                <a:gridCol w="316566">
+                  <a:extLst>
+                    <a:ext uri="{9D8B030D-6E8A-4147-A177-3AD203B41FA5}">
+                      <a16:colId xmlns:a16="http://schemas.microsoft.com/office/drawing/2014/main" val="437583720"/>
+                    </a:ext>
+                  </a:extLst>
+                </a:gridCol>
+                <a:gridCol w="316566">
+                  <a:extLst>
+                    <a:ext uri="{9D8B030D-6E8A-4147-A177-3AD203B41FA5}">
+                      <a16:colId xmlns:a16="http://schemas.microsoft.com/office/drawing/2014/main" val="36117325"/>
+                    </a:ext>
+                  </a:extLst>
+                </a:gridCol>
+              </a:tblGrid>
+              <a:tr h="370840">
+                <a:tc>
+                  <a:txBody>
+                    <a:bodyPr/>
+                    <a:lstStyle/>
+                    <a:p>
+                      <a:r>
+                        <a:rPr lang="en-US" dirty="0">
+                          <a:solidFill>
+                            <a:schemeClr val="tx1"/>
+                          </a:solidFill>
+                        </a:rPr>
+                        <a:t>2</a:t>
+                      </a:r>
+                    </a:p>
+                  </a:txBody>
+                  <a:tcPr>
+                    <a:solidFill>
+                      <a:schemeClr val="bg1">
+                        <a:lumMod val="75000"/>
+                      </a:schemeClr>
+                    </a:solidFill>
+                  </a:tcPr>
+                </a:tc>
+                <a:tc>
+                  <a:txBody>
+                    <a:bodyPr/>
+                    <a:lstStyle/>
+                    <a:p>
+                      <a:r>
+                        <a:rPr lang="en-US" dirty="0">
+                          <a:solidFill>
+                            <a:schemeClr val="tx1"/>
+                          </a:solidFill>
+                        </a:rPr>
+                        <a:t>4</a:t>
+                      </a:r>
+                    </a:p>
+                  </a:txBody>
+                  <a:tcPr>
+                    <a:solidFill>
+                      <a:schemeClr val="bg1">
+                        <a:lumMod val="75000"/>
+                      </a:schemeClr>
+                    </a:solidFill>
+                  </a:tcPr>
+                </a:tc>
+                <a:tc>
+                  <a:txBody>
+                    <a:bodyPr/>
+                    <a:lstStyle/>
+                    <a:p>
+                      <a:r>
+                        <a:rPr lang="en-US" dirty="0">
+                          <a:solidFill>
+                            <a:schemeClr val="tx1"/>
+                          </a:solidFill>
+                        </a:rPr>
+                        <a:t>4</a:t>
+                      </a:r>
+                    </a:p>
+                  </a:txBody>
+                  <a:tcPr>
+                    <a:solidFill>
+                      <a:schemeClr val="bg1">
+                        <a:lumMod val="75000"/>
+                      </a:schemeClr>
+                    </a:solidFill>
+                  </a:tcPr>
+                </a:tc>
+                <a:tc>
+                  <a:txBody>
+                    <a:bodyPr/>
+                    <a:lstStyle/>
+                    <a:p>
+                      <a:r>
+                        <a:rPr lang="en-US" dirty="0">
+                          <a:solidFill>
+                            <a:schemeClr val="tx1"/>
+                          </a:solidFill>
+                        </a:rPr>
+                        <a:t>2</a:t>
+                      </a:r>
+                    </a:p>
+                  </a:txBody>
+                  <a:tcPr>
+                    <a:solidFill>
+                      <a:schemeClr val="bg1">
+                        <a:lumMod val="75000"/>
+                      </a:schemeClr>
+                    </a:solidFill>
+                  </a:tcPr>
+                </a:tc>
+                <a:tc>
+                  <a:txBody>
+                    <a:bodyPr/>
+                    <a:lstStyle/>
+                    <a:p>
+                      <a:r>
+                        <a:rPr lang="en-US" dirty="0">
+                          <a:solidFill>
+                            <a:schemeClr val="tx1"/>
+                          </a:solidFill>
+                        </a:rPr>
+                        <a:t>0</a:t>
+                      </a:r>
+                    </a:p>
+                  </a:txBody>
+                  <a:tcPr>
+                    <a:solidFill>
+                      <a:schemeClr val="bg1">
+                        <a:lumMod val="75000"/>
+                      </a:schemeClr>
+                    </a:solidFill>
+                  </a:tcPr>
+                </a:tc>
+                <a:tc>
+                  <a:txBody>
+                    <a:bodyPr/>
+                    <a:lstStyle/>
+                    <a:p>
+                      <a:r>
+                        <a:rPr lang="en-US" dirty="0">
+                          <a:solidFill>
+                            <a:schemeClr val="tx1"/>
+                          </a:solidFill>
+                        </a:rPr>
+                        <a:t>0</a:t>
+                      </a:r>
+                    </a:p>
+                  </a:txBody>
+                  <a:tcPr>
+                    <a:solidFill>
+                      <a:schemeClr val="bg1">
+                        <a:lumMod val="75000"/>
+                      </a:schemeClr>
+                    </a:solidFill>
+                  </a:tcPr>
+                </a:tc>
+                <a:tc>
+                  <a:txBody>
+                    <a:bodyPr/>
+                    <a:lstStyle/>
+                    <a:p>
+                      <a:r>
+                        <a:rPr lang="en-US" dirty="0">
+                          <a:solidFill>
+                            <a:schemeClr val="tx1"/>
+                          </a:solidFill>
+                        </a:rPr>
+                        <a:t>0</a:t>
+                      </a:r>
+                    </a:p>
+                  </a:txBody>
+                  <a:tcPr>
+                    <a:solidFill>
+                      <a:schemeClr val="bg1">
+                        <a:lumMod val="75000"/>
+                      </a:schemeClr>
+                    </a:solidFill>
+                  </a:tcPr>
+                </a:tc>
+                <a:tc>
+                  <a:txBody>
+                    <a:bodyPr/>
+                    <a:lstStyle/>
+                    <a:p>
+                      <a:r>
+                        <a:rPr lang="en-US" dirty="0">
+                          <a:solidFill>
+                            <a:schemeClr val="tx1"/>
+                          </a:solidFill>
+                        </a:rPr>
+                        <a:t>0</a:t>
+                      </a:r>
+                    </a:p>
+                  </a:txBody>
+                  <a:tcPr>
+                    <a:solidFill>
+                      <a:schemeClr val="bg1">
+                        <a:lumMod val="75000"/>
+                      </a:schemeClr>
+                    </a:solidFill>
+                  </a:tcPr>
+                </a:tc>
+                <a:tc>
+                  <a:txBody>
+                    <a:bodyPr/>
+                    <a:lstStyle/>
+                    <a:p>
+                      <a:r>
+                        <a:rPr lang="en-US" dirty="0">
+                          <a:solidFill>
+                            <a:schemeClr val="tx1"/>
+                          </a:solidFill>
+                        </a:rPr>
+                        <a:t>0</a:t>
+                      </a:r>
+                    </a:p>
+                  </a:txBody>
+                  <a:tcPr>
+                    <a:solidFill>
+                      <a:schemeClr val="bg1">
+                        <a:lumMod val="75000"/>
+                      </a:schemeClr>
+                    </a:solidFill>
+                  </a:tcPr>
+                </a:tc>
+                <a:tc>
+                  <a:txBody>
+                    <a:bodyPr/>
+                    <a:lstStyle/>
+                    <a:p>
+                      <a:r>
+                        <a:rPr lang="en-US" dirty="0">
+                          <a:solidFill>
+                            <a:schemeClr val="tx1"/>
+                          </a:solidFill>
+                        </a:rPr>
+                        <a:t>0</a:t>
+                      </a:r>
+                    </a:p>
+                  </a:txBody>
+                  <a:tcPr>
+                    <a:solidFill>
+                      <a:schemeClr val="bg1">
+                        <a:lumMod val="75000"/>
+                      </a:schemeClr>
+                    </a:solidFill>
+                  </a:tcPr>
+                </a:tc>
+                <a:extLst>
+                  <a:ext uri="{0D108BD9-81ED-4DB2-BD59-A6C34878D82A}">
+                    <a16:rowId xmlns:a16="http://schemas.microsoft.com/office/drawing/2014/main" val="3352436727"/>
+                  </a:ext>
+                </a:extLst>
+              </a:tr>
+              <a:tr h="370840">
+                <a:tc>
+                  <a:txBody>
+                    <a:bodyPr/>
+                    <a:lstStyle/>
+                    <a:p>
+                      <a:r>
+                        <a:rPr lang="en-US" dirty="0"/>
+                        <a:t>2</a:t>
+                      </a:r>
+                    </a:p>
+                  </a:txBody>
+                  <a:tcPr>
+                    <a:solidFill>
+                      <a:schemeClr val="bg1">
+                        <a:lumMod val="75000"/>
+                      </a:schemeClr>
+                    </a:solidFill>
+                  </a:tcPr>
+                </a:tc>
+                <a:tc>
+                  <a:txBody>
+                    <a:bodyPr/>
+                    <a:lstStyle/>
+                    <a:p>
+                      <a:r>
+                        <a:rPr lang="en-US" dirty="0"/>
+                        <a:t>6</a:t>
+                      </a:r>
+                    </a:p>
+                  </a:txBody>
+                  <a:tcPr>
+                    <a:solidFill>
+                      <a:schemeClr val="bg1">
+                        <a:lumMod val="75000"/>
+                      </a:schemeClr>
+                    </a:solidFill>
+                  </a:tcPr>
+                </a:tc>
+                <a:tc>
+                  <a:txBody>
+                    <a:bodyPr/>
+                    <a:lstStyle/>
+                    <a:p>
+                      <a:r>
+                        <a:rPr lang="en-US" dirty="0"/>
+                        <a:t>2</a:t>
+                      </a:r>
+                    </a:p>
+                  </a:txBody>
+                  <a:tcPr>
+                    <a:solidFill>
+                      <a:schemeClr val="bg1">
+                        <a:lumMod val="75000"/>
+                      </a:schemeClr>
+                    </a:solidFill>
+                  </a:tcPr>
+                </a:tc>
+                <a:tc>
+                  <a:txBody>
+                    <a:bodyPr/>
+                    <a:lstStyle/>
+                    <a:p>
+                      <a:r>
+                        <a:rPr lang="en-US" dirty="0"/>
+                        <a:t>1</a:t>
+                      </a:r>
+                    </a:p>
+                  </a:txBody>
+                  <a:tcPr>
+                    <a:solidFill>
+                      <a:schemeClr val="bg1">
+                        <a:lumMod val="75000"/>
+                      </a:schemeClr>
+                    </a:solidFill>
+                  </a:tcPr>
+                </a:tc>
+                <a:tc>
+                  <a:txBody>
+                    <a:bodyPr/>
+                    <a:lstStyle/>
+                    <a:p>
+                      <a:r>
+                        <a:rPr lang="en-US" dirty="0"/>
+                        <a:t>1</a:t>
+                      </a:r>
+                    </a:p>
+                  </a:txBody>
+                  <a:tcPr>
+                    <a:solidFill>
+                      <a:schemeClr val="bg1">
+                        <a:lumMod val="75000"/>
+                      </a:schemeClr>
+                    </a:solidFill>
+                  </a:tcPr>
+                </a:tc>
+                <a:tc>
+                  <a:txBody>
+                    <a:bodyPr/>
+                    <a:lstStyle/>
+                    <a:p>
+                      <a:r>
+                        <a:rPr lang="en-US" dirty="0"/>
+                        <a:t>5</a:t>
+                      </a:r>
+                    </a:p>
+                  </a:txBody>
+                  <a:tcPr>
+                    <a:solidFill>
+                      <a:schemeClr val="bg1">
+                        <a:lumMod val="75000"/>
+                      </a:schemeClr>
+                    </a:solidFill>
+                  </a:tcPr>
+                </a:tc>
+                <a:tc>
+                  <a:txBody>
+                    <a:bodyPr/>
+                    <a:lstStyle/>
+                    <a:p>
+                      <a:r>
+                        <a:rPr lang="en-US" dirty="0"/>
+                        <a:t>5</a:t>
+                      </a:r>
+                    </a:p>
+                  </a:txBody>
+                  <a:tcPr>
+                    <a:solidFill>
+                      <a:schemeClr val="bg1">
+                        <a:lumMod val="75000"/>
+                      </a:schemeClr>
+                    </a:solidFill>
+                  </a:tcPr>
+                </a:tc>
+                <a:tc>
+                  <a:txBody>
+                    <a:bodyPr/>
+                    <a:lstStyle/>
+                    <a:p>
+                      <a:r>
+                        <a:rPr lang="en-US" dirty="0"/>
+                        <a:t>2</a:t>
+                      </a:r>
+                    </a:p>
+                  </a:txBody>
+                  <a:tcPr>
+                    <a:solidFill>
+                      <a:schemeClr val="bg1">
+                        <a:lumMod val="75000"/>
+                      </a:schemeClr>
+                    </a:solidFill>
+                  </a:tcPr>
+                </a:tc>
+                <a:tc>
+                  <a:txBody>
+                    <a:bodyPr/>
+                    <a:lstStyle/>
+                    <a:p>
+                      <a:r>
+                        <a:rPr lang="en-US" dirty="0"/>
+                        <a:t>4</a:t>
+                      </a:r>
+                    </a:p>
+                  </a:txBody>
+                  <a:tcPr>
+                    <a:solidFill>
+                      <a:schemeClr val="bg1">
+                        <a:lumMod val="75000"/>
+                      </a:schemeClr>
+                    </a:solidFill>
+                  </a:tcPr>
+                </a:tc>
+                <a:tc>
+                  <a:txBody>
+                    <a:bodyPr/>
+                    <a:lstStyle/>
+                    <a:p>
+                      <a:r>
+                        <a:rPr lang="en-US" dirty="0"/>
+                        <a:t>2</a:t>
+                      </a:r>
+                    </a:p>
+                  </a:txBody>
+                  <a:tcPr>
+                    <a:solidFill>
+                      <a:schemeClr val="bg1">
+                        <a:lumMod val="75000"/>
+                      </a:schemeClr>
+                    </a:solidFill>
+                  </a:tcPr>
+                </a:tc>
+                <a:extLst>
+                  <a:ext uri="{0D108BD9-81ED-4DB2-BD59-A6C34878D82A}">
+                    <a16:rowId xmlns:a16="http://schemas.microsoft.com/office/drawing/2014/main" val="2627761320"/>
+                  </a:ext>
+                </a:extLst>
+              </a:tr>
+            </a:tbl>
+          </a:graphicData>
+        </a:graphic>
+      </p:graphicFrame>
+    </p:spTree>
+    <p:extLst>
+      <p:ext uri="{BB962C8B-B14F-4D97-AF65-F5344CB8AC3E}">
+        <p14:creationId xmlns:p14="http://schemas.microsoft.com/office/powerpoint/2010/main" val="1844595782"/>
       </p:ext>
     </p:extLst>
   </p:cSld>
